--- a/leveraged-etf-simulator.pptx
+++ b/leveraged-etf-simulator.pptx
@@ -6,35 +6,36 @@
   </p:sldMasterIdLst>
   <p:sldIdLst>
     <p:sldId id="256" r:id="rId2"/>
-    <p:sldId id="282" r:id="rId3"/>
-    <p:sldId id="283" r:id="rId4"/>
-    <p:sldId id="284" r:id="rId5"/>
-    <p:sldId id="257" r:id="rId6"/>
-    <p:sldId id="263" r:id="rId7"/>
-    <p:sldId id="264" r:id="rId8"/>
-    <p:sldId id="258" r:id="rId9"/>
-    <p:sldId id="266" r:id="rId10"/>
-    <p:sldId id="267" r:id="rId11"/>
-    <p:sldId id="269" r:id="rId12"/>
-    <p:sldId id="272" r:id="rId13"/>
-    <p:sldId id="274" r:id="rId14"/>
-    <p:sldId id="273" r:id="rId15"/>
-    <p:sldId id="275" r:id="rId16"/>
-    <p:sldId id="270" r:id="rId17"/>
-    <p:sldId id="276" r:id="rId18"/>
-    <p:sldId id="277" r:id="rId19"/>
-    <p:sldId id="278" r:id="rId20"/>
-    <p:sldId id="279" r:id="rId21"/>
-    <p:sldId id="280" r:id="rId22"/>
+    <p:sldId id="286" r:id="rId3"/>
+    <p:sldId id="282" r:id="rId4"/>
+    <p:sldId id="283" r:id="rId5"/>
+    <p:sldId id="284" r:id="rId6"/>
+    <p:sldId id="257" r:id="rId7"/>
+    <p:sldId id="263" r:id="rId8"/>
+    <p:sldId id="264" r:id="rId9"/>
+    <p:sldId id="258" r:id="rId10"/>
+    <p:sldId id="266" r:id="rId11"/>
+    <p:sldId id="267" r:id="rId12"/>
+    <p:sldId id="269" r:id="rId13"/>
+    <p:sldId id="272" r:id="rId14"/>
+    <p:sldId id="274" r:id="rId15"/>
+    <p:sldId id="273" r:id="rId16"/>
+    <p:sldId id="275" r:id="rId17"/>
+    <p:sldId id="270" r:id="rId18"/>
+    <p:sldId id="276" r:id="rId19"/>
+    <p:sldId id="277" r:id="rId20"/>
+    <p:sldId id="278" r:id="rId21"/>
+    <p:sldId id="279" r:id="rId22"/>
     <p:sldId id="281" r:id="rId23"/>
-    <p:sldId id="285" r:id="rId24"/>
-    <p:sldId id="271" r:id="rId25"/>
-    <p:sldId id="259" r:id="rId26"/>
-    <p:sldId id="260" r:id="rId27"/>
-    <p:sldId id="261" r:id="rId28"/>
-    <p:sldId id="262" r:id="rId29"/>
-    <p:sldId id="268" r:id="rId30"/>
-    <p:sldId id="265" r:id="rId31"/>
+    <p:sldId id="280" r:id="rId24"/>
+    <p:sldId id="285" r:id="rId25"/>
+    <p:sldId id="271" r:id="rId26"/>
+    <p:sldId id="259" r:id="rId27"/>
+    <p:sldId id="260" r:id="rId28"/>
+    <p:sldId id="261" r:id="rId29"/>
+    <p:sldId id="262" r:id="rId30"/>
+    <p:sldId id="268" r:id="rId31"/>
+    <p:sldId id="265" r:id="rId32"/>
   </p:sldIdLst>
   <p:sldSz cx="12192000" cy="6858000"/>
   <p:notesSz cx="6858000" cy="9144000"/>
@@ -503,7 +504,7 @@
           <a:p>
             <a:fld id="{88EC5CE5-919D-4E97-B8D7-8C4E5846B448}" type="datetimeFigureOut">
               <a:rPr lang="ko-KR" altLang="en-US" smtClean="0"/>
-              <a:t>2026-02-05</a:t>
+              <a:t>2026-02-21</a:t>
             </a:fld>
             <a:endParaRPr lang="ko-KR" altLang="en-US"/>
           </a:p>
@@ -701,7 +702,7 @@
           <a:p>
             <a:fld id="{88EC5CE5-919D-4E97-B8D7-8C4E5846B448}" type="datetimeFigureOut">
               <a:rPr lang="ko-KR" altLang="en-US" smtClean="0"/>
-              <a:t>2026-02-05</a:t>
+              <a:t>2026-02-21</a:t>
             </a:fld>
             <a:endParaRPr lang="ko-KR" altLang="en-US"/>
           </a:p>
@@ -909,7 +910,7 @@
           <a:p>
             <a:fld id="{88EC5CE5-919D-4E97-B8D7-8C4E5846B448}" type="datetimeFigureOut">
               <a:rPr lang="ko-KR" altLang="en-US" smtClean="0"/>
-              <a:t>2026-02-05</a:t>
+              <a:t>2026-02-21</a:t>
             </a:fld>
             <a:endParaRPr lang="ko-KR" altLang="en-US"/>
           </a:p>
@@ -1107,7 +1108,7 @@
           <a:p>
             <a:fld id="{88EC5CE5-919D-4E97-B8D7-8C4E5846B448}" type="datetimeFigureOut">
               <a:rPr lang="ko-KR" altLang="en-US" smtClean="0"/>
-              <a:t>2026-02-05</a:t>
+              <a:t>2026-02-21</a:t>
             </a:fld>
             <a:endParaRPr lang="ko-KR" altLang="en-US"/>
           </a:p>
@@ -1382,7 +1383,7 @@
           <a:p>
             <a:fld id="{88EC5CE5-919D-4E97-B8D7-8C4E5846B448}" type="datetimeFigureOut">
               <a:rPr lang="ko-KR" altLang="en-US" smtClean="0"/>
-              <a:t>2026-02-05</a:t>
+              <a:t>2026-02-21</a:t>
             </a:fld>
             <a:endParaRPr lang="ko-KR" altLang="en-US"/>
           </a:p>
@@ -1647,7 +1648,7 @@
           <a:p>
             <a:fld id="{88EC5CE5-919D-4E97-B8D7-8C4E5846B448}" type="datetimeFigureOut">
               <a:rPr lang="ko-KR" altLang="en-US" smtClean="0"/>
-              <a:t>2026-02-05</a:t>
+              <a:t>2026-02-21</a:t>
             </a:fld>
             <a:endParaRPr lang="ko-KR" altLang="en-US"/>
           </a:p>
@@ -2059,7 +2060,7 @@
           <a:p>
             <a:fld id="{88EC5CE5-919D-4E97-B8D7-8C4E5846B448}" type="datetimeFigureOut">
               <a:rPr lang="ko-KR" altLang="en-US" smtClean="0"/>
-              <a:t>2026-02-05</a:t>
+              <a:t>2026-02-21</a:t>
             </a:fld>
             <a:endParaRPr lang="ko-KR" altLang="en-US"/>
           </a:p>
@@ -2200,7 +2201,7 @@
           <a:p>
             <a:fld id="{88EC5CE5-919D-4E97-B8D7-8C4E5846B448}" type="datetimeFigureOut">
               <a:rPr lang="ko-KR" altLang="en-US" smtClean="0"/>
-              <a:t>2026-02-05</a:t>
+              <a:t>2026-02-21</a:t>
             </a:fld>
             <a:endParaRPr lang="ko-KR" altLang="en-US"/>
           </a:p>
@@ -2313,7 +2314,7 @@
           <a:p>
             <a:fld id="{88EC5CE5-919D-4E97-B8D7-8C4E5846B448}" type="datetimeFigureOut">
               <a:rPr lang="ko-KR" altLang="en-US" smtClean="0"/>
-              <a:t>2026-02-05</a:t>
+              <a:t>2026-02-21</a:t>
             </a:fld>
             <a:endParaRPr lang="ko-KR" altLang="en-US"/>
           </a:p>
@@ -2624,7 +2625,7 @@
           <a:p>
             <a:fld id="{88EC5CE5-919D-4E97-B8D7-8C4E5846B448}" type="datetimeFigureOut">
               <a:rPr lang="ko-KR" altLang="en-US" smtClean="0"/>
-              <a:t>2026-02-05</a:t>
+              <a:t>2026-02-21</a:t>
             </a:fld>
             <a:endParaRPr lang="ko-KR" altLang="en-US"/>
           </a:p>
@@ -2912,7 +2913,7 @@
           <a:p>
             <a:fld id="{88EC5CE5-919D-4E97-B8D7-8C4E5846B448}" type="datetimeFigureOut">
               <a:rPr lang="ko-KR" altLang="en-US" smtClean="0"/>
-              <a:t>2026-02-05</a:t>
+              <a:t>2026-02-21</a:t>
             </a:fld>
             <a:endParaRPr lang="ko-KR" altLang="en-US"/>
           </a:p>
@@ -3153,7 +3154,7 @@
           <a:p>
             <a:fld id="{88EC5CE5-919D-4E97-B8D7-8C4E5846B448}" type="datetimeFigureOut">
               <a:rPr lang="ko-KR" altLang="en-US" smtClean="0"/>
-              <a:t>2026-02-05</a:t>
+              <a:t>2026-02-21</a:t>
             </a:fld>
             <a:endParaRPr lang="ko-KR" altLang="en-US"/>
           </a:p>
@@ -3655,6 +3656,246 @@
           <p:cNvPr id="2" name="제목 1">
             <a:extLst>
               <a:ext uri="{FF2B5EF4-FFF2-40B4-BE49-F238E27FC236}">
+                <a16:creationId xmlns:a16="http://schemas.microsoft.com/office/drawing/2014/main" id="{FAA32591-77B7-1D02-0E87-ABE712FB0818}"/>
+              </a:ext>
+            </a:extLst>
+          </p:cNvPr>
+          <p:cNvSpPr>
+            <a:spLocks noGrp="1"/>
+          </p:cNvSpPr>
+          <p:nvPr>
+            <p:ph type="title"/>
+          </p:nvPr>
+        </p:nvSpPr>
+        <p:spPr/>
+        <p:txBody>
+          <a:bodyPr/>
+          <a:lstStyle/>
+          <a:p>
+            <a:r>
+              <a:rPr lang="ko-KR" altLang="en-US" dirty="0"/>
+              <a:t>커널</a:t>
+            </a:r>
+          </a:p>
+        </p:txBody>
+      </p:sp>
+      <p:sp>
+        <p:nvSpPr>
+          <p:cNvPr id="3" name="내용 개체 틀 2">
+            <a:extLst>
+              <a:ext uri="{FF2B5EF4-FFF2-40B4-BE49-F238E27FC236}">
+                <a16:creationId xmlns:a16="http://schemas.microsoft.com/office/drawing/2014/main" id="{981679E4-CA5C-F547-5166-1DB506225273}"/>
+              </a:ext>
+            </a:extLst>
+          </p:cNvPr>
+          <p:cNvSpPr>
+            <a:spLocks noGrp="1"/>
+          </p:cNvSpPr>
+          <p:nvPr>
+            <p:ph idx="1"/>
+          </p:nvPr>
+        </p:nvSpPr>
+        <p:spPr/>
+        <p:txBody>
+          <a:bodyPr/>
+          <a:lstStyle/>
+          <a:p>
+            <a:r>
+              <a:rPr lang="ko-KR" altLang="en-US" dirty="0"/>
+              <a:t>코드를 실제로 실행하는 파이썬 프로세스</a:t>
+            </a:r>
+            <a:r>
+              <a:rPr lang="en-US" altLang="ko-KR" dirty="0"/>
+              <a:t>(</a:t>
+            </a:r>
+            <a:r>
+              <a:rPr lang="ko-KR" altLang="en-US" dirty="0"/>
+              <a:t>엔진</a:t>
+            </a:r>
+            <a:r>
+              <a:rPr lang="en-US" altLang="ko-KR" dirty="0"/>
+              <a:t>) = </a:t>
+            </a:r>
+            <a:r>
+              <a:rPr lang="ko-KR" altLang="en-US" dirty="0" err="1"/>
+              <a:t>실행기</a:t>
+            </a:r>
+            <a:endParaRPr lang="en-US" altLang="ko-KR" dirty="0"/>
+          </a:p>
+          <a:p>
+            <a:r>
+              <a:rPr lang="en-US" altLang="ko-KR" dirty="0"/>
+              <a:t>Phython3 = </a:t>
+            </a:r>
+            <a:r>
+              <a:rPr lang="ko-KR" altLang="en-US" dirty="0"/>
+              <a:t>현재 가상환경</a:t>
+            </a:r>
+            <a:r>
+              <a:rPr lang="en-US" altLang="ko-KR" dirty="0"/>
+              <a:t>(.</a:t>
+            </a:r>
+            <a:r>
+              <a:rPr lang="en-US" altLang="ko-KR" dirty="0" err="1"/>
+              <a:t>venv</a:t>
+            </a:r>
+            <a:r>
+              <a:rPr lang="en-US" altLang="ko-KR" dirty="0"/>
+              <a:t>)</a:t>
+            </a:r>
+            <a:r>
+              <a:rPr lang="ko-KR" altLang="en-US" dirty="0"/>
+              <a:t>에 묶인 기본 커널</a:t>
+            </a:r>
+            <a:endParaRPr lang="en-US" altLang="ko-KR" dirty="0"/>
+          </a:p>
+          <a:p>
+            <a:r>
+              <a:rPr lang="en-US" altLang="ko-KR" dirty="0"/>
+              <a:t>leveraged-</a:t>
+            </a:r>
+            <a:r>
+              <a:rPr lang="en-US" altLang="ko-KR" dirty="0" err="1"/>
+              <a:t>etf</a:t>
+            </a:r>
+            <a:r>
+              <a:rPr lang="en-US" altLang="ko-KR" dirty="0"/>
+              <a:t> = </a:t>
+            </a:r>
+            <a:r>
+              <a:rPr lang="ko-KR" altLang="en-US" dirty="0"/>
+              <a:t>사용자 영역에 명시적으로 등록한 커널</a:t>
+            </a:r>
+            <a:endParaRPr lang="en-US" altLang="ko-KR" dirty="0"/>
+          </a:p>
+          <a:p>
+            <a:r>
+              <a:rPr lang="ko-KR" altLang="en-US" dirty="0"/>
+              <a:t>그걸 </a:t>
+            </a:r>
+            <a:r>
+              <a:rPr lang="ko-KR" altLang="en-US" dirty="0" err="1"/>
+              <a:t>커스터마이즈하려다</a:t>
+            </a:r>
+            <a:r>
+              <a:rPr lang="en-US" altLang="ko-KR" dirty="0"/>
+              <a:t>,</a:t>
+            </a:r>
+            <a:br>
+              <a:rPr lang="en-US" altLang="ko-KR" dirty="0"/>
+            </a:br>
+            <a:r>
+              <a:rPr lang="ko-KR" altLang="en-US" dirty="0"/>
+              <a:t>프로젝트 구조상 필요 없다는 걸 알게 된 상태</a:t>
+            </a:r>
+            <a:endParaRPr lang="en-US" altLang="ko-KR" dirty="0"/>
+          </a:p>
+          <a:p>
+            <a:r>
+              <a:rPr lang="ko-KR" altLang="en-US" dirty="0"/>
+              <a:t>개발 환경 </a:t>
+            </a:r>
+            <a:r>
+              <a:rPr lang="en-US" altLang="ko-KR" dirty="0"/>
+              <a:t>= .</a:t>
+            </a:r>
+            <a:r>
+              <a:rPr lang="en-US" altLang="ko-KR" dirty="0" err="1"/>
+              <a:t>venv</a:t>
+            </a:r>
+            <a:r>
+              <a:rPr lang="ko-KR" altLang="en-US" dirty="0"/>
+              <a:t> </a:t>
+            </a:r>
+            <a:r>
+              <a:rPr lang="en-US" altLang="ko-KR" dirty="0"/>
+              <a:t>(</a:t>
+            </a:r>
+            <a:r>
+              <a:rPr lang="ko-KR" altLang="en-US" dirty="0"/>
+              <a:t>패키지</a:t>
+            </a:r>
+            <a:r>
+              <a:rPr lang="en-US" altLang="ko-KR" dirty="0"/>
+              <a:t>, </a:t>
+            </a:r>
+            <a:r>
+              <a:rPr lang="ko-KR" altLang="en-US" dirty="0"/>
+              <a:t>라이브러리</a:t>
+            </a:r>
+            <a:r>
+              <a:rPr lang="en-US" altLang="ko-KR" dirty="0"/>
+              <a:t>, </a:t>
+            </a:r>
+            <a:r>
+              <a:rPr lang="ko-KR" altLang="en-US" dirty="0"/>
+              <a:t>버전</a:t>
+            </a:r>
+            <a:r>
+              <a:rPr lang="en-US" altLang="ko-KR" dirty="0"/>
+              <a:t>)</a:t>
+            </a:r>
+          </a:p>
+          <a:p>
+            <a:r>
+              <a:rPr lang="ko-KR" altLang="en-US" dirty="0"/>
+              <a:t>커널 </a:t>
+            </a:r>
+            <a:r>
+              <a:rPr lang="en-US" altLang="ko-KR" dirty="0"/>
+              <a:t>= </a:t>
+            </a:r>
+            <a:r>
+              <a:rPr lang="ko-KR" altLang="en-US" dirty="0"/>
+              <a:t>그 환경의 </a:t>
+            </a:r>
+            <a:r>
+              <a:rPr lang="en-US" altLang="ko-KR" dirty="0"/>
+              <a:t>python </a:t>
+            </a:r>
+            <a:r>
+              <a:rPr lang="ko-KR" altLang="en-US" dirty="0"/>
+              <a:t>실행 프로세스</a:t>
+            </a:r>
+            <a:endParaRPr lang="en-US" altLang="ko-KR" dirty="0"/>
+          </a:p>
+        </p:txBody>
+      </p:sp>
+    </p:spTree>
+    <p:extLst>
+      <p:ext uri="{BB962C8B-B14F-4D97-AF65-F5344CB8AC3E}">
+        <p14:creationId xmlns:p14="http://schemas.microsoft.com/office/powerpoint/2010/main" val="1279614339"/>
+      </p:ext>
+    </p:extLst>
+  </p:cSld>
+  <p:clrMapOvr>
+    <a:masterClrMapping/>
+  </p:clrMapOvr>
+</p:sld>
+</file>
+
+<file path=ppt/slides/slide11.xml><?xml version="1.0" encoding="utf-8"?>
+<p:sld xmlns:a="http://schemas.openxmlformats.org/drawingml/2006/main" xmlns:r="http://schemas.openxmlformats.org/officeDocument/2006/relationships" xmlns:p="http://schemas.openxmlformats.org/presentationml/2006/main">
+  <p:cSld>
+    <p:spTree>
+      <p:nvGrpSpPr>
+        <p:cNvPr id="1" name=""/>
+        <p:cNvGrpSpPr/>
+        <p:nvPr/>
+      </p:nvGrpSpPr>
+      <p:grpSpPr>
+        <a:xfrm>
+          <a:off x="0" y="0"/>
+          <a:ext cx="0" cy="0"/>
+          <a:chOff x="0" y="0"/>
+          <a:chExt cx="0" cy="0"/>
+        </a:xfrm>
+      </p:grpSpPr>
+      <p:sp>
+        <p:nvSpPr>
+          <p:cNvPr id="2" name="제목 1">
+            <a:extLst>
+              <a:ext uri="{FF2B5EF4-FFF2-40B4-BE49-F238E27FC236}">
                 <a16:creationId xmlns:a16="http://schemas.microsoft.com/office/drawing/2014/main" id="{D6ABB784-D80F-17BB-A9C0-93F5B4C12315}"/>
               </a:ext>
             </a:extLst>
@@ -3928,7 +4169,7 @@
 </p:sld>
 </file>
 
-<file path=ppt/slides/slide11.xml><?xml version="1.0" encoding="utf-8"?>
+<file path=ppt/slides/slide12.xml><?xml version="1.0" encoding="utf-8"?>
 <p:sld xmlns:a="http://schemas.openxmlformats.org/drawingml/2006/main" xmlns:r="http://schemas.openxmlformats.org/officeDocument/2006/relationships" xmlns:p="http://schemas.openxmlformats.org/presentationml/2006/main">
   <p:cSld>
     <p:spTree>
@@ -4492,7 +4733,7 @@
 </p:sld>
 </file>
 
-<file path=ppt/slides/slide12.xml><?xml version="1.0" encoding="utf-8"?>
+<file path=ppt/slides/slide13.xml><?xml version="1.0" encoding="utf-8"?>
 <p:sld xmlns:a="http://schemas.openxmlformats.org/drawingml/2006/main" xmlns:r="http://schemas.openxmlformats.org/officeDocument/2006/relationships" xmlns:p="http://schemas.openxmlformats.org/presentationml/2006/main">
   <p:cSld>
     <p:spTree>
@@ -4745,7 +4986,7 @@
 </p:sld>
 </file>
 
-<file path=ppt/slides/slide13.xml><?xml version="1.0" encoding="utf-8"?>
+<file path=ppt/slides/slide14.xml><?xml version="1.0" encoding="utf-8"?>
 <p:sld xmlns:a="http://schemas.openxmlformats.org/drawingml/2006/main" xmlns:r="http://schemas.openxmlformats.org/officeDocument/2006/relationships" xmlns:p="http://schemas.openxmlformats.org/presentationml/2006/main">
   <p:cSld>
     <p:spTree>
@@ -4939,142 +5180,6 @@
     <p:extLst>
       <p:ext uri="{BB962C8B-B14F-4D97-AF65-F5344CB8AC3E}">
         <p14:creationId xmlns:p14="http://schemas.microsoft.com/office/powerpoint/2010/main" val="3465565805"/>
-      </p:ext>
-    </p:extLst>
-  </p:cSld>
-  <p:clrMapOvr>
-    <a:masterClrMapping/>
-  </p:clrMapOvr>
-</p:sld>
-</file>
-
-<file path=ppt/slides/slide14.xml><?xml version="1.0" encoding="utf-8"?>
-<p:sld xmlns:a="http://schemas.openxmlformats.org/drawingml/2006/main" xmlns:r="http://schemas.openxmlformats.org/officeDocument/2006/relationships" xmlns:p="http://schemas.openxmlformats.org/presentationml/2006/main">
-  <p:cSld>
-    <p:spTree>
-      <p:nvGrpSpPr>
-        <p:cNvPr id="1" name=""/>
-        <p:cNvGrpSpPr/>
-        <p:nvPr/>
-      </p:nvGrpSpPr>
-      <p:grpSpPr>
-        <a:xfrm>
-          <a:off x="0" y="0"/>
-          <a:ext cx="0" cy="0"/>
-          <a:chOff x="0" y="0"/>
-          <a:chExt cx="0" cy="0"/>
-        </a:xfrm>
-      </p:grpSpPr>
-      <p:sp>
-        <p:nvSpPr>
-          <p:cNvPr id="2" name="제목 1">
-            <a:extLst>
-              <a:ext uri="{FF2B5EF4-FFF2-40B4-BE49-F238E27FC236}">
-                <a16:creationId xmlns:a16="http://schemas.microsoft.com/office/drawing/2014/main" id="{230BDC6B-D5F7-86B3-5BB6-21A7C5838B17}"/>
-              </a:ext>
-            </a:extLst>
-          </p:cNvPr>
-          <p:cNvSpPr>
-            <a:spLocks noGrp="1"/>
-          </p:cNvSpPr>
-          <p:nvPr>
-            <p:ph type="title"/>
-          </p:nvPr>
-        </p:nvSpPr>
-        <p:spPr/>
-        <p:txBody>
-          <a:bodyPr/>
-          <a:lstStyle/>
-          <a:p>
-            <a:endParaRPr lang="ko-KR" altLang="en-US"/>
-          </a:p>
-        </p:txBody>
-      </p:sp>
-      <p:sp>
-        <p:nvSpPr>
-          <p:cNvPr id="3" name="내용 개체 틀 2">
-            <a:extLst>
-              <a:ext uri="{FF2B5EF4-FFF2-40B4-BE49-F238E27FC236}">
-                <a16:creationId xmlns:a16="http://schemas.microsoft.com/office/drawing/2014/main" id="{D13BE8E2-EEC4-36AF-61C5-F8255024128F}"/>
-              </a:ext>
-            </a:extLst>
-          </p:cNvPr>
-          <p:cNvSpPr>
-            <a:spLocks noGrp="1"/>
-          </p:cNvSpPr>
-          <p:nvPr>
-            <p:ph idx="1"/>
-          </p:nvPr>
-        </p:nvSpPr>
-        <p:spPr/>
-        <p:txBody>
-          <a:bodyPr/>
-          <a:lstStyle/>
-          <a:p>
-            <a:r>
-              <a:rPr lang="ko-KR" altLang="en-US" b="1" dirty="0"/>
-              <a:t>기초자산 </a:t>
-            </a:r>
-            <a:r>
-              <a:rPr lang="en-US" altLang="ko-KR" b="1" dirty="0"/>
-              <a:t>(1x)</a:t>
-            </a:r>
-          </a:p>
-          <a:p>
-            <a:r>
-              <a:rPr lang="en-US" altLang="ko-KR" dirty="0"/>
-              <a:t>100 → 110 → 99</a:t>
-            </a:r>
-          </a:p>
-          <a:p>
-            <a:r>
-              <a:rPr lang="ko-KR" altLang="en-US" dirty="0"/>
-              <a:t>총 수익률 </a:t>
-            </a:r>
-            <a:r>
-              <a:rPr lang="en-US" altLang="ko-KR" dirty="0"/>
-              <a:t>= -1%</a:t>
-            </a:r>
-          </a:p>
-          <a:p>
-            <a:r>
-              <a:rPr lang="en-US" altLang="ko-KR" b="1" dirty="0"/>
-              <a:t>2x </a:t>
-            </a:r>
-            <a:r>
-              <a:rPr lang="ko-KR" altLang="en-US" b="1" dirty="0"/>
-              <a:t>레버리지 </a:t>
-            </a:r>
-            <a:r>
-              <a:rPr lang="en-US" altLang="ko-KR" b="1" dirty="0"/>
-              <a:t>ETF</a:t>
-            </a:r>
-          </a:p>
-          <a:p>
-            <a:r>
-              <a:rPr lang="en-US" altLang="ko-KR" dirty="0"/>
-              <a:t>100 → 120 → 96</a:t>
-            </a:r>
-          </a:p>
-          <a:p>
-            <a:r>
-              <a:rPr lang="ko-KR" altLang="en-US" dirty="0"/>
-              <a:t>총 수익률 </a:t>
-            </a:r>
-            <a:r>
-              <a:rPr lang="en-US" altLang="ko-KR" dirty="0"/>
-              <a:t>= -4%</a:t>
-            </a:r>
-          </a:p>
-          <a:p>
-            <a:endParaRPr lang="ko-KR" altLang="en-US" dirty="0"/>
-          </a:p>
-        </p:txBody>
-      </p:sp>
-    </p:spTree>
-    <p:extLst>
-      <p:ext uri="{BB962C8B-B14F-4D97-AF65-F5344CB8AC3E}">
-        <p14:creationId xmlns:p14="http://schemas.microsoft.com/office/powerpoint/2010/main" val="3712434859"/>
       </p:ext>
     </p:extLst>
   </p:cSld>
@@ -5106,7 +5211,7 @@
           <p:cNvPr id="2" name="제목 1">
             <a:extLst>
               <a:ext uri="{FF2B5EF4-FFF2-40B4-BE49-F238E27FC236}">
-                <a16:creationId xmlns:a16="http://schemas.microsoft.com/office/drawing/2014/main" id="{EA38AC85-09BD-025D-F99C-96CE8FB374E9}"/>
+                <a16:creationId xmlns:a16="http://schemas.microsoft.com/office/drawing/2014/main" id="{230BDC6B-D5F7-86B3-5BB6-21A7C5838B17}"/>
               </a:ext>
             </a:extLst>
           </p:cNvPr>
@@ -5131,7 +5236,7 @@
           <p:cNvPr id="3" name="내용 개체 틀 2">
             <a:extLst>
               <a:ext uri="{FF2B5EF4-FFF2-40B4-BE49-F238E27FC236}">
-                <a16:creationId xmlns:a16="http://schemas.microsoft.com/office/drawing/2014/main" id="{1FF0FE54-B96C-C176-D8FF-DDCCFD7AD067}"/>
+                <a16:creationId xmlns:a16="http://schemas.microsoft.com/office/drawing/2014/main" id="{D13BE8E2-EEC4-36AF-61C5-F8255024128F}"/>
               </a:ext>
             </a:extLst>
           </p:cNvPr>
@@ -5149,87 +5254,57 @@
           <a:p>
             <a:r>
               <a:rPr lang="ko-KR" altLang="en-US" b="1" dirty="0"/>
-              <a:t>이 구조가 만드는 현상</a:t>
-            </a:r>
-          </a:p>
-          <a:p>
+              <a:t>기초자산 </a:t>
+            </a:r>
+            <a:r>
+              <a:rPr lang="en-US" altLang="ko-KR" b="1" dirty="0"/>
+              <a:t>(1x)</a:t>
+            </a:r>
+          </a:p>
+          <a:p>
+            <a:r>
+              <a:rPr lang="en-US" altLang="ko-KR" dirty="0"/>
+              <a:t>100 → 110 → 99</a:t>
+            </a:r>
+          </a:p>
+          <a:p>
+            <a:r>
+              <a:rPr lang="ko-KR" altLang="en-US" dirty="0"/>
+              <a:t>총 수익률 </a:t>
+            </a:r>
+            <a:r>
+              <a:rPr lang="en-US" altLang="ko-KR" dirty="0"/>
+              <a:t>= -1%</a:t>
+            </a:r>
+          </a:p>
+          <a:p>
+            <a:r>
+              <a:rPr lang="en-US" altLang="ko-KR" b="1" dirty="0"/>
+              <a:t>2x </a:t>
+            </a:r>
             <a:r>
               <a:rPr lang="ko-KR" altLang="en-US" b="1" dirty="0"/>
-              <a:t>🔹 변동성 드래그 </a:t>
+              <a:t>레버리지 </a:t>
             </a:r>
             <a:r>
               <a:rPr lang="en-US" altLang="ko-KR" b="1" dirty="0"/>
-              <a:t>(Volatility Drag)</a:t>
-            </a:r>
-          </a:p>
-          <a:p>
-            <a:r>
-              <a:rPr lang="ko-KR" altLang="en-US" dirty="0"/>
-              <a:t>위아래 흔들릴수록</a:t>
-            </a:r>
-          </a:p>
-          <a:p>
-            <a:r>
-              <a:rPr lang="ko-KR" altLang="en-US" dirty="0"/>
-              <a:t>레버리지 </a:t>
-            </a:r>
-            <a:r>
-              <a:rPr lang="en-US" altLang="ko-KR" dirty="0"/>
               <a:t>ETF</a:t>
             </a:r>
-            <a:r>
-              <a:rPr lang="ko-KR" altLang="en-US" dirty="0"/>
-              <a:t>는 </a:t>
-            </a:r>
-            <a:r>
-              <a:rPr lang="ko-KR" altLang="en-US" b="1" dirty="0"/>
-              <a:t>점점 깎임</a:t>
-            </a:r>
-            <a:endParaRPr lang="ko-KR" altLang="en-US" dirty="0"/>
-          </a:p>
-          <a:p>
-            <a:r>
-              <a:rPr lang="ko-KR" altLang="en-US" dirty="0"/>
-              <a:t>📉 </a:t>
-            </a:r>
-            <a:r>
-              <a:rPr lang="ko-KR" altLang="en-US" dirty="0" err="1"/>
-              <a:t>횡보장</a:t>
-            </a:r>
-            <a:r>
-              <a:rPr lang="ko-KR" altLang="en-US" dirty="0"/>
-              <a:t> </a:t>
-            </a:r>
-            <a:r>
-              <a:rPr lang="en-US" altLang="ko-KR" dirty="0"/>
-              <a:t>= </a:t>
-            </a:r>
-            <a:r>
-              <a:rPr lang="ko-KR" altLang="en-US" dirty="0"/>
-              <a:t>최악</a:t>
-            </a:r>
-            <a:br>
-              <a:rPr lang="ko-KR" altLang="en-US" dirty="0"/>
-            </a:br>
-            <a:r>
-              <a:rPr lang="ko-KR" altLang="en-US" dirty="0"/>
-              <a:t>📈 완만한 </a:t>
-            </a:r>
-            <a:r>
-              <a:rPr lang="ko-KR" altLang="en-US" dirty="0" err="1"/>
-              <a:t>추세장</a:t>
-            </a:r>
-            <a:r>
-              <a:rPr lang="ko-KR" altLang="en-US" dirty="0"/>
-              <a:t> </a:t>
-            </a:r>
-            <a:r>
-              <a:rPr lang="en-US" altLang="ko-KR" dirty="0"/>
-              <a:t>= </a:t>
-            </a:r>
-            <a:r>
-              <a:rPr lang="ko-KR" altLang="en-US" dirty="0"/>
-              <a:t>유리</a:t>
+          </a:p>
+          <a:p>
+            <a:r>
+              <a:rPr lang="en-US" altLang="ko-KR" dirty="0"/>
+              <a:t>100 → 120 → 96</a:t>
+            </a:r>
+          </a:p>
+          <a:p>
+            <a:r>
+              <a:rPr lang="ko-KR" altLang="en-US" dirty="0"/>
+              <a:t>총 수익률 </a:t>
+            </a:r>
+            <a:r>
+              <a:rPr lang="en-US" altLang="ko-KR" dirty="0"/>
+              <a:t>= -4%</a:t>
             </a:r>
           </a:p>
           <a:p>
@@ -5240,7 +5315,7 @@
     </p:spTree>
     <p:extLst>
       <p:ext uri="{BB962C8B-B14F-4D97-AF65-F5344CB8AC3E}">
-        <p14:creationId xmlns:p14="http://schemas.microsoft.com/office/powerpoint/2010/main" val="2560204458"/>
+        <p14:creationId xmlns:p14="http://schemas.microsoft.com/office/powerpoint/2010/main" val="3712434859"/>
       </p:ext>
     </p:extLst>
   </p:cSld>
@@ -5272,7 +5347,7 @@
           <p:cNvPr id="2" name="제목 1">
             <a:extLst>
               <a:ext uri="{FF2B5EF4-FFF2-40B4-BE49-F238E27FC236}">
-                <a16:creationId xmlns:a16="http://schemas.microsoft.com/office/drawing/2014/main" id="{3BC1843F-9316-B234-D4E1-185FF4AED000}"/>
+                <a16:creationId xmlns:a16="http://schemas.microsoft.com/office/drawing/2014/main" id="{EA38AC85-09BD-025D-F99C-96CE8FB374E9}"/>
               </a:ext>
             </a:extLst>
           </p:cNvPr>
@@ -5288,23 +5363,7 @@
           <a:bodyPr/>
           <a:lstStyle/>
           <a:p>
-            <a:r>
-              <a:rPr lang="ko-KR" altLang="en-US" dirty="0"/>
-              <a:t>레버리지 시뮬레이션에서 왜 보통 </a:t>
-            </a:r>
-            <a:r>
-              <a:rPr lang="en-US" altLang="ko-KR" dirty="0"/>
-              <a:t>Close</a:t>
-            </a:r>
-            <a:r>
-              <a:rPr lang="ko-KR" altLang="en-US" dirty="0"/>
-              <a:t>만 쓰냐</a:t>
-            </a:r>
-            <a:r>
-              <a:rPr lang="en-US" altLang="ko-KR" dirty="0"/>
-              <a:t>?</a:t>
-            </a:r>
-            <a:endParaRPr lang="ko-KR" altLang="en-US" dirty="0"/>
+            <a:endParaRPr lang="ko-KR" altLang="en-US"/>
           </a:p>
         </p:txBody>
       </p:sp>
@@ -5313,7 +5372,7 @@
           <p:cNvPr id="3" name="내용 개체 틀 2">
             <a:extLst>
               <a:ext uri="{FF2B5EF4-FFF2-40B4-BE49-F238E27FC236}">
-                <a16:creationId xmlns:a16="http://schemas.microsoft.com/office/drawing/2014/main" id="{C2A6687A-41C3-D268-E341-DF64EB9AD276}"/>
+                <a16:creationId xmlns:a16="http://schemas.microsoft.com/office/drawing/2014/main" id="{1FF0FE54-B96C-C176-D8FF-DDCCFD7AD067}"/>
               </a:ext>
             </a:extLst>
           </p:cNvPr>
@@ -5330,114 +5389,88 @@
           <a:lstStyle/>
           <a:p>
             <a:r>
+              <a:rPr lang="ko-KR" altLang="en-US" b="1" dirty="0"/>
+              <a:t>이 구조가 만드는 현상</a:t>
+            </a:r>
+          </a:p>
+          <a:p>
+            <a:r>
+              <a:rPr lang="ko-KR" altLang="en-US" b="1" dirty="0"/>
+              <a:t>🔹 변동성 드래그 </a:t>
+            </a:r>
+            <a:r>
               <a:rPr lang="en-US" altLang="ko-KR" b="1" dirty="0"/>
-              <a:t>1️⃣ </a:t>
+              <a:t>(Volatility Drag)</a:t>
+            </a:r>
+          </a:p>
+          <a:p>
+            <a:r>
+              <a:rPr lang="ko-KR" altLang="en-US" dirty="0"/>
+              <a:t>위아래 흔들릴수록</a:t>
+            </a:r>
+          </a:p>
+          <a:p>
+            <a:r>
+              <a:rPr lang="ko-KR" altLang="en-US" dirty="0"/>
+              <a:t>레버리지 </a:t>
+            </a:r>
+            <a:r>
+              <a:rPr lang="en-US" altLang="ko-KR" dirty="0"/>
+              <a:t>ETF</a:t>
+            </a:r>
+            <a:r>
+              <a:rPr lang="ko-KR" altLang="en-US" dirty="0"/>
+              <a:t>는 </a:t>
             </a:r>
             <a:r>
               <a:rPr lang="ko-KR" altLang="en-US" b="1" dirty="0"/>
-              <a:t>레버리지 </a:t>
-            </a:r>
-            <a:r>
-              <a:rPr lang="en-US" altLang="ko-KR" b="1" dirty="0"/>
-              <a:t>ETF</a:t>
-            </a:r>
-            <a:r>
-              <a:rPr lang="ko-KR" altLang="en-US" b="1" dirty="0"/>
-              <a:t>는 일일 </a:t>
-            </a:r>
-            <a:r>
-              <a:rPr lang="ko-KR" altLang="en-US" b="1" dirty="0" err="1"/>
-              <a:t>리밸런싱</a:t>
-            </a:r>
-            <a:endParaRPr lang="ko-KR" altLang="en-US" b="1" dirty="0"/>
-          </a:p>
-          <a:p>
-            <a:r>
-              <a:rPr lang="ko-KR" altLang="en-US" dirty="0"/>
-              <a:t>하루 기준 수익률로 계산</a:t>
-            </a:r>
-          </a:p>
-          <a:p>
-            <a:r>
-              <a:rPr lang="ko-KR" altLang="en-US" dirty="0"/>
-              <a:t>종가 → 다음 종가 수익률이 핵심</a:t>
-            </a:r>
-          </a:p>
-          <a:p>
-            <a:r>
-              <a:rPr lang="en-US" altLang="ko-KR" b="1" dirty="0"/>
-              <a:t>2️⃣ </a:t>
-            </a:r>
-            <a:r>
-              <a:rPr lang="ko-KR" altLang="en-US" b="1" dirty="0"/>
-              <a:t>장중 </a:t>
-            </a:r>
-            <a:r>
-              <a:rPr lang="ko-KR" altLang="en-US" b="1" dirty="0" err="1"/>
-              <a:t>고저가는</a:t>
-            </a:r>
-            <a:r>
-              <a:rPr lang="ko-KR" altLang="en-US" b="1" dirty="0"/>
-              <a:t> “</a:t>
-            </a:r>
-            <a:r>
-              <a:rPr lang="ko-KR" altLang="en-US" b="1" dirty="0" err="1"/>
-              <a:t>노이즈”가</a:t>
-            </a:r>
-            <a:r>
-              <a:rPr lang="ko-KR" altLang="en-US" b="1" dirty="0"/>
-              <a:t> 큼</a:t>
-            </a:r>
-          </a:p>
-          <a:p>
-            <a:r>
-              <a:rPr lang="ko-KR" altLang="en-US" dirty="0"/>
-              <a:t>장중 최고</a:t>
-            </a:r>
-            <a:r>
-              <a:rPr lang="en-US" altLang="ko-KR" dirty="0"/>
-              <a:t>/</a:t>
-            </a:r>
-            <a:r>
-              <a:rPr lang="ko-KR" altLang="en-US" dirty="0"/>
-              <a:t>최저로 레버리지 계산하면</a:t>
-            </a:r>
-          </a:p>
-          <a:p>
-            <a:r>
-              <a:rPr lang="ko-KR" altLang="en-US" dirty="0"/>
-              <a:t>실제 </a:t>
-            </a:r>
-            <a:r>
-              <a:rPr lang="en-US" altLang="ko-KR" dirty="0"/>
-              <a:t>ETF</a:t>
-            </a:r>
-            <a:r>
-              <a:rPr lang="ko-KR" altLang="en-US" dirty="0"/>
-              <a:t>랑 괴리 발생</a:t>
-            </a:r>
-            <a:endParaRPr lang="en-US" altLang="ko-KR" dirty="0"/>
-          </a:p>
-          <a:p>
-            <a:r>
-              <a:rPr lang="ko-KR" altLang="en-US" dirty="0"/>
-              <a:t>그래서 </a:t>
-            </a:r>
-            <a:r>
-              <a:rPr lang="en-US" altLang="ko-KR" dirty="0"/>
-              <a:t>returns = prices["Close"].</a:t>
-            </a:r>
-            <a:r>
-              <a:rPr lang="en-US" altLang="ko-KR" dirty="0" err="1"/>
-              <a:t>pct_change</a:t>
-            </a:r>
-            <a:r>
-              <a:rPr lang="en-US" altLang="ko-KR" dirty="0"/>
-              <a:t>() </a:t>
-            </a:r>
-            <a:r>
-              <a:rPr lang="ko-KR" altLang="en-US" dirty="0"/>
-              <a:t>이 표준</a:t>
+              <a:t>점점 깎임</a:t>
+            </a:r>
+            <a:endParaRPr lang="ko-KR" altLang="en-US" dirty="0"/>
+          </a:p>
+          <a:p>
+            <a:r>
+              <a:rPr lang="ko-KR" altLang="en-US" dirty="0"/>
+              <a:t>📉 </a:t>
+            </a:r>
+            <a:r>
+              <a:rPr lang="ko-KR" altLang="en-US" dirty="0" err="1"/>
+              <a:t>횡보장</a:t>
+            </a:r>
+            <a:r>
+              <a:rPr lang="ko-KR" altLang="en-US" dirty="0"/>
+              <a:t> </a:t>
+            </a:r>
+            <a:r>
+              <a:rPr lang="en-US" altLang="ko-KR" dirty="0"/>
+              <a:t>= </a:t>
+            </a:r>
+            <a:r>
+              <a:rPr lang="ko-KR" altLang="en-US" dirty="0"/>
+              <a:t>최악</a:t>
+            </a:r>
+            <a:br>
+              <a:rPr lang="ko-KR" altLang="en-US" dirty="0"/>
+            </a:br>
+            <a:r>
+              <a:rPr lang="ko-KR" altLang="en-US" dirty="0"/>
+              <a:t>📈 완만한 </a:t>
+            </a:r>
+            <a:r>
+              <a:rPr lang="ko-KR" altLang="en-US" dirty="0" err="1"/>
+              <a:t>추세장</a:t>
+            </a:r>
+            <a:r>
+              <a:rPr lang="ko-KR" altLang="en-US" dirty="0"/>
+              <a:t> </a:t>
+            </a:r>
+            <a:r>
+              <a:rPr lang="en-US" altLang="ko-KR" dirty="0"/>
+              <a:t>= </a:t>
+            </a:r>
+            <a:r>
+              <a:rPr lang="ko-KR" altLang="en-US" dirty="0"/>
+              <a:t>유리</a:t>
             </a:r>
           </a:p>
           <a:p>
@@ -5448,7 +5481,7 @@
     </p:spTree>
     <p:extLst>
       <p:ext uri="{BB962C8B-B14F-4D97-AF65-F5344CB8AC3E}">
-        <p14:creationId xmlns:p14="http://schemas.microsoft.com/office/powerpoint/2010/main" val="3064746876"/>
+        <p14:creationId xmlns:p14="http://schemas.microsoft.com/office/powerpoint/2010/main" val="2560204458"/>
       </p:ext>
     </p:extLst>
   </p:cSld>
@@ -5480,7 +5513,7 @@
           <p:cNvPr id="2" name="제목 1">
             <a:extLst>
               <a:ext uri="{FF2B5EF4-FFF2-40B4-BE49-F238E27FC236}">
-                <a16:creationId xmlns:a16="http://schemas.microsoft.com/office/drawing/2014/main" id="{4B4459E0-DA0D-45DB-C81B-7E98A3A03C63}"/>
+                <a16:creationId xmlns:a16="http://schemas.microsoft.com/office/drawing/2014/main" id="{3BC1843F-9316-B234-D4E1-185FF4AED000}"/>
               </a:ext>
             </a:extLst>
           </p:cNvPr>
@@ -5498,8 +5531,21 @@
           <a:p>
             <a:r>
               <a:rPr lang="ko-KR" altLang="en-US" dirty="0"/>
-              <a:t>시뮬레이션의 목표</a:t>
-            </a:r>
+              <a:t>레버리지 시뮬레이션에서 왜 보통 </a:t>
+            </a:r>
+            <a:r>
+              <a:rPr lang="en-US" altLang="ko-KR" dirty="0"/>
+              <a:t>Close</a:t>
+            </a:r>
+            <a:r>
+              <a:rPr lang="ko-KR" altLang="en-US" dirty="0"/>
+              <a:t>만 쓰냐</a:t>
+            </a:r>
+            <a:r>
+              <a:rPr lang="en-US" altLang="ko-KR" dirty="0"/>
+              <a:t>?</a:t>
+            </a:r>
+            <a:endParaRPr lang="ko-KR" altLang="en-US" dirty="0"/>
           </a:p>
         </p:txBody>
       </p:sp>
@@ -5508,7 +5554,7 @@
           <p:cNvPr id="3" name="내용 개체 틀 2">
             <a:extLst>
               <a:ext uri="{FF2B5EF4-FFF2-40B4-BE49-F238E27FC236}">
-                <a16:creationId xmlns:a16="http://schemas.microsoft.com/office/drawing/2014/main" id="{C33416A0-5FBB-49B4-B363-12ABB40F3513}"/>
+                <a16:creationId xmlns:a16="http://schemas.microsoft.com/office/drawing/2014/main" id="{C2A6687A-41C3-D268-E341-DF64EB9AD276}"/>
               </a:ext>
             </a:extLst>
           </p:cNvPr>
@@ -5525,18 +5571,99 @@
           <a:lstStyle/>
           <a:p>
             <a:r>
-              <a:rPr lang="ko-KR" altLang="en-US" dirty="0"/>
-              <a:t>네가 지금 하는 시뮬레이션은 사실 이걸 확인하는 거야</a:t>
-            </a:r>
-            <a:r>
-              <a:rPr lang="en-US" altLang="ko-KR" dirty="0"/>
-              <a:t>:</a:t>
-            </a:r>
-          </a:p>
-          <a:p>
+              <a:rPr lang="en-US" altLang="ko-KR" b="1" dirty="0"/>
+              <a:t>1️⃣ </a:t>
+            </a:r>
+            <a:r>
+              <a:rPr lang="ko-KR" altLang="en-US" b="1" dirty="0"/>
+              <a:t>레버리지 </a:t>
+            </a:r>
+            <a:r>
+              <a:rPr lang="en-US" altLang="ko-KR" b="1" dirty="0"/>
+              <a:t>ETF</a:t>
+            </a:r>
+            <a:r>
+              <a:rPr lang="ko-KR" altLang="en-US" b="1" dirty="0"/>
+              <a:t>는 일일 </a:t>
+            </a:r>
+            <a:r>
+              <a:rPr lang="ko-KR" altLang="en-US" b="1" dirty="0" err="1"/>
+              <a:t>리밸런싱</a:t>
+            </a:r>
+            <a:endParaRPr lang="ko-KR" altLang="en-US" b="1" dirty="0"/>
+          </a:p>
+          <a:p>
+            <a:r>
+              <a:rPr lang="ko-KR" altLang="en-US" dirty="0"/>
+              <a:t>하루 기준 수익률로 계산</a:t>
+            </a:r>
+          </a:p>
+          <a:p>
+            <a:r>
+              <a:rPr lang="ko-KR" altLang="en-US" dirty="0"/>
+              <a:t>종가 → 다음 종가 수익률이 핵심</a:t>
+            </a:r>
+          </a:p>
+          <a:p>
+            <a:r>
+              <a:rPr lang="en-US" altLang="ko-KR" b="1" dirty="0"/>
+              <a:t>2️⃣ </a:t>
+            </a:r>
+            <a:r>
+              <a:rPr lang="ko-KR" altLang="en-US" b="1" dirty="0"/>
+              <a:t>장중 </a:t>
+            </a:r>
+            <a:r>
+              <a:rPr lang="ko-KR" altLang="en-US" b="1" dirty="0" err="1"/>
+              <a:t>고저가는</a:t>
+            </a:r>
+            <a:r>
+              <a:rPr lang="ko-KR" altLang="en-US" b="1" dirty="0"/>
+              <a:t> “</a:t>
+            </a:r>
+            <a:r>
+              <a:rPr lang="ko-KR" altLang="en-US" b="1" dirty="0" err="1"/>
+              <a:t>노이즈”가</a:t>
+            </a:r>
+            <a:r>
+              <a:rPr lang="ko-KR" altLang="en-US" b="1" dirty="0"/>
+              <a:t> 큼</a:t>
+            </a:r>
+          </a:p>
+          <a:p>
+            <a:r>
+              <a:rPr lang="ko-KR" altLang="en-US" dirty="0"/>
+              <a:t>장중 최고</a:t>
+            </a:r>
+            <a:r>
+              <a:rPr lang="en-US" altLang="ko-KR" dirty="0"/>
+              <a:t>/</a:t>
+            </a:r>
+            <a:r>
+              <a:rPr lang="ko-KR" altLang="en-US" dirty="0"/>
+              <a:t>최저로 레버리지 계산하면</a:t>
+            </a:r>
+          </a:p>
+          <a:p>
+            <a:r>
+              <a:rPr lang="ko-KR" altLang="en-US" dirty="0"/>
+              <a:t>실제 </a:t>
+            </a:r>
+            <a:r>
+              <a:rPr lang="en-US" altLang="ko-KR" dirty="0"/>
+              <a:t>ETF</a:t>
+            </a:r>
+            <a:r>
+              <a:rPr lang="ko-KR" altLang="en-US" dirty="0"/>
+              <a:t>랑 괴리 발생</a:t>
+            </a:r>
             <a:endParaRPr lang="en-US" altLang="ko-KR" dirty="0"/>
           </a:p>
           <a:p>
+            <a:r>
+              <a:rPr lang="ko-KR" altLang="en-US" dirty="0"/>
+              <a:t>그래서 </a:t>
+            </a:r>
             <a:r>
               <a:rPr lang="en-US" altLang="ko-KR" dirty="0"/>
               <a:t>returns = prices["Close"].</a:t>
@@ -5547,64 +5674,11 @@
             </a:r>
             <a:r>
               <a:rPr lang="en-US" altLang="ko-KR" dirty="0"/>
-              <a:t>()</a:t>
-            </a:r>
-          </a:p>
-          <a:p>
-            <a:r>
-              <a:rPr lang="en-US" altLang="ko-KR" dirty="0" err="1"/>
-              <a:t>leveraged_returns</a:t>
-            </a:r>
-            <a:r>
-              <a:rPr lang="en-US" altLang="ko-KR" dirty="0"/>
-              <a:t> = returns * 2</a:t>
-            </a:r>
-          </a:p>
-          <a:p>
-            <a:endParaRPr lang="en-US" altLang="ko-KR" dirty="0"/>
-          </a:p>
-          <a:p>
-            <a:r>
-              <a:rPr lang="ko-KR" altLang="en-US" dirty="0"/>
-              <a:t>그리고 이걸 </a:t>
-            </a:r>
-            <a:r>
-              <a:rPr lang="ko-KR" altLang="en-US" b="1" dirty="0"/>
-              <a:t>매일 누적</a:t>
-            </a:r>
-            <a:r>
-              <a:rPr lang="ko-KR" altLang="en-US" dirty="0"/>
-              <a:t>하면서</a:t>
-            </a:r>
-            <a:r>
-              <a:rPr lang="en-US" altLang="ko-KR" dirty="0"/>
-              <a:t>:</a:t>
-            </a:r>
-          </a:p>
-          <a:p>
-            <a:r>
-              <a:rPr lang="en-US" altLang="ko-KR" dirty="0"/>
-              <a:t>“</a:t>
-            </a:r>
-            <a:r>
-              <a:rPr lang="ko-KR" altLang="en-US" dirty="0"/>
-              <a:t>왜 </a:t>
-            </a:r>
-            <a:r>
-              <a:rPr lang="en-US" altLang="ko-KR" dirty="0"/>
-              <a:t>2</a:t>
-            </a:r>
-            <a:r>
-              <a:rPr lang="ko-KR" altLang="en-US" dirty="0"/>
-              <a:t>배가 안 </a:t>
-            </a:r>
-            <a:r>
-              <a:rPr lang="ko-KR" altLang="en-US" dirty="0" err="1"/>
-              <a:t>되는지”를</a:t>
-            </a:r>
-            <a:r>
-              <a:rPr lang="ko-KR" altLang="en-US" dirty="0"/>
-              <a:t> 눈으로 보는 단계</a:t>
+              <a:t>() </a:t>
+            </a:r>
+            <a:r>
+              <a:rPr lang="ko-KR" altLang="en-US" dirty="0"/>
+              <a:t>이 표준</a:t>
             </a:r>
           </a:p>
           <a:p>
@@ -5615,7 +5689,7 @@
     </p:spTree>
     <p:extLst>
       <p:ext uri="{BB962C8B-B14F-4D97-AF65-F5344CB8AC3E}">
-        <p14:creationId xmlns:p14="http://schemas.microsoft.com/office/powerpoint/2010/main" val="2648910085"/>
+        <p14:creationId xmlns:p14="http://schemas.microsoft.com/office/powerpoint/2010/main" val="3064746876"/>
       </p:ext>
     </p:extLst>
   </p:cSld>
@@ -5647,7 +5721,7 @@
           <p:cNvPr id="2" name="제목 1">
             <a:extLst>
               <a:ext uri="{FF2B5EF4-FFF2-40B4-BE49-F238E27FC236}">
-                <a16:creationId xmlns:a16="http://schemas.microsoft.com/office/drawing/2014/main" id="{725C1DEE-8753-26B4-9AED-BA317C7CADB8}"/>
+                <a16:creationId xmlns:a16="http://schemas.microsoft.com/office/drawing/2014/main" id="{4B4459E0-DA0D-45DB-C81B-7E98A3A03C63}"/>
               </a:ext>
             </a:extLst>
           </p:cNvPr>
@@ -5663,7 +5737,10 @@
           <a:bodyPr/>
           <a:lstStyle/>
           <a:p>
-            <a:endParaRPr lang="ko-KR" altLang="en-US"/>
+            <a:r>
+              <a:rPr lang="ko-KR" altLang="en-US" dirty="0"/>
+              <a:t>시뮬레이션의 목표</a:t>
+            </a:r>
           </a:p>
         </p:txBody>
       </p:sp>
@@ -5672,7 +5749,7 @@
           <p:cNvPr id="3" name="내용 개체 틀 2">
             <a:extLst>
               <a:ext uri="{FF2B5EF4-FFF2-40B4-BE49-F238E27FC236}">
-                <a16:creationId xmlns:a16="http://schemas.microsoft.com/office/drawing/2014/main" id="{E26CD575-9230-DA27-B97A-B902D7303416}"/>
+                <a16:creationId xmlns:a16="http://schemas.microsoft.com/office/drawing/2014/main" id="{C33416A0-5FBB-49B4-B363-12ABB40F3513}"/>
               </a:ext>
             </a:extLst>
           </p:cNvPr>
@@ -5685,10 +5762,21 @@
         </p:nvSpPr>
         <p:spPr/>
         <p:txBody>
-          <a:bodyPr>
-            <a:normAutofit lnSpcReduction="10000"/>
-          </a:bodyPr>
+          <a:bodyPr/>
           <a:lstStyle/>
+          <a:p>
+            <a:r>
+              <a:rPr lang="ko-KR" altLang="en-US" dirty="0"/>
+              <a:t>네가 지금 하는 시뮬레이션은 사실 이걸 확인하는 거야</a:t>
+            </a:r>
+            <a:r>
+              <a:rPr lang="en-US" altLang="ko-KR" dirty="0"/>
+              <a:t>:</a:t>
+            </a:r>
+          </a:p>
+          <a:p>
+            <a:endParaRPr lang="en-US" altLang="ko-KR" dirty="0"/>
+          </a:p>
           <a:p>
             <a:r>
               <a:rPr lang="en-US" altLang="ko-KR" dirty="0"/>
@@ -5706,17 +5794,28 @@
           <a:p>
             <a:r>
               <a:rPr lang="en-US" altLang="ko-KR" dirty="0" err="1"/>
-              <a:t>returns.head</a:t>
-            </a:r>
-            <a:r>
-              <a:rPr lang="en-US" altLang="ko-KR" dirty="0"/>
-              <a:t>()</a:t>
-            </a:r>
-          </a:p>
-          <a:p>
-            <a:r>
-              <a:rPr lang="ko-KR" altLang="en-US" dirty="0"/>
-              <a:t>여기서 봐야 할 포인트</a:t>
+              <a:t>leveraged_returns</a:t>
+            </a:r>
+            <a:r>
+              <a:rPr lang="en-US" altLang="ko-KR" dirty="0"/>
+              <a:t> = returns * 2</a:t>
+            </a:r>
+          </a:p>
+          <a:p>
+            <a:endParaRPr lang="en-US" altLang="ko-KR" dirty="0"/>
+          </a:p>
+          <a:p>
+            <a:r>
+              <a:rPr lang="ko-KR" altLang="en-US" dirty="0"/>
+              <a:t>그리고 이걸 </a:t>
+            </a:r>
+            <a:r>
+              <a:rPr lang="ko-KR" altLang="en-US" b="1" dirty="0"/>
+              <a:t>매일 누적</a:t>
+            </a:r>
+            <a:r>
+              <a:rPr lang="ko-KR" altLang="en-US" dirty="0"/>
+              <a:t>하면서</a:t>
             </a:r>
             <a:r>
               <a:rPr lang="en-US" altLang="ko-KR" dirty="0"/>
@@ -5724,83 +5823,32 @@
             </a:r>
           </a:p>
           <a:p>
-            <a:endParaRPr lang="en-US" altLang="ko-KR" dirty="0"/>
-          </a:p>
-          <a:p>
-            <a:r>
-              <a:rPr lang="ko-KR" altLang="en-US" dirty="0"/>
-              <a:t>첫 줄이 </a:t>
-            </a:r>
-            <a:r>
-              <a:rPr lang="en-US" altLang="ko-KR" dirty="0" err="1"/>
-              <a:t>NaN</a:t>
-            </a:r>
-            <a:r>
-              <a:rPr lang="en-US" altLang="ko-KR" dirty="0"/>
-              <a:t> (</a:t>
-            </a:r>
-            <a:r>
-              <a:rPr lang="ko-KR" altLang="en-US" dirty="0"/>
-              <a:t>정상</a:t>
-            </a:r>
-            <a:r>
-              <a:rPr lang="en-US" altLang="ko-KR" dirty="0"/>
-              <a:t>: </a:t>
-            </a:r>
-            <a:r>
-              <a:rPr lang="ko-KR" altLang="en-US" dirty="0"/>
-              <a:t>기준일이 없어서</a:t>
-            </a:r>
-            <a:r>
-              <a:rPr lang="en-US" altLang="ko-KR" dirty="0"/>
-              <a:t>)</a:t>
-            </a:r>
-          </a:p>
-          <a:p>
-            <a:endParaRPr lang="en-US" altLang="ko-KR" dirty="0"/>
-          </a:p>
-          <a:p>
-            <a:r>
-              <a:rPr lang="ko-KR" altLang="en-US" dirty="0"/>
-              <a:t>나머지는 하루하루 </a:t>
-            </a:r>
-            <a:r>
-              <a:rPr lang="en-US" altLang="ko-KR" dirty="0"/>
-              <a:t>% </a:t>
-            </a:r>
-            <a:r>
-              <a:rPr lang="ko-KR" altLang="en-US" dirty="0"/>
-              <a:t>변화</a:t>
-            </a:r>
-          </a:p>
-          <a:p>
-            <a:endParaRPr lang="ko-KR" altLang="en-US" dirty="0"/>
-          </a:p>
-          <a:p>
-            <a:r>
-              <a:rPr lang="ko-KR" altLang="en-US" dirty="0"/>
-              <a:t>👉 이 </a:t>
-            </a:r>
-            <a:r>
-              <a:rPr lang="en-US" altLang="ko-KR" dirty="0"/>
-              <a:t>returns</a:t>
-            </a:r>
-            <a:r>
-              <a:rPr lang="ko-KR" altLang="en-US" dirty="0"/>
-              <a:t>가 **레버리지 </a:t>
-            </a:r>
-            <a:r>
-              <a:rPr lang="en-US" altLang="ko-KR" dirty="0"/>
-              <a:t>ETF</a:t>
-            </a:r>
-            <a:r>
-              <a:rPr lang="ko-KR" altLang="en-US" dirty="0"/>
-              <a:t>의 “재료”**야</a:t>
-            </a:r>
-            <a:r>
-              <a:rPr lang="en-US" altLang="ko-KR" dirty="0"/>
-              <a:t>.</a:t>
-            </a:r>
+            <a:r>
+              <a:rPr lang="en-US" altLang="ko-KR" dirty="0"/>
+              <a:t>“</a:t>
+            </a:r>
+            <a:r>
+              <a:rPr lang="ko-KR" altLang="en-US" dirty="0"/>
+              <a:t>왜 </a:t>
+            </a:r>
+            <a:r>
+              <a:rPr lang="en-US" altLang="ko-KR" dirty="0"/>
+              <a:t>2</a:t>
+            </a:r>
+            <a:r>
+              <a:rPr lang="ko-KR" altLang="en-US" dirty="0"/>
+              <a:t>배가 안 </a:t>
+            </a:r>
+            <a:r>
+              <a:rPr lang="ko-KR" altLang="en-US" dirty="0" err="1"/>
+              <a:t>되는지”를</a:t>
+            </a:r>
+            <a:r>
+              <a:rPr lang="ko-KR" altLang="en-US" dirty="0"/>
+              <a:t> 눈으로 보는 단계</a:t>
+            </a:r>
+          </a:p>
+          <a:p>
             <a:endParaRPr lang="ko-KR" altLang="en-US" dirty="0"/>
           </a:p>
         </p:txBody>
@@ -5808,7 +5856,7 @@
     </p:spTree>
     <p:extLst>
       <p:ext uri="{BB962C8B-B14F-4D97-AF65-F5344CB8AC3E}">
-        <p14:creationId xmlns:p14="http://schemas.microsoft.com/office/powerpoint/2010/main" val="3882592422"/>
+        <p14:creationId xmlns:p14="http://schemas.microsoft.com/office/powerpoint/2010/main" val="2648910085"/>
       </p:ext>
     </p:extLst>
   </p:cSld>
@@ -5840,6 +5888,400 @@
           <p:cNvPr id="2" name="제목 1">
             <a:extLst>
               <a:ext uri="{FF2B5EF4-FFF2-40B4-BE49-F238E27FC236}">
+                <a16:creationId xmlns:a16="http://schemas.microsoft.com/office/drawing/2014/main" id="{725C1DEE-8753-26B4-9AED-BA317C7CADB8}"/>
+              </a:ext>
+            </a:extLst>
+          </p:cNvPr>
+          <p:cNvSpPr>
+            <a:spLocks noGrp="1"/>
+          </p:cNvSpPr>
+          <p:nvPr>
+            <p:ph type="title"/>
+          </p:nvPr>
+        </p:nvSpPr>
+        <p:spPr/>
+        <p:txBody>
+          <a:bodyPr/>
+          <a:lstStyle/>
+          <a:p>
+            <a:endParaRPr lang="ko-KR" altLang="en-US"/>
+          </a:p>
+        </p:txBody>
+      </p:sp>
+      <p:sp>
+        <p:nvSpPr>
+          <p:cNvPr id="3" name="내용 개체 틀 2">
+            <a:extLst>
+              <a:ext uri="{FF2B5EF4-FFF2-40B4-BE49-F238E27FC236}">
+                <a16:creationId xmlns:a16="http://schemas.microsoft.com/office/drawing/2014/main" id="{E26CD575-9230-DA27-B97A-B902D7303416}"/>
+              </a:ext>
+            </a:extLst>
+          </p:cNvPr>
+          <p:cNvSpPr>
+            <a:spLocks noGrp="1"/>
+          </p:cNvSpPr>
+          <p:nvPr>
+            <p:ph idx="1"/>
+          </p:nvPr>
+        </p:nvSpPr>
+        <p:spPr/>
+        <p:txBody>
+          <a:bodyPr>
+            <a:normAutofit lnSpcReduction="10000"/>
+          </a:bodyPr>
+          <a:lstStyle/>
+          <a:p>
+            <a:r>
+              <a:rPr lang="en-US" altLang="ko-KR" dirty="0"/>
+              <a:t>returns = prices["Close"].</a:t>
+            </a:r>
+            <a:r>
+              <a:rPr lang="en-US" altLang="ko-KR" dirty="0" err="1"/>
+              <a:t>pct_change</a:t>
+            </a:r>
+            <a:r>
+              <a:rPr lang="en-US" altLang="ko-KR" dirty="0"/>
+              <a:t>()</a:t>
+            </a:r>
+          </a:p>
+          <a:p>
+            <a:r>
+              <a:rPr lang="en-US" altLang="ko-KR" dirty="0" err="1"/>
+              <a:t>returns.head</a:t>
+            </a:r>
+            <a:r>
+              <a:rPr lang="en-US" altLang="ko-KR" dirty="0"/>
+              <a:t>()</a:t>
+            </a:r>
+          </a:p>
+          <a:p>
+            <a:r>
+              <a:rPr lang="ko-KR" altLang="en-US" dirty="0"/>
+              <a:t>여기서 봐야 할 포인트</a:t>
+            </a:r>
+            <a:r>
+              <a:rPr lang="en-US" altLang="ko-KR" dirty="0"/>
+              <a:t>:</a:t>
+            </a:r>
+          </a:p>
+          <a:p>
+            <a:endParaRPr lang="en-US" altLang="ko-KR" dirty="0"/>
+          </a:p>
+          <a:p>
+            <a:r>
+              <a:rPr lang="ko-KR" altLang="en-US" dirty="0"/>
+              <a:t>첫 줄이 </a:t>
+            </a:r>
+            <a:r>
+              <a:rPr lang="en-US" altLang="ko-KR" dirty="0" err="1"/>
+              <a:t>NaN</a:t>
+            </a:r>
+            <a:r>
+              <a:rPr lang="en-US" altLang="ko-KR" dirty="0"/>
+              <a:t> (</a:t>
+            </a:r>
+            <a:r>
+              <a:rPr lang="ko-KR" altLang="en-US" dirty="0"/>
+              <a:t>정상</a:t>
+            </a:r>
+            <a:r>
+              <a:rPr lang="en-US" altLang="ko-KR" dirty="0"/>
+              <a:t>: </a:t>
+            </a:r>
+            <a:r>
+              <a:rPr lang="ko-KR" altLang="en-US" dirty="0"/>
+              <a:t>기준일이 없어서</a:t>
+            </a:r>
+            <a:r>
+              <a:rPr lang="en-US" altLang="ko-KR" dirty="0"/>
+              <a:t>)</a:t>
+            </a:r>
+          </a:p>
+          <a:p>
+            <a:endParaRPr lang="en-US" altLang="ko-KR" dirty="0"/>
+          </a:p>
+          <a:p>
+            <a:r>
+              <a:rPr lang="ko-KR" altLang="en-US" dirty="0"/>
+              <a:t>나머지는 하루하루 </a:t>
+            </a:r>
+            <a:r>
+              <a:rPr lang="en-US" altLang="ko-KR" dirty="0"/>
+              <a:t>% </a:t>
+            </a:r>
+            <a:r>
+              <a:rPr lang="ko-KR" altLang="en-US" dirty="0"/>
+              <a:t>변화</a:t>
+            </a:r>
+          </a:p>
+          <a:p>
+            <a:endParaRPr lang="ko-KR" altLang="en-US" dirty="0"/>
+          </a:p>
+          <a:p>
+            <a:r>
+              <a:rPr lang="ko-KR" altLang="en-US" dirty="0"/>
+              <a:t>👉 이 </a:t>
+            </a:r>
+            <a:r>
+              <a:rPr lang="en-US" altLang="ko-KR" dirty="0"/>
+              <a:t>returns</a:t>
+            </a:r>
+            <a:r>
+              <a:rPr lang="ko-KR" altLang="en-US" dirty="0"/>
+              <a:t>가 **레버리지 </a:t>
+            </a:r>
+            <a:r>
+              <a:rPr lang="en-US" altLang="ko-KR" dirty="0"/>
+              <a:t>ETF</a:t>
+            </a:r>
+            <a:r>
+              <a:rPr lang="ko-KR" altLang="en-US" dirty="0"/>
+              <a:t>의 “재료”**야</a:t>
+            </a:r>
+            <a:r>
+              <a:rPr lang="en-US" altLang="ko-KR" dirty="0"/>
+              <a:t>.</a:t>
+            </a:r>
+            <a:endParaRPr lang="ko-KR" altLang="en-US" dirty="0"/>
+          </a:p>
+        </p:txBody>
+      </p:sp>
+    </p:spTree>
+    <p:extLst>
+      <p:ext uri="{BB962C8B-B14F-4D97-AF65-F5344CB8AC3E}">
+        <p14:creationId xmlns:p14="http://schemas.microsoft.com/office/powerpoint/2010/main" val="3882592422"/>
+      </p:ext>
+    </p:extLst>
+  </p:cSld>
+  <p:clrMapOvr>
+    <a:masterClrMapping/>
+  </p:clrMapOvr>
+</p:sld>
+</file>
+
+<file path=ppt/slides/slide2.xml><?xml version="1.0" encoding="utf-8"?>
+<p:sld xmlns:a="http://schemas.openxmlformats.org/drawingml/2006/main" xmlns:r="http://schemas.openxmlformats.org/officeDocument/2006/relationships" xmlns:p="http://schemas.openxmlformats.org/presentationml/2006/main">
+  <p:cSld>
+    <p:spTree>
+      <p:nvGrpSpPr>
+        <p:cNvPr id="1" name=""/>
+        <p:cNvGrpSpPr/>
+        <p:nvPr/>
+      </p:nvGrpSpPr>
+      <p:grpSpPr>
+        <a:xfrm>
+          <a:off x="0" y="0"/>
+          <a:ext cx="0" cy="0"/>
+          <a:chOff x="0" y="0"/>
+          <a:chExt cx="0" cy="0"/>
+        </a:xfrm>
+      </p:grpSpPr>
+      <p:sp>
+        <p:nvSpPr>
+          <p:cNvPr id="2" name="제목 1">
+            <a:extLst>
+              <a:ext uri="{FF2B5EF4-FFF2-40B4-BE49-F238E27FC236}">
+                <a16:creationId xmlns:a16="http://schemas.microsoft.com/office/drawing/2014/main" id="{A70A7527-B02C-F005-34E9-C01074E0F3FF}"/>
+              </a:ext>
+            </a:extLst>
+          </p:cNvPr>
+          <p:cNvSpPr>
+            <a:spLocks noGrp="1"/>
+          </p:cNvSpPr>
+          <p:nvPr>
+            <p:ph type="title"/>
+          </p:nvPr>
+        </p:nvSpPr>
+        <p:spPr/>
+        <p:txBody>
+          <a:bodyPr/>
+          <a:lstStyle/>
+          <a:p>
+            <a:endParaRPr lang="ko-KR" altLang="en-US"/>
+          </a:p>
+        </p:txBody>
+      </p:sp>
+      <mc:AlternateContent xmlns:mc="http://schemas.openxmlformats.org/markup-compatibility/2006">
+        <mc:Choice xmlns:a14="http://schemas.microsoft.com/office/drawing/2010/main" Requires="a14">
+          <p:sp>
+            <p:nvSpPr>
+              <p:cNvPr id="3" name="내용 개체 틀 2">
+                <a:extLst>
+                  <a:ext uri="{FF2B5EF4-FFF2-40B4-BE49-F238E27FC236}">
+                    <a16:creationId xmlns:a16="http://schemas.microsoft.com/office/drawing/2014/main" id="{B906C608-765C-FC0B-73BE-D94068B80E3B}"/>
+                  </a:ext>
+                </a:extLst>
+              </p:cNvPr>
+              <p:cNvSpPr>
+                <a:spLocks noGrp="1"/>
+              </p:cNvSpPr>
+              <p:nvPr>
+                <p:ph idx="1"/>
+              </p:nvPr>
+            </p:nvSpPr>
+            <p:spPr/>
+            <p:txBody>
+              <a:bodyPr/>
+              <a:lstStyle/>
+              <a:p>
+                <a:r>
+                  <a:rPr lang="en-US" altLang="ko-KR" dirty="0"/>
+                  <a:t>Leveraged ETF</a:t>
+                </a:r>
+                <a:r>
+                  <a:rPr lang="ko-KR" altLang="en-US" dirty="0"/>
+                  <a:t>는 가격이 아니라 </a:t>
+                </a:r>
+                <a:r>
+                  <a:rPr lang="ko-KR" altLang="en-US" b="1" dirty="0"/>
+                  <a:t>수익률을 </a:t>
+                </a:r>
+                <a:r>
+                  <a:rPr lang="ko-KR" altLang="en-US" b="1" dirty="0" err="1"/>
+                  <a:t>레버리지하는</a:t>
+                </a:r>
+                <a:r>
+                  <a:rPr lang="ko-KR" altLang="en-US" b="1" dirty="0"/>
+                  <a:t> 상품</a:t>
+                </a:r>
+                <a:endParaRPr lang="en-US" altLang="ko-KR" dirty="0"/>
+              </a:p>
+              <a:p>
+                <a:r>
+                  <a:rPr lang="en-US" altLang="ko-KR" dirty="0"/>
+                  <a:t>Lt​=Lt−1​×(1+k⋅rt​)</a:t>
+                </a:r>
+              </a:p>
+              <a:p>
+                <a14:m>
+                  <m:oMath xmlns:m="http://schemas.openxmlformats.org/officeDocument/2006/math">
+                    <m:sSub>
+                      <m:sSubPr>
+                        <m:ctrlPr>
+                          <a:rPr lang="ar-AE" altLang="ko-KR"/>
+                        </m:ctrlPr>
+                      </m:sSubPr>
+                      <m:e>
+                        <m:r>
+                          <a:rPr lang="ko-KR" altLang="ar-AE" i="1"/>
+                          <m:t>𝑟</m:t>
+                        </m:r>
+                      </m:e>
+                      <m:sub>
+                        <m:r>
+                          <a:rPr lang="ko-KR" altLang="ar-AE" i="1"/>
+                          <m:t>𝑡</m:t>
+                        </m:r>
+                      </m:sub>
+                    </m:sSub>
+                  </m:oMath>
+                </a14:m>
+                <a:r>
+                  <a:rPr lang="ar-AE" altLang="ko-KR" dirty="0"/>
+                  <a:t>= </a:t>
+                </a:r>
+                <a:r>
+                  <a:rPr lang="en-US" altLang="ko-KR" dirty="0" err="1"/>
+                  <a:t>pct_change</a:t>
+                </a:r>
+                <a:r>
+                  <a:rPr lang="en-US" altLang="ko-KR" dirty="0"/>
+                  <a:t>()</a:t>
+                </a:r>
+                <a:r>
+                  <a:rPr lang="ko-KR" altLang="en-US" dirty="0"/>
+                  <a:t>가 계산한 값</a:t>
+                </a:r>
+                <a:endParaRPr lang="en-US" altLang="ko-KR" dirty="0"/>
+              </a:p>
+              <a:p>
+                <a:r>
+                  <a:rPr lang="en-US" altLang="ko-KR" dirty="0"/>
+                  <a:t>k = 2x, 3x </a:t>
+                </a:r>
+                <a:r>
+                  <a:rPr lang="ko-KR" altLang="en-US" dirty="0"/>
+                  <a:t>배율</a:t>
+                </a:r>
+              </a:p>
+            </p:txBody>
+          </p:sp>
+        </mc:Choice>
+        <mc:Fallback>
+          <p:sp>
+            <p:nvSpPr>
+              <p:cNvPr id="3" name="내용 개체 틀 2">
+                <a:extLst>
+                  <a:ext uri="{FF2B5EF4-FFF2-40B4-BE49-F238E27FC236}">
+                    <a16:creationId xmlns:a16="http://schemas.microsoft.com/office/drawing/2014/main" id="{B906C608-765C-FC0B-73BE-D94068B80E3B}"/>
+                  </a:ext>
+                </a:extLst>
+              </p:cNvPr>
+              <p:cNvSpPr>
+                <a:spLocks noGrp="1" noRot="1" noChangeAspect="1" noMove="1" noResize="1" noEditPoints="1" noAdjustHandles="1" noChangeArrowheads="1" noChangeShapeType="1" noTextEdit="1"/>
+              </p:cNvSpPr>
+              <p:nvPr>
+                <p:ph idx="1"/>
+              </p:nvPr>
+            </p:nvSpPr>
+            <p:spPr>
+              <a:blipFill>
+                <a:blip r:embed="rId2"/>
+                <a:stretch>
+                  <a:fillRect l="-1043" t="-2381"/>
+                </a:stretch>
+              </a:blipFill>
+            </p:spPr>
+            <p:txBody>
+              <a:bodyPr/>
+              <a:lstStyle/>
+              <a:p>
+                <a:r>
+                  <a:rPr lang="ko-KR" altLang="en-US">
+                    <a:noFill/>
+                  </a:rPr>
+                  <a:t> </a:t>
+                </a:r>
+              </a:p>
+            </p:txBody>
+          </p:sp>
+        </mc:Fallback>
+      </mc:AlternateContent>
+    </p:spTree>
+    <p:extLst>
+      <p:ext uri="{BB962C8B-B14F-4D97-AF65-F5344CB8AC3E}">
+        <p14:creationId xmlns:p14="http://schemas.microsoft.com/office/powerpoint/2010/main" val="3727260940"/>
+      </p:ext>
+    </p:extLst>
+  </p:cSld>
+  <p:clrMapOvr>
+    <a:masterClrMapping/>
+  </p:clrMapOvr>
+</p:sld>
+</file>
+
+<file path=ppt/slides/slide20.xml><?xml version="1.0" encoding="utf-8"?>
+<p:sld xmlns:a="http://schemas.openxmlformats.org/drawingml/2006/main" xmlns:r="http://schemas.openxmlformats.org/officeDocument/2006/relationships" xmlns:p="http://schemas.openxmlformats.org/presentationml/2006/main">
+  <p:cSld>
+    <p:spTree>
+      <p:nvGrpSpPr>
+        <p:cNvPr id="1" name=""/>
+        <p:cNvGrpSpPr/>
+        <p:nvPr/>
+      </p:nvGrpSpPr>
+      <p:grpSpPr>
+        <a:xfrm>
+          <a:off x="0" y="0"/>
+          <a:ext cx="0" cy="0"/>
+          <a:chOff x="0" y="0"/>
+          <a:chExt cx="0" cy="0"/>
+        </a:xfrm>
+      </p:grpSpPr>
+      <p:sp>
+        <p:nvSpPr>
+          <p:cNvPr id="2" name="제목 1">
+            <a:extLst>
+              <a:ext uri="{FF2B5EF4-FFF2-40B4-BE49-F238E27FC236}">
                 <a16:creationId xmlns:a16="http://schemas.microsoft.com/office/drawing/2014/main" id="{5E0B8651-7214-F265-C4DC-DD652254EEF1}"/>
               </a:ext>
             </a:extLst>
@@ -5940,7 +6382,2687 @@
 </p:sld>
 </file>
 
-<file path=ppt/slides/slide2.xml><?xml version="1.0" encoding="utf-8"?>
+<file path=ppt/slides/slide21.xml><?xml version="1.0" encoding="utf-8"?>
+<p:sld xmlns:a="http://schemas.openxmlformats.org/drawingml/2006/main" xmlns:r="http://schemas.openxmlformats.org/officeDocument/2006/relationships" xmlns:p="http://schemas.openxmlformats.org/presentationml/2006/main">
+  <p:cSld>
+    <p:spTree>
+      <p:nvGrpSpPr>
+        <p:cNvPr id="1" name=""/>
+        <p:cNvGrpSpPr/>
+        <p:nvPr/>
+      </p:nvGrpSpPr>
+      <p:grpSpPr>
+        <a:xfrm>
+          <a:off x="0" y="0"/>
+          <a:ext cx="0" cy="0"/>
+          <a:chOff x="0" y="0"/>
+          <a:chExt cx="0" cy="0"/>
+        </a:xfrm>
+      </p:grpSpPr>
+      <p:sp>
+        <p:nvSpPr>
+          <p:cNvPr id="2" name="제목 1">
+            <a:extLst>
+              <a:ext uri="{FF2B5EF4-FFF2-40B4-BE49-F238E27FC236}">
+                <a16:creationId xmlns:a16="http://schemas.microsoft.com/office/drawing/2014/main" id="{E384A405-1FE1-476A-47A7-A8BEE6299E5A}"/>
+              </a:ext>
+            </a:extLst>
+          </p:cNvPr>
+          <p:cNvSpPr>
+            <a:spLocks noGrp="1"/>
+          </p:cNvSpPr>
+          <p:nvPr>
+            <p:ph type="title"/>
+          </p:nvPr>
+        </p:nvSpPr>
+        <p:spPr/>
+        <p:txBody>
+          <a:bodyPr/>
+          <a:lstStyle/>
+          <a:p>
+            <a:endParaRPr lang="ko-KR" altLang="en-US"/>
+          </a:p>
+        </p:txBody>
+      </p:sp>
+      <p:pic>
+        <p:nvPicPr>
+          <p:cNvPr id="5" name="그림 4" descr="텍스트, 스크린샷, 폰트, 번호이(가) 표시된 사진&#10;&#10;AI 생성 콘텐츠는 정확하지 않을 수 있습니다.">
+            <a:extLst>
+              <a:ext uri="{FF2B5EF4-FFF2-40B4-BE49-F238E27FC236}">
+                <a16:creationId xmlns:a16="http://schemas.microsoft.com/office/drawing/2014/main" id="{4BAB4373-105D-547B-1D92-BA05875FFD5C}"/>
+              </a:ext>
+            </a:extLst>
+          </p:cNvPr>
+          <p:cNvPicPr>
+            <a:picLocks noChangeAspect="1"/>
+          </p:cNvPicPr>
+          <p:nvPr/>
+        </p:nvPicPr>
+        <p:blipFill>
+          <a:blip r:embed="rId2"/>
+          <a:stretch>
+            <a:fillRect/>
+          </a:stretch>
+        </p:blipFill>
+        <p:spPr>
+          <a:xfrm>
+            <a:off x="838200" y="1826358"/>
+            <a:ext cx="3697514" cy="4666517"/>
+          </a:xfrm>
+          <a:prstGeom prst="rect">
+            <a:avLst/>
+          </a:prstGeom>
+        </p:spPr>
+      </p:pic>
+      <p:sp>
+        <p:nvSpPr>
+          <p:cNvPr id="6" name="TextBox 5">
+            <a:extLst>
+              <a:ext uri="{FF2B5EF4-FFF2-40B4-BE49-F238E27FC236}">
+                <a16:creationId xmlns:a16="http://schemas.microsoft.com/office/drawing/2014/main" id="{FE8089A4-EB80-2581-EBAF-72F8C8F43C96}"/>
+              </a:ext>
+            </a:extLst>
+          </p:cNvPr>
+          <p:cNvSpPr txBox="1"/>
+          <p:nvPr/>
+        </p:nvSpPr>
+        <p:spPr>
+          <a:xfrm>
+            <a:off x="5486399" y="3874551"/>
+            <a:ext cx="5205046" cy="1200329"/>
+          </a:xfrm>
+          <a:prstGeom prst="rect">
+            <a:avLst/>
+          </a:prstGeom>
+          <a:noFill/>
+        </p:spPr>
+        <p:txBody>
+          <a:bodyPr wrap="square" rtlCol="0">
+            <a:spAutoFit/>
+          </a:bodyPr>
+          <a:lstStyle/>
+          <a:p>
+            <a:r>
+              <a:rPr lang="en-US" altLang="ko-KR" dirty="0"/>
+              <a:t>0.768377 / 1.282976 ≈ 0.599</a:t>
+            </a:r>
+          </a:p>
+          <a:p>
+            <a:endParaRPr lang="en-US" altLang="ko-KR" dirty="0"/>
+          </a:p>
+          <a:p>
+            <a:r>
+              <a:rPr lang="en-US" altLang="ko-KR" dirty="0"/>
+              <a:t>2026-01-29 </a:t>
+            </a:r>
+            <a:r>
+              <a:rPr lang="ko-KR" altLang="en-US" dirty="0"/>
+              <a:t>이후부터 </a:t>
+            </a:r>
+            <a:r>
+              <a:rPr lang="en-US" altLang="ko-KR" dirty="0"/>
+              <a:t>2026-02-04</a:t>
+            </a:r>
+            <a:r>
+              <a:rPr lang="ko-KR" altLang="en-US" dirty="0"/>
+              <a:t>까지</a:t>
+            </a:r>
+            <a:br>
+              <a:rPr lang="ko-KR" altLang="en-US" dirty="0"/>
+            </a:br>
+            <a:r>
+              <a:rPr lang="en-US" altLang="ko-KR" dirty="0"/>
+              <a:t>2x </a:t>
+            </a:r>
+            <a:r>
+              <a:rPr lang="ko-KR" altLang="en-US" dirty="0"/>
+              <a:t>레버리지 기준으로 약 </a:t>
+            </a:r>
+            <a:r>
+              <a:rPr lang="en-US" altLang="ko-KR" dirty="0"/>
+              <a:t>-40% </a:t>
+            </a:r>
+            <a:r>
+              <a:rPr lang="ko-KR" altLang="en-US" dirty="0"/>
+              <a:t>추가 손실이 났다</a:t>
+            </a:r>
+          </a:p>
+        </p:txBody>
+      </p:sp>
+      <p:sp>
+        <p:nvSpPr>
+          <p:cNvPr id="7" name="TextBox 6">
+            <a:extLst>
+              <a:ext uri="{FF2B5EF4-FFF2-40B4-BE49-F238E27FC236}">
+                <a16:creationId xmlns:a16="http://schemas.microsoft.com/office/drawing/2014/main" id="{D820A18F-5C06-2CBB-7C7D-844B8601A553}"/>
+              </a:ext>
+            </a:extLst>
+          </p:cNvPr>
+          <p:cNvSpPr txBox="1"/>
+          <p:nvPr/>
+        </p:nvSpPr>
+        <p:spPr>
+          <a:xfrm>
+            <a:off x="5486399" y="2182455"/>
+            <a:ext cx="5205046" cy="1200329"/>
+          </a:xfrm>
+          <a:prstGeom prst="rect">
+            <a:avLst/>
+          </a:prstGeom>
+          <a:noFill/>
+        </p:spPr>
+        <p:txBody>
+          <a:bodyPr wrap="square" rtlCol="0">
+            <a:spAutoFit/>
+          </a:bodyPr>
+          <a:lstStyle/>
+          <a:p>
+            <a:r>
+              <a:rPr lang="en-US" altLang="ko-KR" dirty="0"/>
+              <a:t>0.905509  / 1.140673 ≈ 0.793</a:t>
+            </a:r>
+          </a:p>
+          <a:p>
+            <a:endParaRPr lang="en-US" altLang="ko-KR" dirty="0"/>
+          </a:p>
+          <a:p>
+            <a:r>
+              <a:rPr lang="en-US" altLang="ko-KR" dirty="0"/>
+              <a:t>2026-01-29 </a:t>
+            </a:r>
+            <a:r>
+              <a:rPr lang="ko-KR" altLang="en-US" dirty="0"/>
+              <a:t>이후부터 </a:t>
+            </a:r>
+            <a:r>
+              <a:rPr lang="en-US" altLang="ko-KR" dirty="0"/>
+              <a:t>2026-02-04</a:t>
+            </a:r>
+            <a:r>
+              <a:rPr lang="ko-KR" altLang="en-US" dirty="0"/>
+              <a:t>까지</a:t>
+            </a:r>
+            <a:br>
+              <a:rPr lang="ko-KR" altLang="en-US" dirty="0"/>
+            </a:br>
+            <a:r>
+              <a:rPr lang="ko-KR" altLang="en-US" dirty="0"/>
+              <a:t>기본형 기준으로 약 </a:t>
+            </a:r>
+            <a:r>
+              <a:rPr lang="en-US" altLang="ko-KR" dirty="0"/>
+              <a:t>-20% </a:t>
+            </a:r>
+            <a:r>
+              <a:rPr lang="ko-KR" altLang="en-US" dirty="0"/>
+              <a:t>추가 손실이 났다</a:t>
+            </a:r>
+          </a:p>
+        </p:txBody>
+      </p:sp>
+      <p:sp>
+        <p:nvSpPr>
+          <p:cNvPr id="8" name="TextBox 7">
+            <a:extLst>
+              <a:ext uri="{FF2B5EF4-FFF2-40B4-BE49-F238E27FC236}">
+                <a16:creationId xmlns:a16="http://schemas.microsoft.com/office/drawing/2014/main" id="{E8F4BF64-2629-5A0B-8192-EEF334C7D473}"/>
+              </a:ext>
+            </a:extLst>
+          </p:cNvPr>
+          <p:cNvSpPr txBox="1"/>
+          <p:nvPr/>
+        </p:nvSpPr>
+        <p:spPr>
+          <a:xfrm>
+            <a:off x="5209735" y="5566647"/>
+            <a:ext cx="6021200" cy="646331"/>
+          </a:xfrm>
+          <a:prstGeom prst="rect">
+            <a:avLst/>
+          </a:prstGeom>
+          <a:noFill/>
+        </p:spPr>
+        <p:txBody>
+          <a:bodyPr wrap="none" rtlCol="0">
+            <a:spAutoFit/>
+          </a:bodyPr>
+          <a:lstStyle/>
+          <a:p>
+            <a:r>
+              <a:rPr lang="ko-KR" altLang="en-US" dirty="0"/>
+              <a:t>👉 </a:t>
+            </a:r>
+            <a:r>
+              <a:rPr lang="ko-KR" altLang="en-US" b="1" dirty="0"/>
+              <a:t>하락 구간에서 손실이 “비대칭적으로” 커짐</a:t>
+            </a:r>
+            <a:br>
+              <a:rPr lang="ko-KR" altLang="en-US" dirty="0"/>
+            </a:br>
+            <a:r>
+              <a:rPr lang="ko-KR" altLang="en-US" dirty="0"/>
+              <a:t>👉 이게 바로 </a:t>
+            </a:r>
+            <a:r>
+              <a:rPr lang="ko-KR" altLang="en-US" b="1" dirty="0"/>
+              <a:t>변동성 드래그 </a:t>
+            </a:r>
+            <a:r>
+              <a:rPr lang="en-US" altLang="ko-KR" b="1" dirty="0"/>
+              <a:t>+ </a:t>
+            </a:r>
+            <a:r>
+              <a:rPr lang="ko-KR" altLang="en-US" b="1" dirty="0"/>
+              <a:t>일일 레버리지 리셋 효과</a:t>
+            </a:r>
+            <a:endParaRPr lang="ko-KR" altLang="en-US" dirty="0"/>
+          </a:p>
+        </p:txBody>
+      </p:sp>
+    </p:spTree>
+    <p:extLst>
+      <p:ext uri="{BB962C8B-B14F-4D97-AF65-F5344CB8AC3E}">
+        <p14:creationId xmlns:p14="http://schemas.microsoft.com/office/powerpoint/2010/main" val="4142459265"/>
+      </p:ext>
+    </p:extLst>
+  </p:cSld>
+  <p:clrMapOvr>
+    <a:masterClrMapping/>
+  </p:clrMapOvr>
+</p:sld>
+</file>
+
+<file path=ppt/slides/slide22.xml><?xml version="1.0" encoding="utf-8"?>
+<p:sld xmlns:a="http://schemas.openxmlformats.org/drawingml/2006/main" xmlns:r="http://schemas.openxmlformats.org/officeDocument/2006/relationships" xmlns:p="http://schemas.openxmlformats.org/presentationml/2006/main">
+  <p:cSld>
+    <p:spTree>
+      <p:nvGrpSpPr>
+        <p:cNvPr id="1" name=""/>
+        <p:cNvGrpSpPr/>
+        <p:nvPr/>
+      </p:nvGrpSpPr>
+      <p:grpSpPr>
+        <a:xfrm>
+          <a:off x="0" y="0"/>
+          <a:ext cx="0" cy="0"/>
+          <a:chOff x="0" y="0"/>
+          <a:chExt cx="0" cy="0"/>
+        </a:xfrm>
+      </p:grpSpPr>
+      <p:sp>
+        <p:nvSpPr>
+          <p:cNvPr id="2" name="제목 1">
+            <a:extLst>
+              <a:ext uri="{FF2B5EF4-FFF2-40B4-BE49-F238E27FC236}">
+                <a16:creationId xmlns:a16="http://schemas.microsoft.com/office/drawing/2014/main" id="{91CA5165-BC5E-C35D-F731-DC1FD7CDC5BF}"/>
+              </a:ext>
+            </a:extLst>
+          </p:cNvPr>
+          <p:cNvSpPr>
+            <a:spLocks noGrp="1"/>
+          </p:cNvSpPr>
+          <p:nvPr>
+            <p:ph type="title"/>
+          </p:nvPr>
+        </p:nvSpPr>
+        <p:spPr/>
+        <p:txBody>
+          <a:bodyPr/>
+          <a:lstStyle/>
+          <a:p>
+            <a:endParaRPr lang="ko-KR" altLang="en-US"/>
+          </a:p>
+        </p:txBody>
+      </p:sp>
+      <p:sp>
+        <p:nvSpPr>
+          <p:cNvPr id="3" name="내용 개체 틀 2">
+            <a:extLst>
+              <a:ext uri="{FF2B5EF4-FFF2-40B4-BE49-F238E27FC236}">
+                <a16:creationId xmlns:a16="http://schemas.microsoft.com/office/drawing/2014/main" id="{2040F135-7278-5ECE-497E-97ED0A8A0876}"/>
+              </a:ext>
+            </a:extLst>
+          </p:cNvPr>
+          <p:cNvSpPr>
+            <a:spLocks noGrp="1"/>
+          </p:cNvSpPr>
+          <p:nvPr>
+            <p:ph idx="1"/>
+          </p:nvPr>
+        </p:nvSpPr>
+        <p:spPr/>
+        <p:txBody>
+          <a:bodyPr>
+            <a:normAutofit lnSpcReduction="10000"/>
+          </a:bodyPr>
+          <a:lstStyle/>
+          <a:p>
+            <a:r>
+              <a:rPr lang="en-US" altLang="ko-KR" dirty="0"/>
+              <a:t>returns = [0.10, -0.05, 0.02]</a:t>
+            </a:r>
+          </a:p>
+          <a:p>
+            <a:r>
+              <a:rPr lang="en-US" altLang="ko-KR" dirty="0"/>
+              <a:t>Day 1: +10%</a:t>
+            </a:r>
+          </a:p>
+          <a:p>
+            <a:r>
+              <a:rPr lang="en-US" altLang="ko-KR" dirty="0"/>
+              <a:t>Day 2: -5%</a:t>
+            </a:r>
+          </a:p>
+          <a:p>
+            <a:r>
+              <a:rPr lang="en-US" altLang="ko-KR" dirty="0"/>
+              <a:t>Day 3: +2%</a:t>
+            </a:r>
+          </a:p>
+          <a:p>
+            <a:endParaRPr lang="en-US" altLang="ko-KR" dirty="0"/>
+          </a:p>
+          <a:p>
+            <a:r>
+              <a:rPr lang="en-US" altLang="ko-KR" dirty="0"/>
+              <a:t>(1 + returns).</a:t>
+            </a:r>
+            <a:r>
+              <a:rPr lang="en-US" altLang="ko-KR" dirty="0" err="1"/>
+              <a:t>cumprod</a:t>
+            </a:r>
+            <a:r>
+              <a:rPr lang="en-US" altLang="ko-KR" dirty="0"/>
+              <a:t>()</a:t>
+            </a:r>
+          </a:p>
+          <a:p>
+            <a:r>
+              <a:rPr lang="en-US" altLang="ko-KR" dirty="0"/>
+              <a:t>Day 1: 1.10</a:t>
+            </a:r>
+          </a:p>
+          <a:p>
+            <a:r>
+              <a:rPr lang="en-US" altLang="ko-KR" dirty="0"/>
+              <a:t>Day 2: 1.10 × 0.95 = 1.045</a:t>
+            </a:r>
+          </a:p>
+          <a:p>
+            <a:r>
+              <a:rPr lang="en-US" altLang="ko-KR" dirty="0"/>
+              <a:t>Day 3: 1.045 × 1.02 ≈ 1.066</a:t>
+            </a:r>
+          </a:p>
+        </p:txBody>
+      </p:sp>
+    </p:spTree>
+    <p:extLst>
+      <p:ext uri="{BB962C8B-B14F-4D97-AF65-F5344CB8AC3E}">
+        <p14:creationId xmlns:p14="http://schemas.microsoft.com/office/powerpoint/2010/main" val="3700395950"/>
+      </p:ext>
+    </p:extLst>
+  </p:cSld>
+  <p:clrMapOvr>
+    <a:masterClrMapping/>
+  </p:clrMapOvr>
+</p:sld>
+</file>
+
+<file path=ppt/slides/slide23.xml><?xml version="1.0" encoding="utf-8"?>
+<p:sld xmlns:a="http://schemas.openxmlformats.org/drawingml/2006/main" xmlns:r="http://schemas.openxmlformats.org/officeDocument/2006/relationships" xmlns:p="http://schemas.openxmlformats.org/presentationml/2006/main">
+  <p:cSld>
+    <p:spTree>
+      <p:nvGrpSpPr>
+        <p:cNvPr id="1" name=""/>
+        <p:cNvGrpSpPr/>
+        <p:nvPr/>
+      </p:nvGrpSpPr>
+      <p:grpSpPr>
+        <a:xfrm>
+          <a:off x="0" y="0"/>
+          <a:ext cx="0" cy="0"/>
+          <a:chOff x="0" y="0"/>
+          <a:chExt cx="0" cy="0"/>
+        </a:xfrm>
+      </p:grpSpPr>
+      <p:sp>
+        <p:nvSpPr>
+          <p:cNvPr id="2" name="제목 1">
+            <a:extLst>
+              <a:ext uri="{FF2B5EF4-FFF2-40B4-BE49-F238E27FC236}">
+                <a16:creationId xmlns:a16="http://schemas.microsoft.com/office/drawing/2014/main" id="{BFD14F93-7E5C-2DF8-4E66-5B68D0DE402C}"/>
+              </a:ext>
+            </a:extLst>
+          </p:cNvPr>
+          <p:cNvSpPr>
+            <a:spLocks noGrp="1"/>
+          </p:cNvSpPr>
+          <p:nvPr>
+            <p:ph type="title"/>
+          </p:nvPr>
+        </p:nvSpPr>
+        <p:spPr/>
+        <p:txBody>
+          <a:bodyPr/>
+          <a:lstStyle/>
+          <a:p>
+            <a:endParaRPr lang="ko-KR" altLang="en-US"/>
+          </a:p>
+        </p:txBody>
+      </p:sp>
+      <p:sp>
+        <p:nvSpPr>
+          <p:cNvPr id="3" name="내용 개체 틀 2">
+            <a:extLst>
+              <a:ext uri="{FF2B5EF4-FFF2-40B4-BE49-F238E27FC236}">
+                <a16:creationId xmlns:a16="http://schemas.microsoft.com/office/drawing/2014/main" id="{7BB78230-8716-A5C5-2877-771FA2BA812D}"/>
+              </a:ext>
+            </a:extLst>
+          </p:cNvPr>
+          <p:cNvSpPr>
+            <a:spLocks noGrp="1"/>
+          </p:cNvSpPr>
+          <p:nvPr>
+            <p:ph idx="1"/>
+          </p:nvPr>
+        </p:nvSpPr>
+        <p:spPr/>
+        <p:txBody>
+          <a:bodyPr/>
+          <a:lstStyle/>
+          <a:p>
+            <a:r>
+              <a:rPr lang="en-US" altLang="ko-KR" dirty="0"/>
+              <a:t>Series</a:t>
+            </a:r>
+            <a:r>
+              <a:rPr lang="ko-KR" altLang="en-US" dirty="0"/>
+              <a:t> 객체는 항상 </a:t>
+            </a:r>
+            <a:r>
+              <a:rPr lang="en-US" altLang="ko-KR" dirty="0"/>
+              <a:t>index</a:t>
+            </a:r>
+            <a:r>
+              <a:rPr lang="ko-KR" altLang="en-US" dirty="0"/>
+              <a:t> </a:t>
+            </a:r>
+            <a:r>
+              <a:rPr lang="en-US" altLang="ko-KR" dirty="0"/>
+              <a:t>+ values</a:t>
+            </a:r>
+            <a:r>
+              <a:rPr lang="ko-KR" altLang="en-US" dirty="0"/>
+              <a:t> 쌍으로 구성된다</a:t>
+            </a:r>
+            <a:r>
+              <a:rPr lang="en-US" altLang="ko-KR" dirty="0"/>
+              <a:t>.</a:t>
+            </a:r>
+          </a:p>
+          <a:p>
+            <a:r>
+              <a:rPr lang="en-US" altLang="ko-KR" dirty="0" err="1"/>
+              <a:t>plt.plot</a:t>
+            </a:r>
+            <a:r>
+              <a:rPr lang="en-US" altLang="ko-KR" dirty="0"/>
+              <a:t>(cum_1x.index, cum_1x, label="AMD 1x")</a:t>
+            </a:r>
+          </a:p>
+          <a:p>
+            <a:r>
+              <a:rPr lang="en-US" altLang="ko-KR" dirty="0" err="1"/>
+              <a:t>plt.plot</a:t>
+            </a:r>
+            <a:r>
+              <a:rPr lang="en-US" altLang="ko-KR" dirty="0"/>
+              <a:t>(cum_2x.index, cum_2x, label="AMD 2x (daily)")</a:t>
+            </a:r>
+          </a:p>
+          <a:p>
+            <a:r>
+              <a:rPr lang="en-US" altLang="ko-KR" dirty="0"/>
+              <a:t>Index</a:t>
+            </a:r>
+            <a:r>
+              <a:rPr lang="ko-KR" altLang="en-US" dirty="0"/>
+              <a:t>를 </a:t>
+            </a:r>
+            <a:r>
+              <a:rPr lang="en-US" altLang="ko-KR" dirty="0"/>
+              <a:t>x</a:t>
+            </a:r>
+            <a:r>
+              <a:rPr lang="ko-KR" altLang="en-US" dirty="0"/>
+              <a:t>축</a:t>
+            </a:r>
+            <a:r>
+              <a:rPr lang="en-US" altLang="ko-KR" dirty="0"/>
+              <a:t>, value</a:t>
+            </a:r>
+            <a:r>
+              <a:rPr lang="ko-KR" altLang="en-US" dirty="0"/>
+              <a:t>를 </a:t>
+            </a:r>
+            <a:r>
+              <a:rPr lang="en-US" altLang="ko-KR" dirty="0"/>
+              <a:t>y</a:t>
+            </a:r>
+            <a:r>
+              <a:rPr lang="ko-KR" altLang="en-US" dirty="0"/>
+              <a:t>축으로 해서 그림 그리기</a:t>
+            </a:r>
+          </a:p>
+        </p:txBody>
+      </p:sp>
+      <p:pic>
+        <p:nvPicPr>
+          <p:cNvPr id="5" name="그림 4" descr="텍스트, 도표, 그래프, 라인이(가) 표시된 사진&#10;&#10;AI 생성 콘텐츠는 정확하지 않을 수 있습니다.">
+            <a:extLst>
+              <a:ext uri="{FF2B5EF4-FFF2-40B4-BE49-F238E27FC236}">
+                <a16:creationId xmlns:a16="http://schemas.microsoft.com/office/drawing/2014/main" id="{E7A65FBC-AD71-4745-356F-3AB432D66100}"/>
+              </a:ext>
+            </a:extLst>
+          </p:cNvPr>
+          <p:cNvPicPr>
+            <a:picLocks noChangeAspect="1"/>
+          </p:cNvPicPr>
+          <p:nvPr/>
+        </p:nvPicPr>
+        <p:blipFill>
+          <a:blip r:embed="rId2"/>
+          <a:stretch>
+            <a:fillRect/>
+          </a:stretch>
+        </p:blipFill>
+        <p:spPr>
+          <a:xfrm>
+            <a:off x="936674" y="4178002"/>
+            <a:ext cx="8364117" cy="4267796"/>
+          </a:xfrm>
+          <a:prstGeom prst="rect">
+            <a:avLst/>
+          </a:prstGeom>
+        </p:spPr>
+      </p:pic>
+    </p:spTree>
+    <p:extLst>
+      <p:ext uri="{BB962C8B-B14F-4D97-AF65-F5344CB8AC3E}">
+        <p14:creationId xmlns:p14="http://schemas.microsoft.com/office/powerpoint/2010/main" val="3673200067"/>
+      </p:ext>
+    </p:extLst>
+  </p:cSld>
+  <p:clrMapOvr>
+    <a:masterClrMapping/>
+  </p:clrMapOvr>
+</p:sld>
+</file>
+
+<file path=ppt/slides/slide24.xml><?xml version="1.0" encoding="utf-8"?>
+<p:sld xmlns:a="http://schemas.openxmlformats.org/drawingml/2006/main" xmlns:r="http://schemas.openxmlformats.org/officeDocument/2006/relationships" xmlns:p="http://schemas.openxmlformats.org/presentationml/2006/main">
+  <p:cSld>
+    <p:spTree>
+      <p:nvGrpSpPr>
+        <p:cNvPr id="1" name=""/>
+        <p:cNvGrpSpPr/>
+        <p:nvPr/>
+      </p:nvGrpSpPr>
+      <p:grpSpPr>
+        <a:xfrm>
+          <a:off x="0" y="0"/>
+          <a:ext cx="0" cy="0"/>
+          <a:chOff x="0" y="0"/>
+          <a:chExt cx="0" cy="0"/>
+        </a:xfrm>
+      </p:grpSpPr>
+      <p:sp>
+        <p:nvSpPr>
+          <p:cNvPr id="2" name="제목 1">
+            <a:extLst>
+              <a:ext uri="{FF2B5EF4-FFF2-40B4-BE49-F238E27FC236}">
+                <a16:creationId xmlns:a16="http://schemas.microsoft.com/office/drawing/2014/main" id="{DB622689-210F-0ED0-C4EE-76CCED21D167}"/>
+              </a:ext>
+            </a:extLst>
+          </p:cNvPr>
+          <p:cNvSpPr>
+            <a:spLocks noGrp="1"/>
+          </p:cNvSpPr>
+          <p:nvPr>
+            <p:ph type="title"/>
+          </p:nvPr>
+        </p:nvSpPr>
+        <p:spPr/>
+        <p:txBody>
+          <a:bodyPr/>
+          <a:lstStyle/>
+          <a:p>
+            <a:endParaRPr lang="ko-KR" altLang="en-US"/>
+          </a:p>
+        </p:txBody>
+      </p:sp>
+      <p:sp>
+        <p:nvSpPr>
+          <p:cNvPr id="3" name="내용 개체 틀 2">
+            <a:extLst>
+              <a:ext uri="{FF2B5EF4-FFF2-40B4-BE49-F238E27FC236}">
+                <a16:creationId xmlns:a16="http://schemas.microsoft.com/office/drawing/2014/main" id="{ACD6722E-B2A8-53A1-EDAE-4CD2E1490DB6}"/>
+              </a:ext>
+            </a:extLst>
+          </p:cNvPr>
+          <p:cNvSpPr>
+            <a:spLocks noGrp="1"/>
+          </p:cNvSpPr>
+          <p:nvPr>
+            <p:ph idx="1"/>
+          </p:nvPr>
+        </p:nvSpPr>
+        <p:spPr>
+          <a:xfrm>
+            <a:off x="838200" y="1825625"/>
+            <a:ext cx="4577862" cy="4351338"/>
+          </a:xfrm>
+        </p:spPr>
+        <p:txBody>
+          <a:bodyPr>
+            <a:normAutofit lnSpcReduction="10000"/>
+          </a:bodyPr>
+          <a:lstStyle/>
+          <a:p>
+            <a:r>
+              <a:rPr lang="ko-KR" altLang="en-US" b="1" dirty="0"/>
+              <a:t>예시</a:t>
+            </a:r>
+            <a:r>
+              <a:rPr lang="en-US" altLang="ko-KR" b="1" dirty="0"/>
+              <a:t>: </a:t>
+            </a:r>
+            <a:r>
+              <a:rPr lang="ko-KR" altLang="en-US" b="1" dirty="0"/>
+              <a:t>하루 급락 이후</a:t>
+            </a:r>
+          </a:p>
+          <a:p>
+            <a:r>
+              <a:rPr lang="en-US" altLang="ko-KR" b="1" dirty="0"/>
+              <a:t>1x</a:t>
+            </a:r>
+          </a:p>
+          <a:p>
+            <a:r>
+              <a:rPr lang="ko-KR" altLang="en-US" dirty="0"/>
+              <a:t>시작 </a:t>
+            </a:r>
+            <a:r>
+              <a:rPr lang="en-US" altLang="ko-KR" dirty="0"/>
+              <a:t>1.00</a:t>
+            </a:r>
+          </a:p>
+          <a:p>
+            <a:r>
+              <a:rPr lang="en-US" altLang="ko-KR" dirty="0"/>
+              <a:t>-18% → 0.82</a:t>
+            </a:r>
+          </a:p>
+          <a:p>
+            <a:r>
+              <a:rPr lang="en-US" altLang="ko-KR" b="1" dirty="0"/>
+              <a:t>2x</a:t>
+            </a:r>
+          </a:p>
+          <a:p>
+            <a:r>
+              <a:rPr lang="ko-KR" altLang="en-US" dirty="0"/>
+              <a:t>시작 </a:t>
+            </a:r>
+            <a:r>
+              <a:rPr lang="en-US" altLang="ko-KR" dirty="0"/>
+              <a:t>1.00</a:t>
+            </a:r>
+          </a:p>
+          <a:p>
+            <a:r>
+              <a:rPr lang="en-US" altLang="ko-KR" dirty="0"/>
+              <a:t>-36% → 0.64</a:t>
+            </a:r>
+          </a:p>
+          <a:p>
+            <a:r>
+              <a:rPr lang="ko-KR" altLang="en-US" dirty="0"/>
+              <a:t>여기까지는</a:t>
+            </a:r>
+            <a:r>
+              <a:rPr lang="en-US" altLang="ko-KR" dirty="0"/>
+              <a:t>:</a:t>
+            </a:r>
+          </a:p>
+          <a:p>
+            <a:r>
+              <a:rPr lang="en-US" altLang="ko-KR" dirty="0"/>
+              <a:t>“</a:t>
+            </a:r>
+            <a:r>
+              <a:rPr lang="ko-KR" altLang="en-US" dirty="0"/>
+              <a:t>응</a:t>
+            </a:r>
+            <a:r>
+              <a:rPr lang="en-US" altLang="ko-KR" dirty="0"/>
+              <a:t>, </a:t>
+            </a:r>
+            <a:r>
+              <a:rPr lang="ko-KR" altLang="en-US" dirty="0"/>
+              <a:t>딱 </a:t>
+            </a:r>
+            <a:r>
+              <a:rPr lang="en-US" altLang="ko-KR" dirty="0"/>
+              <a:t>2</a:t>
+            </a:r>
+            <a:r>
+              <a:rPr lang="ko-KR" altLang="en-US" dirty="0"/>
+              <a:t>배네” 맞아</a:t>
+            </a:r>
+          </a:p>
+          <a:p>
+            <a:endParaRPr lang="ko-KR" altLang="en-US" dirty="0"/>
+          </a:p>
+        </p:txBody>
+      </p:sp>
+      <p:sp>
+        <p:nvSpPr>
+          <p:cNvPr id="6" name="내용 개체 틀 2">
+            <a:extLst>
+              <a:ext uri="{FF2B5EF4-FFF2-40B4-BE49-F238E27FC236}">
+                <a16:creationId xmlns:a16="http://schemas.microsoft.com/office/drawing/2014/main" id="{F579B488-4D69-D543-7F9F-745E66C37048}"/>
+              </a:ext>
+            </a:extLst>
+          </p:cNvPr>
+          <p:cNvSpPr txBox="1">
+            <a:spLocks/>
+          </p:cNvSpPr>
+          <p:nvPr/>
+        </p:nvSpPr>
+        <p:spPr>
+          <a:xfrm>
+            <a:off x="6096000" y="1825625"/>
+            <a:ext cx="4577862" cy="4351338"/>
+          </a:xfrm>
+          <a:prstGeom prst="rect">
+            <a:avLst/>
+          </a:prstGeom>
+        </p:spPr>
+        <p:txBody>
+          <a:bodyPr vert="horz" lIns="91440" tIns="45720" rIns="91440" bIns="45720" rtlCol="0">
+            <a:normAutofit lnSpcReduction="10000"/>
+          </a:bodyPr>
+          <a:lstStyle>
+            <a:lvl1pPr marL="228600" indent="-228600" algn="l" defTabSz="914400" rtl="0" eaLnBrk="1" latinLnBrk="1" hangingPunct="1">
+              <a:lnSpc>
+                <a:spcPct val="90000"/>
+              </a:lnSpc>
+              <a:spcBef>
+                <a:spcPts val="1000"/>
+              </a:spcBef>
+              <a:buFont typeface="Arial" panose="020B0604020202020204" pitchFamily="34" charset="0"/>
+              <a:buChar char="•"/>
+              <a:defRPr sz="2800" kern="1200">
+                <a:solidFill>
+                  <a:schemeClr val="tx1"/>
+                </a:solidFill>
+                <a:latin typeface="+mn-lt"/>
+                <a:ea typeface="+mn-ea"/>
+                <a:cs typeface="+mn-cs"/>
+              </a:defRPr>
+            </a:lvl1pPr>
+            <a:lvl2pPr marL="685800" indent="-228600" algn="l" defTabSz="914400" rtl="0" eaLnBrk="1" latinLnBrk="1" hangingPunct="1">
+              <a:lnSpc>
+                <a:spcPct val="90000"/>
+              </a:lnSpc>
+              <a:spcBef>
+                <a:spcPts val="500"/>
+              </a:spcBef>
+              <a:buFont typeface="Arial" panose="020B0604020202020204" pitchFamily="34" charset="0"/>
+              <a:buChar char="•"/>
+              <a:defRPr sz="2400" kern="1200">
+                <a:solidFill>
+                  <a:schemeClr val="tx1"/>
+                </a:solidFill>
+                <a:latin typeface="+mn-lt"/>
+                <a:ea typeface="+mn-ea"/>
+                <a:cs typeface="+mn-cs"/>
+              </a:defRPr>
+            </a:lvl2pPr>
+            <a:lvl3pPr marL="1143000" indent="-228600" algn="l" defTabSz="914400" rtl="0" eaLnBrk="1" latinLnBrk="1" hangingPunct="1">
+              <a:lnSpc>
+                <a:spcPct val="90000"/>
+              </a:lnSpc>
+              <a:spcBef>
+                <a:spcPts val="500"/>
+              </a:spcBef>
+              <a:buFont typeface="Arial" panose="020B0604020202020204" pitchFamily="34" charset="0"/>
+              <a:buChar char="•"/>
+              <a:defRPr sz="2000" kern="1200">
+                <a:solidFill>
+                  <a:schemeClr val="tx1"/>
+                </a:solidFill>
+                <a:latin typeface="+mn-lt"/>
+                <a:ea typeface="+mn-ea"/>
+                <a:cs typeface="+mn-cs"/>
+              </a:defRPr>
+            </a:lvl3pPr>
+            <a:lvl4pPr marL="1600200" indent="-228600" algn="l" defTabSz="914400" rtl="0" eaLnBrk="1" latinLnBrk="1" hangingPunct="1">
+              <a:lnSpc>
+                <a:spcPct val="90000"/>
+              </a:lnSpc>
+              <a:spcBef>
+                <a:spcPts val="500"/>
+              </a:spcBef>
+              <a:buFont typeface="Arial" panose="020B0604020202020204" pitchFamily="34" charset="0"/>
+              <a:buChar char="•"/>
+              <a:defRPr sz="1800" kern="1200">
+                <a:solidFill>
+                  <a:schemeClr val="tx1"/>
+                </a:solidFill>
+                <a:latin typeface="+mn-lt"/>
+                <a:ea typeface="+mn-ea"/>
+                <a:cs typeface="+mn-cs"/>
+              </a:defRPr>
+            </a:lvl4pPr>
+            <a:lvl5pPr marL="2057400" indent="-228600" algn="l" defTabSz="914400" rtl="0" eaLnBrk="1" latinLnBrk="1" hangingPunct="1">
+              <a:lnSpc>
+                <a:spcPct val="90000"/>
+              </a:lnSpc>
+              <a:spcBef>
+                <a:spcPts val="500"/>
+              </a:spcBef>
+              <a:buFont typeface="Arial" panose="020B0604020202020204" pitchFamily="34" charset="0"/>
+              <a:buChar char="•"/>
+              <a:defRPr sz="1800" kern="1200">
+                <a:solidFill>
+                  <a:schemeClr val="tx1"/>
+                </a:solidFill>
+                <a:latin typeface="+mn-lt"/>
+                <a:ea typeface="+mn-ea"/>
+                <a:cs typeface="+mn-cs"/>
+              </a:defRPr>
+            </a:lvl5pPr>
+            <a:lvl6pPr marL="2514600" indent="-228600" algn="l" defTabSz="914400" rtl="0" eaLnBrk="1" latinLnBrk="1" hangingPunct="1">
+              <a:lnSpc>
+                <a:spcPct val="90000"/>
+              </a:lnSpc>
+              <a:spcBef>
+                <a:spcPts val="500"/>
+              </a:spcBef>
+              <a:buFont typeface="Arial" panose="020B0604020202020204" pitchFamily="34" charset="0"/>
+              <a:buChar char="•"/>
+              <a:defRPr sz="1800" kern="1200">
+                <a:solidFill>
+                  <a:schemeClr val="tx1"/>
+                </a:solidFill>
+                <a:latin typeface="+mn-lt"/>
+                <a:ea typeface="+mn-ea"/>
+                <a:cs typeface="+mn-cs"/>
+              </a:defRPr>
+            </a:lvl6pPr>
+            <a:lvl7pPr marL="2971800" indent="-228600" algn="l" defTabSz="914400" rtl="0" eaLnBrk="1" latinLnBrk="1" hangingPunct="1">
+              <a:lnSpc>
+                <a:spcPct val="90000"/>
+              </a:lnSpc>
+              <a:spcBef>
+                <a:spcPts val="500"/>
+              </a:spcBef>
+              <a:buFont typeface="Arial" panose="020B0604020202020204" pitchFamily="34" charset="0"/>
+              <a:buChar char="•"/>
+              <a:defRPr sz="1800" kern="1200">
+                <a:solidFill>
+                  <a:schemeClr val="tx1"/>
+                </a:solidFill>
+                <a:latin typeface="+mn-lt"/>
+                <a:ea typeface="+mn-ea"/>
+                <a:cs typeface="+mn-cs"/>
+              </a:defRPr>
+            </a:lvl7pPr>
+            <a:lvl8pPr marL="3429000" indent="-228600" algn="l" defTabSz="914400" rtl="0" eaLnBrk="1" latinLnBrk="1" hangingPunct="1">
+              <a:lnSpc>
+                <a:spcPct val="90000"/>
+              </a:lnSpc>
+              <a:spcBef>
+                <a:spcPts val="500"/>
+              </a:spcBef>
+              <a:buFont typeface="Arial" panose="020B0604020202020204" pitchFamily="34" charset="0"/>
+              <a:buChar char="•"/>
+              <a:defRPr sz="1800" kern="1200">
+                <a:solidFill>
+                  <a:schemeClr val="tx1"/>
+                </a:solidFill>
+                <a:latin typeface="+mn-lt"/>
+                <a:ea typeface="+mn-ea"/>
+                <a:cs typeface="+mn-cs"/>
+              </a:defRPr>
+            </a:lvl8pPr>
+            <a:lvl9pPr marL="3886200" indent="-228600" algn="l" defTabSz="914400" rtl="0" eaLnBrk="1" latinLnBrk="1" hangingPunct="1">
+              <a:lnSpc>
+                <a:spcPct val="90000"/>
+              </a:lnSpc>
+              <a:spcBef>
+                <a:spcPts val="500"/>
+              </a:spcBef>
+              <a:buFont typeface="Arial" panose="020B0604020202020204" pitchFamily="34" charset="0"/>
+              <a:buChar char="•"/>
+              <a:defRPr sz="1800" kern="1200">
+                <a:solidFill>
+                  <a:schemeClr val="tx1"/>
+                </a:solidFill>
+                <a:latin typeface="+mn-lt"/>
+                <a:ea typeface="+mn-ea"/>
+                <a:cs typeface="+mn-cs"/>
+              </a:defRPr>
+            </a:lvl9pPr>
+          </a:lstStyle>
+          <a:p>
+            <a:r>
+              <a:rPr lang="ko-KR" altLang="en-US" b="1" dirty="0"/>
+              <a:t>그런데 다음 날 </a:t>
+            </a:r>
+            <a:r>
+              <a:rPr lang="en-US" altLang="ko-KR" b="1" dirty="0"/>
+              <a:t>+10% </a:t>
+            </a:r>
+            <a:r>
+              <a:rPr lang="ko-KR" altLang="en-US" b="1" dirty="0"/>
+              <a:t>반등이 오면</a:t>
+            </a:r>
+            <a:r>
+              <a:rPr lang="en-US" altLang="ko-KR" b="1" dirty="0"/>
+              <a:t>?</a:t>
+            </a:r>
+          </a:p>
+          <a:p>
+            <a:r>
+              <a:rPr lang="en-US" altLang="ko-KR" b="1" dirty="0"/>
+              <a:t>1x</a:t>
+            </a:r>
+          </a:p>
+          <a:p>
+            <a:r>
+              <a:rPr lang="en-US" altLang="ko-KR" dirty="0"/>
+              <a:t>0.82 × 1.10 = 0.902</a:t>
+            </a:r>
+          </a:p>
+          <a:p>
+            <a:r>
+              <a:rPr lang="en-US" altLang="ko-KR" b="1" dirty="0"/>
+              <a:t>2x (</a:t>
+            </a:r>
+            <a:r>
+              <a:rPr lang="ko-KR" altLang="en-US" b="1" dirty="0"/>
+              <a:t>일일 </a:t>
+            </a:r>
+            <a:r>
+              <a:rPr lang="en-US" altLang="ko-KR" b="1" dirty="0"/>
+              <a:t>2</a:t>
+            </a:r>
+            <a:r>
+              <a:rPr lang="ko-KR" altLang="en-US" b="1" dirty="0"/>
+              <a:t>배 → </a:t>
+            </a:r>
+            <a:r>
+              <a:rPr lang="en-US" altLang="ko-KR" b="1" dirty="0"/>
+              <a:t>+20%)</a:t>
+            </a:r>
+          </a:p>
+          <a:p>
+            <a:r>
+              <a:rPr lang="en-US" altLang="ko-KR" dirty="0"/>
+              <a:t>0.64 × 1.20 = 0.768</a:t>
+            </a:r>
+          </a:p>
+          <a:p>
+            <a:r>
+              <a:rPr lang="ko-KR" altLang="en-US" dirty="0"/>
+              <a:t>👉 결과</a:t>
+            </a:r>
+            <a:r>
+              <a:rPr lang="en-US" altLang="ko-KR" dirty="0"/>
+              <a:t>:</a:t>
+            </a:r>
+          </a:p>
+          <a:p>
+            <a:r>
+              <a:rPr lang="en-US" altLang="ko-KR" dirty="0"/>
+              <a:t>1x</a:t>
+            </a:r>
+            <a:r>
+              <a:rPr lang="ko-KR" altLang="en-US" dirty="0"/>
+              <a:t>는 </a:t>
+            </a:r>
+            <a:r>
+              <a:rPr lang="en-US" altLang="ko-KR" b="1" dirty="0"/>
+              <a:t>0.90</a:t>
+            </a:r>
+            <a:r>
+              <a:rPr lang="ko-KR" altLang="en-US" b="1" dirty="0"/>
+              <a:t>까지 회복</a:t>
+            </a:r>
+            <a:endParaRPr lang="ko-KR" altLang="en-US" dirty="0"/>
+          </a:p>
+          <a:p>
+            <a:r>
+              <a:rPr lang="en-US" altLang="ko-KR" dirty="0"/>
+              <a:t>2x</a:t>
+            </a:r>
+            <a:r>
+              <a:rPr lang="ko-KR" altLang="en-US" dirty="0"/>
+              <a:t>는 </a:t>
+            </a:r>
+            <a:r>
+              <a:rPr lang="en-US" altLang="ko-KR" b="1" dirty="0"/>
+              <a:t>0.77</a:t>
+            </a:r>
+            <a:r>
+              <a:rPr lang="ko-KR" altLang="en-US" b="1" dirty="0"/>
+              <a:t>에 그침</a:t>
+            </a:r>
+            <a:endParaRPr lang="ko-KR" altLang="en-US" dirty="0"/>
+          </a:p>
+        </p:txBody>
+      </p:sp>
+      <p:sp>
+        <p:nvSpPr>
+          <p:cNvPr id="8" name="Rectangle 2">
+            <a:extLst>
+              <a:ext uri="{FF2B5EF4-FFF2-40B4-BE49-F238E27FC236}">
+                <a16:creationId xmlns:a16="http://schemas.microsoft.com/office/drawing/2014/main" id="{BBAC0B6B-53BB-0ADF-4794-33E9AC8E0109}"/>
+              </a:ext>
+            </a:extLst>
+          </p:cNvPr>
+          <p:cNvSpPr>
+            <a:spLocks noChangeArrowheads="1"/>
+          </p:cNvSpPr>
+          <p:nvPr/>
+        </p:nvSpPr>
+        <p:spPr bwMode="auto">
+          <a:xfrm>
+            <a:off x="6231988" y="6513341"/>
+            <a:ext cx="12192000" cy="0"/>
+          </a:xfrm>
+          <a:prstGeom prst="rect">
+            <a:avLst/>
+          </a:prstGeom>
+          <a:noFill/>
+          <a:ln>
+            <a:noFill/>
+          </a:ln>
+          <a:effectLst/>
+          <a:extLst>
+            <a:ext uri="{909E8E84-426E-40DD-AFC4-6F175D3DCCD1}">
+              <a14:hiddenFill xmlns:a14="http://schemas.microsoft.com/office/drawing/2010/main">
+                <a:solidFill>
+                  <a:schemeClr val="accent1"/>
+                </a:solidFill>
+              </a14:hiddenFill>
+            </a:ext>
+            <a:ext uri="{91240B29-F687-4F45-9708-019B960494DF}">
+              <a14:hiddenLine xmlns:a14="http://schemas.microsoft.com/office/drawing/2010/main" w="9525">
+                <a:solidFill>
+                  <a:schemeClr val="tx1"/>
+                </a:solidFill>
+                <a:miter lim="800000"/>
+                <a:headEnd/>
+                <a:tailEnd/>
+              </a14:hiddenLine>
+            </a:ext>
+            <a:ext uri="{AF507438-7753-43E0-B8FC-AC1667EBCBE1}">
+              <a14:hiddenEffects xmlns:a14="http://schemas.microsoft.com/office/drawing/2010/main">
+                <a:effectLst>
+                  <a:outerShdw dist="35921" dir="2700000" algn="ctr" rotWithShape="0">
+                    <a:schemeClr val="bg2"/>
+                  </a:outerShdw>
+                </a:effectLst>
+              </a14:hiddenEffects>
+            </a:ext>
+          </a:extLst>
+        </p:spPr>
+        <p:txBody>
+          <a:bodyPr vert="horz" wrap="none" lIns="91440" tIns="45720" rIns="91440" bIns="45720" numCol="1" anchor="ctr" anchorCtr="0" compatLnSpc="1">
+            <a:prstTxWarp prst="textNoShape">
+              <a:avLst/>
+            </a:prstTxWarp>
+            <a:spAutoFit/>
+          </a:bodyPr>
+          <a:lstStyle/>
+          <a:p>
+            <a:pPr marL="0" marR="0" lvl="0" indent="0" algn="l" defTabSz="914400" rtl="0" eaLnBrk="0" fontAlgn="base" latinLnBrk="0" hangingPunct="0">
+              <a:lnSpc>
+                <a:spcPct val="100000"/>
+              </a:lnSpc>
+              <a:spcBef>
+                <a:spcPct val="0"/>
+              </a:spcBef>
+              <a:spcAft>
+                <a:spcPct val="0"/>
+              </a:spcAft>
+              <a:buClrTx/>
+              <a:buSzTx/>
+              <a:buFontTx/>
+              <a:buChar char="•"/>
+              <a:tabLst/>
+            </a:pPr>
+            <a:r>
+              <a:rPr kumimoji="0" lang="ko-KR" altLang="ko-KR" sz="1800" b="0" i="0" u="none" strike="noStrike" cap="none" normalizeH="0" baseline="0" dirty="0">
+                <a:ln>
+                  <a:noFill/>
+                </a:ln>
+                <a:solidFill>
+                  <a:schemeClr val="tx1"/>
+                </a:solidFill>
+                <a:effectLst/>
+                <a:latin typeface="Arial" panose="020B0604020202020204" pitchFamily="34" charset="0"/>
+              </a:rPr>
+              <a:t>✔ “일일 수익률 기준으로는 맞다”</a:t>
+            </a:r>
+          </a:p>
+          <a:p>
+            <a:pPr marL="0" marR="0" lvl="0" indent="0" algn="l" defTabSz="914400" rtl="0" eaLnBrk="0" fontAlgn="base" latinLnBrk="0" hangingPunct="0">
+              <a:lnSpc>
+                <a:spcPct val="100000"/>
+              </a:lnSpc>
+              <a:spcBef>
+                <a:spcPct val="0"/>
+              </a:spcBef>
+              <a:spcAft>
+                <a:spcPct val="0"/>
+              </a:spcAft>
+              <a:buClrTx/>
+              <a:buSzTx/>
+              <a:buFontTx/>
+              <a:buChar char="•"/>
+              <a:tabLst/>
+            </a:pPr>
+            <a:r>
+              <a:rPr kumimoji="0" lang="ko-KR" altLang="ko-KR" sz="1800" b="0" i="0" u="none" strike="noStrike" cap="none" normalizeH="0" baseline="0" dirty="0">
+                <a:ln>
+                  <a:noFill/>
+                </a:ln>
+                <a:solidFill>
+                  <a:schemeClr val="tx1"/>
+                </a:solidFill>
+                <a:effectLst/>
+                <a:latin typeface="Arial" panose="020B0604020202020204" pitchFamily="34" charset="0"/>
+              </a:rPr>
+              <a:t>✔ “누적 수익률 기준으로는 틀리다”</a:t>
+            </a:r>
+          </a:p>
+          <a:p>
+            <a:pPr marL="0" marR="0" lvl="0" indent="0" algn="l" defTabSz="914400" rtl="0" eaLnBrk="0" fontAlgn="base" latinLnBrk="0" hangingPunct="0">
+              <a:lnSpc>
+                <a:spcPct val="100000"/>
+              </a:lnSpc>
+              <a:spcBef>
+                <a:spcPct val="0"/>
+              </a:spcBef>
+              <a:spcAft>
+                <a:spcPct val="0"/>
+              </a:spcAft>
+              <a:buClrTx/>
+              <a:buSzTx/>
+              <a:buFontTx/>
+              <a:buChar char="•"/>
+              <a:tabLst/>
+            </a:pPr>
+            <a:r>
+              <a:rPr kumimoji="0" lang="ko-KR" altLang="ko-KR" sz="1800" b="0" i="0" u="none" strike="noStrike" cap="none" normalizeH="0" baseline="0" dirty="0">
+                <a:ln>
+                  <a:noFill/>
+                </a:ln>
+                <a:solidFill>
+                  <a:schemeClr val="tx1"/>
+                </a:solidFill>
+                <a:effectLst/>
+                <a:latin typeface="Arial" panose="020B0604020202020204" pitchFamily="34" charset="0"/>
+              </a:rPr>
+              <a:t>✔ 왜 그래프 두 개를 같이 봐야 하는지</a:t>
+            </a:r>
+          </a:p>
+        </p:txBody>
+      </p:sp>
+    </p:spTree>
+    <p:extLst>
+      <p:ext uri="{BB962C8B-B14F-4D97-AF65-F5344CB8AC3E}">
+        <p14:creationId xmlns:p14="http://schemas.microsoft.com/office/powerpoint/2010/main" val="272917281"/>
+      </p:ext>
+    </p:extLst>
+  </p:cSld>
+  <p:clrMapOvr>
+    <a:masterClrMapping/>
+  </p:clrMapOvr>
+</p:sld>
+</file>
+
+<file path=ppt/slides/slide25.xml><?xml version="1.0" encoding="utf-8"?>
+<p:sld xmlns:a="http://schemas.openxmlformats.org/drawingml/2006/main" xmlns:r="http://schemas.openxmlformats.org/officeDocument/2006/relationships" xmlns:p="http://schemas.openxmlformats.org/presentationml/2006/main">
+  <p:cSld>
+    <p:spTree>
+      <p:nvGrpSpPr>
+        <p:cNvPr id="1" name=""/>
+        <p:cNvGrpSpPr/>
+        <p:nvPr/>
+      </p:nvGrpSpPr>
+      <p:grpSpPr>
+        <a:xfrm>
+          <a:off x="0" y="0"/>
+          <a:ext cx="0" cy="0"/>
+          <a:chOff x="0" y="0"/>
+          <a:chExt cx="0" cy="0"/>
+        </a:xfrm>
+      </p:grpSpPr>
+      <p:sp>
+        <p:nvSpPr>
+          <p:cNvPr id="2" name="제목 1">
+            <a:extLst>
+              <a:ext uri="{FF2B5EF4-FFF2-40B4-BE49-F238E27FC236}">
+                <a16:creationId xmlns:a16="http://schemas.microsoft.com/office/drawing/2014/main" id="{CE48D19C-52FC-73EF-918A-2169ADC49EB7}"/>
+              </a:ext>
+            </a:extLst>
+          </p:cNvPr>
+          <p:cNvSpPr>
+            <a:spLocks noGrp="1"/>
+          </p:cNvSpPr>
+          <p:nvPr>
+            <p:ph type="title"/>
+          </p:nvPr>
+        </p:nvSpPr>
+        <p:spPr/>
+        <p:txBody>
+          <a:bodyPr/>
+          <a:lstStyle/>
+          <a:p>
+            <a:endParaRPr lang="ko-KR" altLang="en-US"/>
+          </a:p>
+        </p:txBody>
+      </p:sp>
+      <p:sp>
+        <p:nvSpPr>
+          <p:cNvPr id="3" name="내용 개체 틀 2">
+            <a:extLst>
+              <a:ext uri="{FF2B5EF4-FFF2-40B4-BE49-F238E27FC236}">
+                <a16:creationId xmlns:a16="http://schemas.microsoft.com/office/drawing/2014/main" id="{7205A427-E4EA-D6F3-AA94-0C15A651830F}"/>
+              </a:ext>
+            </a:extLst>
+          </p:cNvPr>
+          <p:cNvSpPr>
+            <a:spLocks noGrp="1"/>
+          </p:cNvSpPr>
+          <p:nvPr>
+            <p:ph idx="1"/>
+          </p:nvPr>
+        </p:nvSpPr>
+        <p:spPr/>
+        <p:txBody>
+          <a:bodyPr>
+            <a:normAutofit/>
+          </a:bodyPr>
+          <a:lstStyle/>
+          <a:p>
+            <a:r>
+              <a:rPr lang="en-US" altLang="ko-KR" b="1" dirty="0"/>
+              <a:t>High / Low</a:t>
+            </a:r>
+            <a:r>
+              <a:rPr lang="ko-KR" altLang="en-US" dirty="0"/>
+              <a:t>는</a:t>
+            </a:r>
+            <a:r>
+              <a:rPr lang="en-US" altLang="ko-KR" dirty="0"/>
+              <a:t>:</a:t>
+            </a:r>
+          </a:p>
+          <a:p>
+            <a:pPr lvl="1"/>
+            <a:r>
+              <a:rPr lang="ko-KR" altLang="en-US" dirty="0"/>
+              <a:t>변동성 측정</a:t>
+            </a:r>
+          </a:p>
+          <a:p>
+            <a:pPr lvl="1"/>
+            <a:r>
+              <a:rPr lang="ko-KR" altLang="en-US" dirty="0"/>
+              <a:t>리스크 분석</a:t>
+            </a:r>
+          </a:p>
+          <a:p>
+            <a:pPr lvl="1"/>
+            <a:r>
+              <a:rPr lang="ko-KR" altLang="en-US" dirty="0"/>
+              <a:t>캔들 패턴</a:t>
+            </a:r>
+          </a:p>
+          <a:p>
+            <a:r>
+              <a:rPr lang="en-US" altLang="ko-KR" b="1" dirty="0"/>
+              <a:t>Open</a:t>
+            </a:r>
+            <a:r>
+              <a:rPr lang="ko-KR" altLang="en-US" dirty="0"/>
+              <a:t>은</a:t>
+            </a:r>
+            <a:r>
+              <a:rPr lang="en-US" altLang="ko-KR" dirty="0"/>
+              <a:t>:</a:t>
+            </a:r>
+          </a:p>
+          <a:p>
+            <a:pPr lvl="1"/>
+            <a:r>
+              <a:rPr lang="ko-KR" altLang="en-US" dirty="0"/>
+              <a:t>갭 상승</a:t>
+            </a:r>
+            <a:r>
+              <a:rPr lang="en-US" altLang="ko-KR" dirty="0"/>
+              <a:t>/</a:t>
+            </a:r>
+            <a:r>
+              <a:rPr lang="ko-KR" altLang="en-US" dirty="0"/>
+              <a:t>하락 분석</a:t>
+            </a:r>
+          </a:p>
+          <a:p>
+            <a:r>
+              <a:rPr lang="en-US" altLang="ko-KR" b="1" dirty="0"/>
+              <a:t>Close</a:t>
+            </a:r>
+            <a:r>
+              <a:rPr lang="ko-KR" altLang="en-US" dirty="0"/>
+              <a:t>는</a:t>
+            </a:r>
+            <a:r>
+              <a:rPr lang="en-US" altLang="ko-KR" dirty="0"/>
+              <a:t>:</a:t>
+            </a:r>
+          </a:p>
+          <a:p>
+            <a:pPr lvl="1"/>
+            <a:r>
+              <a:rPr lang="ko-KR" altLang="en-US" dirty="0"/>
+              <a:t>수익률</a:t>
+            </a:r>
+          </a:p>
+          <a:p>
+            <a:pPr lvl="1"/>
+            <a:r>
+              <a:rPr lang="ko-KR" altLang="en-US" dirty="0"/>
+              <a:t>레버리지</a:t>
+            </a:r>
+          </a:p>
+          <a:p>
+            <a:pPr lvl="1"/>
+            <a:r>
+              <a:rPr lang="ko-KR" altLang="en-US" dirty="0"/>
+              <a:t>지표 계산</a:t>
+            </a:r>
+          </a:p>
+          <a:p>
+            <a:endParaRPr lang="ko-KR" altLang="en-US" dirty="0"/>
+          </a:p>
+        </p:txBody>
+      </p:sp>
+    </p:spTree>
+    <p:extLst>
+      <p:ext uri="{BB962C8B-B14F-4D97-AF65-F5344CB8AC3E}">
+        <p14:creationId xmlns:p14="http://schemas.microsoft.com/office/powerpoint/2010/main" val="1885189974"/>
+      </p:ext>
+    </p:extLst>
+  </p:cSld>
+  <p:clrMapOvr>
+    <a:masterClrMapping/>
+  </p:clrMapOvr>
+</p:sld>
+</file>
+
+<file path=ppt/slides/slide26.xml><?xml version="1.0" encoding="utf-8"?>
+<p:sld xmlns:a="http://schemas.openxmlformats.org/drawingml/2006/main" xmlns:r="http://schemas.openxmlformats.org/officeDocument/2006/relationships" xmlns:p="http://schemas.openxmlformats.org/presentationml/2006/main">
+  <p:cSld>
+    <p:spTree>
+      <p:nvGrpSpPr>
+        <p:cNvPr id="1" name=""/>
+        <p:cNvGrpSpPr/>
+        <p:nvPr/>
+      </p:nvGrpSpPr>
+      <p:grpSpPr>
+        <a:xfrm>
+          <a:off x="0" y="0"/>
+          <a:ext cx="0" cy="0"/>
+          <a:chOff x="0" y="0"/>
+          <a:chExt cx="0" cy="0"/>
+        </a:xfrm>
+      </p:grpSpPr>
+      <p:sp>
+        <p:nvSpPr>
+          <p:cNvPr id="2" name="제목 1">
+            <a:extLst>
+              <a:ext uri="{FF2B5EF4-FFF2-40B4-BE49-F238E27FC236}">
+                <a16:creationId xmlns:a16="http://schemas.microsoft.com/office/drawing/2014/main" id="{B39D1A63-703E-81AE-96B4-992C06152DD2}"/>
+              </a:ext>
+            </a:extLst>
+          </p:cNvPr>
+          <p:cNvSpPr>
+            <a:spLocks noGrp="1"/>
+          </p:cNvSpPr>
+          <p:nvPr>
+            <p:ph type="title"/>
+          </p:nvPr>
+        </p:nvSpPr>
+        <p:spPr/>
+        <p:txBody>
+          <a:bodyPr/>
+          <a:lstStyle/>
+          <a:p>
+            <a:r>
+              <a:rPr lang="en-US" altLang="ko-KR" dirty="0"/>
+              <a:t>Requirements.txt</a:t>
+            </a:r>
+            <a:endParaRPr lang="ko-KR" altLang="en-US" dirty="0"/>
+          </a:p>
+        </p:txBody>
+      </p:sp>
+      <p:sp>
+        <p:nvSpPr>
+          <p:cNvPr id="4" name="내용 개체 틀 2">
+            <a:extLst>
+              <a:ext uri="{FF2B5EF4-FFF2-40B4-BE49-F238E27FC236}">
+                <a16:creationId xmlns:a16="http://schemas.microsoft.com/office/drawing/2014/main" id="{34CAF790-F9B7-476E-F500-5870FCF5A41C}"/>
+              </a:ext>
+            </a:extLst>
+          </p:cNvPr>
+          <p:cNvSpPr txBox="1">
+            <a:spLocks/>
+          </p:cNvSpPr>
+          <p:nvPr/>
+        </p:nvSpPr>
+        <p:spPr>
+          <a:xfrm>
+            <a:off x="990600" y="1978025"/>
+            <a:ext cx="4759751" cy="4351338"/>
+          </a:xfrm>
+          <a:prstGeom prst="rect">
+            <a:avLst/>
+          </a:prstGeom>
+        </p:spPr>
+        <p:txBody>
+          <a:bodyPr vert="horz" lIns="91440" tIns="45720" rIns="91440" bIns="45720" rtlCol="0">
+            <a:noAutofit/>
+          </a:bodyPr>
+          <a:lstStyle>
+            <a:lvl1pPr marL="228600" indent="-228600" algn="l" defTabSz="914400" rtl="0" eaLnBrk="1" latinLnBrk="1" hangingPunct="1">
+              <a:lnSpc>
+                <a:spcPct val="90000"/>
+              </a:lnSpc>
+              <a:spcBef>
+                <a:spcPts val="1000"/>
+              </a:spcBef>
+              <a:buFont typeface="Arial" panose="020B0604020202020204" pitchFamily="34" charset="0"/>
+              <a:buChar char="•"/>
+              <a:defRPr sz="2800" kern="1200">
+                <a:solidFill>
+                  <a:schemeClr val="tx1"/>
+                </a:solidFill>
+                <a:latin typeface="+mn-lt"/>
+                <a:ea typeface="+mn-ea"/>
+                <a:cs typeface="+mn-cs"/>
+              </a:defRPr>
+            </a:lvl1pPr>
+            <a:lvl2pPr marL="685800" indent="-228600" algn="l" defTabSz="914400" rtl="0" eaLnBrk="1" latinLnBrk="1" hangingPunct="1">
+              <a:lnSpc>
+                <a:spcPct val="90000"/>
+              </a:lnSpc>
+              <a:spcBef>
+                <a:spcPts val="500"/>
+              </a:spcBef>
+              <a:buFont typeface="Arial" panose="020B0604020202020204" pitchFamily="34" charset="0"/>
+              <a:buChar char="•"/>
+              <a:defRPr sz="2400" kern="1200">
+                <a:solidFill>
+                  <a:schemeClr val="tx1"/>
+                </a:solidFill>
+                <a:latin typeface="+mn-lt"/>
+                <a:ea typeface="+mn-ea"/>
+                <a:cs typeface="+mn-cs"/>
+              </a:defRPr>
+            </a:lvl2pPr>
+            <a:lvl3pPr marL="1143000" indent="-228600" algn="l" defTabSz="914400" rtl="0" eaLnBrk="1" latinLnBrk="1" hangingPunct="1">
+              <a:lnSpc>
+                <a:spcPct val="90000"/>
+              </a:lnSpc>
+              <a:spcBef>
+                <a:spcPts val="500"/>
+              </a:spcBef>
+              <a:buFont typeface="Arial" panose="020B0604020202020204" pitchFamily="34" charset="0"/>
+              <a:buChar char="•"/>
+              <a:defRPr sz="2000" kern="1200">
+                <a:solidFill>
+                  <a:schemeClr val="tx1"/>
+                </a:solidFill>
+                <a:latin typeface="+mn-lt"/>
+                <a:ea typeface="+mn-ea"/>
+                <a:cs typeface="+mn-cs"/>
+              </a:defRPr>
+            </a:lvl3pPr>
+            <a:lvl4pPr marL="1600200" indent="-228600" algn="l" defTabSz="914400" rtl="0" eaLnBrk="1" latinLnBrk="1" hangingPunct="1">
+              <a:lnSpc>
+                <a:spcPct val="90000"/>
+              </a:lnSpc>
+              <a:spcBef>
+                <a:spcPts val="500"/>
+              </a:spcBef>
+              <a:buFont typeface="Arial" panose="020B0604020202020204" pitchFamily="34" charset="0"/>
+              <a:buChar char="•"/>
+              <a:defRPr sz="1800" kern="1200">
+                <a:solidFill>
+                  <a:schemeClr val="tx1"/>
+                </a:solidFill>
+                <a:latin typeface="+mn-lt"/>
+                <a:ea typeface="+mn-ea"/>
+                <a:cs typeface="+mn-cs"/>
+              </a:defRPr>
+            </a:lvl4pPr>
+            <a:lvl5pPr marL="2057400" indent="-228600" algn="l" defTabSz="914400" rtl="0" eaLnBrk="1" latinLnBrk="1" hangingPunct="1">
+              <a:lnSpc>
+                <a:spcPct val="90000"/>
+              </a:lnSpc>
+              <a:spcBef>
+                <a:spcPts val="500"/>
+              </a:spcBef>
+              <a:buFont typeface="Arial" panose="020B0604020202020204" pitchFamily="34" charset="0"/>
+              <a:buChar char="•"/>
+              <a:defRPr sz="1800" kern="1200">
+                <a:solidFill>
+                  <a:schemeClr val="tx1"/>
+                </a:solidFill>
+                <a:latin typeface="+mn-lt"/>
+                <a:ea typeface="+mn-ea"/>
+                <a:cs typeface="+mn-cs"/>
+              </a:defRPr>
+            </a:lvl5pPr>
+            <a:lvl6pPr marL="2514600" indent="-228600" algn="l" defTabSz="914400" rtl="0" eaLnBrk="1" latinLnBrk="1" hangingPunct="1">
+              <a:lnSpc>
+                <a:spcPct val="90000"/>
+              </a:lnSpc>
+              <a:spcBef>
+                <a:spcPts val="500"/>
+              </a:spcBef>
+              <a:buFont typeface="Arial" panose="020B0604020202020204" pitchFamily="34" charset="0"/>
+              <a:buChar char="•"/>
+              <a:defRPr sz="1800" kern="1200">
+                <a:solidFill>
+                  <a:schemeClr val="tx1"/>
+                </a:solidFill>
+                <a:latin typeface="+mn-lt"/>
+                <a:ea typeface="+mn-ea"/>
+                <a:cs typeface="+mn-cs"/>
+              </a:defRPr>
+            </a:lvl6pPr>
+            <a:lvl7pPr marL="2971800" indent="-228600" algn="l" defTabSz="914400" rtl="0" eaLnBrk="1" latinLnBrk="1" hangingPunct="1">
+              <a:lnSpc>
+                <a:spcPct val="90000"/>
+              </a:lnSpc>
+              <a:spcBef>
+                <a:spcPts val="500"/>
+              </a:spcBef>
+              <a:buFont typeface="Arial" panose="020B0604020202020204" pitchFamily="34" charset="0"/>
+              <a:buChar char="•"/>
+              <a:defRPr sz="1800" kern="1200">
+                <a:solidFill>
+                  <a:schemeClr val="tx1"/>
+                </a:solidFill>
+                <a:latin typeface="+mn-lt"/>
+                <a:ea typeface="+mn-ea"/>
+                <a:cs typeface="+mn-cs"/>
+              </a:defRPr>
+            </a:lvl7pPr>
+            <a:lvl8pPr marL="3429000" indent="-228600" algn="l" defTabSz="914400" rtl="0" eaLnBrk="1" latinLnBrk="1" hangingPunct="1">
+              <a:lnSpc>
+                <a:spcPct val="90000"/>
+              </a:lnSpc>
+              <a:spcBef>
+                <a:spcPts val="500"/>
+              </a:spcBef>
+              <a:buFont typeface="Arial" panose="020B0604020202020204" pitchFamily="34" charset="0"/>
+              <a:buChar char="•"/>
+              <a:defRPr sz="1800" kern="1200">
+                <a:solidFill>
+                  <a:schemeClr val="tx1"/>
+                </a:solidFill>
+                <a:latin typeface="+mn-lt"/>
+                <a:ea typeface="+mn-ea"/>
+                <a:cs typeface="+mn-cs"/>
+              </a:defRPr>
+            </a:lvl8pPr>
+            <a:lvl9pPr marL="3886200" indent="-228600" algn="l" defTabSz="914400" rtl="0" eaLnBrk="1" latinLnBrk="1" hangingPunct="1">
+              <a:lnSpc>
+                <a:spcPct val="90000"/>
+              </a:lnSpc>
+              <a:spcBef>
+                <a:spcPts val="500"/>
+              </a:spcBef>
+              <a:buFont typeface="Arial" panose="020B0604020202020204" pitchFamily="34" charset="0"/>
+              <a:buChar char="•"/>
+              <a:defRPr sz="1800" kern="1200">
+                <a:solidFill>
+                  <a:schemeClr val="tx1"/>
+                </a:solidFill>
+                <a:latin typeface="+mn-lt"/>
+                <a:ea typeface="+mn-ea"/>
+                <a:cs typeface="+mn-cs"/>
+              </a:defRPr>
+            </a:lvl9pPr>
+          </a:lstStyle>
+          <a:p>
+            <a:r>
+              <a:rPr lang="en-US" altLang="ko-KR" sz="900" dirty="0"/>
+              <a:t># core</a:t>
+            </a:r>
+          </a:p>
+          <a:p>
+            <a:r>
+              <a:rPr lang="en-US" altLang="ko-KR" sz="900" dirty="0" err="1"/>
+              <a:t>numpy</a:t>
+            </a:r>
+            <a:r>
+              <a:rPr lang="en-US" altLang="ko-KR" sz="900" dirty="0"/>
+              <a:t>&gt;=1.26</a:t>
+            </a:r>
+          </a:p>
+          <a:p>
+            <a:r>
+              <a:rPr lang="en-US" altLang="ko-KR" sz="900" dirty="0"/>
+              <a:t>pandas&gt;=2.1</a:t>
+            </a:r>
+          </a:p>
+          <a:p>
+            <a:endParaRPr lang="en-US" altLang="ko-KR" sz="900" dirty="0"/>
+          </a:p>
+          <a:p>
+            <a:r>
+              <a:rPr lang="en-US" altLang="ko-KR" sz="900" dirty="0"/>
+              <a:t># data</a:t>
+            </a:r>
+          </a:p>
+          <a:p>
+            <a:r>
+              <a:rPr lang="en-US" altLang="ko-KR" sz="900" dirty="0" err="1"/>
+              <a:t>yfinance</a:t>
+            </a:r>
+            <a:r>
+              <a:rPr lang="en-US" altLang="ko-KR" sz="900" dirty="0"/>
+              <a:t>&gt;=0.2</a:t>
+            </a:r>
+          </a:p>
+          <a:p>
+            <a:r>
+              <a:rPr lang="en-US" altLang="ko-KR" sz="900" dirty="0"/>
+              <a:t>requests&gt;=2.31</a:t>
+            </a:r>
+          </a:p>
+          <a:p>
+            <a:endParaRPr lang="en-US" altLang="ko-KR" sz="900" dirty="0"/>
+          </a:p>
+          <a:p>
+            <a:r>
+              <a:rPr lang="en-US" altLang="ko-KR" sz="900" dirty="0"/>
+              <a:t># analysis &amp; metrics</a:t>
+            </a:r>
+          </a:p>
+          <a:p>
+            <a:r>
+              <a:rPr lang="en-US" altLang="ko-KR" sz="900" dirty="0" err="1"/>
+              <a:t>scipy</a:t>
+            </a:r>
+            <a:r>
+              <a:rPr lang="en-US" altLang="ko-KR" sz="900" dirty="0"/>
+              <a:t>&gt;=1.11</a:t>
+            </a:r>
+          </a:p>
+          <a:p>
+            <a:endParaRPr lang="en-US" altLang="ko-KR" sz="900" dirty="0"/>
+          </a:p>
+          <a:p>
+            <a:r>
+              <a:rPr lang="en-US" altLang="ko-KR" sz="900" dirty="0"/>
+              <a:t># plotting</a:t>
+            </a:r>
+          </a:p>
+          <a:p>
+            <a:r>
+              <a:rPr lang="en-US" altLang="ko-KR" sz="900" dirty="0"/>
+              <a:t>matplotlib&gt;=3.8</a:t>
+            </a:r>
+          </a:p>
+          <a:p>
+            <a:r>
+              <a:rPr lang="en-US" altLang="ko-KR" sz="900" dirty="0"/>
+              <a:t>seaborn&gt;=0.13</a:t>
+            </a:r>
+          </a:p>
+          <a:p>
+            <a:endParaRPr lang="en-US" altLang="ko-KR" sz="900" dirty="0"/>
+          </a:p>
+          <a:p>
+            <a:r>
+              <a:rPr lang="en-US" altLang="ko-KR" sz="900" dirty="0"/>
+              <a:t># notebooks</a:t>
+            </a:r>
+          </a:p>
+          <a:p>
+            <a:r>
+              <a:rPr lang="en-US" altLang="ko-KR" sz="900" dirty="0" err="1"/>
+              <a:t>jupyter</a:t>
+            </a:r>
+            <a:r>
+              <a:rPr lang="en-US" altLang="ko-KR" sz="900" dirty="0"/>
+              <a:t>&gt;=1.0</a:t>
+            </a:r>
+          </a:p>
+          <a:p>
+            <a:r>
+              <a:rPr lang="en-US" altLang="ko-KR" sz="900" dirty="0" err="1"/>
+              <a:t>ipykernel</a:t>
+            </a:r>
+            <a:r>
+              <a:rPr lang="en-US" altLang="ko-KR" sz="900" dirty="0"/>
+              <a:t>&gt;=6.29</a:t>
+            </a:r>
+            <a:endParaRPr lang="ko-KR" altLang="en-US" sz="900" dirty="0"/>
+          </a:p>
+        </p:txBody>
+      </p:sp>
+      <p:sp>
+        <p:nvSpPr>
+          <p:cNvPr id="9" name="TextBox 8">
+            <a:extLst>
+              <a:ext uri="{FF2B5EF4-FFF2-40B4-BE49-F238E27FC236}">
+                <a16:creationId xmlns:a16="http://schemas.microsoft.com/office/drawing/2014/main" id="{DD5A54B8-E28A-FD8D-B053-8A8D799375C9}"/>
+              </a:ext>
+            </a:extLst>
+          </p:cNvPr>
+          <p:cNvSpPr txBox="1"/>
+          <p:nvPr/>
+        </p:nvSpPr>
+        <p:spPr>
+          <a:xfrm>
+            <a:off x="5768502" y="2337847"/>
+            <a:ext cx="5992346" cy="1846659"/>
+          </a:xfrm>
+          <a:prstGeom prst="rect">
+            <a:avLst/>
+          </a:prstGeom>
+          <a:noFill/>
+        </p:spPr>
+        <p:txBody>
+          <a:bodyPr wrap="none" rtlCol="0">
+            <a:spAutoFit/>
+          </a:bodyPr>
+          <a:lstStyle/>
+          <a:p>
+            <a:pPr marL="285750" indent="-285750">
+              <a:buFont typeface="Arial" panose="020B0604020202020204" pitchFamily="34" charset="0"/>
+              <a:buChar char="•"/>
+            </a:pPr>
+            <a:r>
+              <a:rPr lang="ko-KR" altLang="ko-KR" b="1" dirty="0" err="1">
+                <a:latin typeface="Arial" panose="020B0604020202020204" pitchFamily="34" charset="0"/>
+              </a:rPr>
+              <a:t>numpy</a:t>
+            </a:r>
+            <a:r>
+              <a:rPr lang="ko-KR" altLang="ko-KR" b="1" dirty="0">
+                <a:latin typeface="Arial" panose="020B0604020202020204" pitchFamily="34" charset="0"/>
+              </a:rPr>
+              <a:t> / </a:t>
+            </a:r>
+            <a:r>
+              <a:rPr lang="ko-KR" altLang="ko-KR" b="1" dirty="0" err="1">
+                <a:latin typeface="Arial" panose="020B0604020202020204" pitchFamily="34" charset="0"/>
+              </a:rPr>
+              <a:t>pandas</a:t>
+            </a:r>
+            <a:r>
+              <a:rPr lang="ko-KR" altLang="ko-KR" dirty="0">
+                <a:latin typeface="Arial" panose="020B0604020202020204" pitchFamily="34" charset="0"/>
+              </a:rPr>
+              <a:t> → </a:t>
+            </a:r>
+            <a:r>
+              <a:rPr lang="ko-KR" altLang="ko-KR" dirty="0" err="1">
+                <a:latin typeface="Arial" panose="020B0604020202020204" pitchFamily="34" charset="0"/>
+              </a:rPr>
+              <a:t>수익률·누적·변동성</a:t>
+            </a:r>
+            <a:r>
+              <a:rPr lang="ko-KR" altLang="ko-KR" dirty="0">
+                <a:latin typeface="Arial" panose="020B0604020202020204" pitchFamily="34" charset="0"/>
+              </a:rPr>
+              <a:t> 계산 핵심</a:t>
+            </a:r>
+            <a:endParaRPr lang="en-US" altLang="ko-KR" dirty="0">
+              <a:latin typeface="Arial" panose="020B0604020202020204" pitchFamily="34" charset="0"/>
+            </a:endParaRPr>
+          </a:p>
+          <a:p>
+            <a:pPr marL="285750" indent="-285750">
+              <a:buFont typeface="Arial" panose="020B0604020202020204" pitchFamily="34" charset="0"/>
+              <a:buChar char="•"/>
+            </a:pPr>
+            <a:r>
+              <a:rPr lang="ko-KR" altLang="ko-KR" b="1" dirty="0" err="1">
+                <a:latin typeface="Arial" panose="020B0604020202020204" pitchFamily="34" charset="0"/>
+              </a:rPr>
+              <a:t>yfinance</a:t>
+            </a:r>
+            <a:r>
+              <a:rPr lang="ko-KR" altLang="ko-KR" dirty="0">
+                <a:latin typeface="Arial" panose="020B0604020202020204" pitchFamily="34" charset="0"/>
+              </a:rPr>
+              <a:t> → AMD 등 주가 데이터 수집</a:t>
+            </a:r>
+          </a:p>
+          <a:p>
+            <a:pPr marL="285750" indent="-285750">
+              <a:buFont typeface="Arial" panose="020B0604020202020204" pitchFamily="34" charset="0"/>
+              <a:buChar char="•"/>
+            </a:pPr>
+            <a:r>
+              <a:rPr lang="ko-KR" altLang="ko-KR" b="1" dirty="0" err="1">
+                <a:latin typeface="Arial" panose="020B0604020202020204" pitchFamily="34" charset="0"/>
+              </a:rPr>
+              <a:t>scipy</a:t>
+            </a:r>
+            <a:r>
+              <a:rPr lang="ko-KR" altLang="ko-KR" dirty="0">
+                <a:latin typeface="Arial" panose="020B0604020202020204" pitchFamily="34" charset="0"/>
+              </a:rPr>
+              <a:t> → </a:t>
+            </a:r>
+            <a:r>
+              <a:rPr lang="ko-KR" altLang="ko-KR" dirty="0" err="1">
+                <a:latin typeface="Arial" panose="020B0604020202020204" pitchFamily="34" charset="0"/>
+              </a:rPr>
+              <a:t>Sharpe</a:t>
+            </a:r>
+            <a:r>
+              <a:rPr lang="ko-KR" altLang="ko-KR" dirty="0">
+                <a:latin typeface="Arial" panose="020B0604020202020204" pitchFamily="34" charset="0"/>
+              </a:rPr>
+              <a:t>, </a:t>
+            </a:r>
+            <a:r>
+              <a:rPr lang="ko-KR" altLang="ko-KR" dirty="0" err="1">
+                <a:latin typeface="Arial" panose="020B0604020202020204" pitchFamily="34" charset="0"/>
+              </a:rPr>
+              <a:t>Max</a:t>
+            </a:r>
+            <a:r>
+              <a:rPr lang="ko-KR" altLang="ko-KR" dirty="0">
+                <a:latin typeface="Arial" panose="020B0604020202020204" pitchFamily="34" charset="0"/>
+              </a:rPr>
+              <a:t> </a:t>
+            </a:r>
+            <a:r>
+              <a:rPr lang="ko-KR" altLang="ko-KR" dirty="0" err="1">
+                <a:latin typeface="Arial" panose="020B0604020202020204" pitchFamily="34" charset="0"/>
+              </a:rPr>
+              <a:t>Drawdown</a:t>
+            </a:r>
+            <a:r>
+              <a:rPr lang="ko-KR" altLang="ko-KR" dirty="0">
+                <a:latin typeface="Arial" panose="020B0604020202020204" pitchFamily="34" charset="0"/>
+              </a:rPr>
+              <a:t> 등 지표 계산</a:t>
+            </a:r>
+          </a:p>
+          <a:p>
+            <a:pPr marL="285750" indent="-285750">
+              <a:buFont typeface="Arial" panose="020B0604020202020204" pitchFamily="34" charset="0"/>
+              <a:buChar char="•"/>
+            </a:pPr>
+            <a:r>
+              <a:rPr lang="ko-KR" altLang="ko-KR" b="1" dirty="0" err="1">
+                <a:latin typeface="Arial" panose="020B0604020202020204" pitchFamily="34" charset="0"/>
+              </a:rPr>
+              <a:t>matplotlib</a:t>
+            </a:r>
+            <a:r>
+              <a:rPr lang="ko-KR" altLang="ko-KR" b="1" dirty="0">
+                <a:latin typeface="Arial" panose="020B0604020202020204" pitchFamily="34" charset="0"/>
+              </a:rPr>
+              <a:t> / </a:t>
+            </a:r>
+            <a:r>
+              <a:rPr lang="ko-KR" altLang="ko-KR" b="1" dirty="0" err="1">
+                <a:latin typeface="Arial" panose="020B0604020202020204" pitchFamily="34" charset="0"/>
+              </a:rPr>
+              <a:t>seaborn</a:t>
+            </a:r>
+            <a:r>
+              <a:rPr lang="ko-KR" altLang="ko-KR" dirty="0">
+                <a:latin typeface="Arial" panose="020B0604020202020204" pitchFamily="34" charset="0"/>
+              </a:rPr>
+              <a:t> → 레버리지 효과 시각화</a:t>
+            </a:r>
+            <a:endParaRPr lang="en-US" altLang="ko-KR" dirty="0">
+              <a:latin typeface="Arial" panose="020B0604020202020204" pitchFamily="34" charset="0"/>
+            </a:endParaRPr>
+          </a:p>
+          <a:p>
+            <a:pPr marL="285750" indent="-285750">
+              <a:buFont typeface="Arial" panose="020B0604020202020204" pitchFamily="34" charset="0"/>
+              <a:buChar char="•"/>
+            </a:pPr>
+            <a:r>
+              <a:rPr lang="ko-KR" altLang="ko-KR" b="1" dirty="0" err="1">
+                <a:latin typeface="Arial" panose="020B0604020202020204" pitchFamily="34" charset="0"/>
+              </a:rPr>
+              <a:t>jupyter</a:t>
+            </a:r>
+            <a:r>
+              <a:rPr lang="ko-KR" altLang="ko-KR" b="1" dirty="0">
+                <a:latin typeface="Arial" panose="020B0604020202020204" pitchFamily="34" charset="0"/>
+              </a:rPr>
+              <a:t> / </a:t>
+            </a:r>
+            <a:r>
+              <a:rPr lang="ko-KR" altLang="ko-KR" b="1" dirty="0" err="1">
+                <a:latin typeface="Arial" panose="020B0604020202020204" pitchFamily="34" charset="0"/>
+              </a:rPr>
+              <a:t>ipykernel</a:t>
+            </a:r>
+            <a:r>
+              <a:rPr lang="ko-KR" altLang="ko-KR" dirty="0">
+                <a:latin typeface="Arial" panose="020B0604020202020204" pitchFamily="34" charset="0"/>
+              </a:rPr>
+              <a:t> → </a:t>
+            </a:r>
+            <a:r>
+              <a:rPr kumimoji="0" lang="ko-KR" altLang="ko-KR" b="0" i="0" u="none" strike="noStrike" cap="none" normalizeH="0" baseline="0" dirty="0">
+                <a:ln>
+                  <a:noFill/>
+                </a:ln>
+                <a:solidFill>
+                  <a:schemeClr val="tx1"/>
+                </a:solidFill>
+                <a:effectLst/>
+                <a:latin typeface="Arial Unicode MS" panose="020B0604020202020204" pitchFamily="50" charset="-127"/>
+              </a:rPr>
+              <a:t>01_backtest_amd.ipynb</a:t>
+            </a:r>
+            <a:r>
+              <a:rPr kumimoji="0" lang="ko-KR" altLang="ko-KR" b="0" i="0" u="none" strike="noStrike" cap="none" normalizeH="0" baseline="0" dirty="0">
+                <a:ln>
+                  <a:noFill/>
+                </a:ln>
+                <a:solidFill>
+                  <a:schemeClr val="tx1"/>
+                </a:solidFill>
+                <a:effectLst/>
+              </a:rPr>
+              <a:t> 실행용</a:t>
+            </a:r>
+            <a:endParaRPr lang="ko-KR" altLang="ko-KR" dirty="0">
+              <a:latin typeface="Arial" panose="020B0604020202020204" pitchFamily="34" charset="0"/>
+            </a:endParaRPr>
+          </a:p>
+          <a:p>
+            <a:pPr marL="285750" indent="-285750">
+              <a:buFont typeface="Arial" panose="020B0604020202020204" pitchFamily="34" charset="0"/>
+              <a:buChar char="•"/>
+            </a:pPr>
+            <a:endParaRPr lang="ko-KR" altLang="ko-KR" sz="2400" dirty="0">
+              <a:latin typeface="Arial" panose="020B0604020202020204" pitchFamily="34" charset="0"/>
+            </a:endParaRPr>
+          </a:p>
+        </p:txBody>
+      </p:sp>
+    </p:spTree>
+    <p:extLst>
+      <p:ext uri="{BB962C8B-B14F-4D97-AF65-F5344CB8AC3E}">
+        <p14:creationId xmlns:p14="http://schemas.microsoft.com/office/powerpoint/2010/main" val="2670566322"/>
+      </p:ext>
+    </p:extLst>
+  </p:cSld>
+  <p:clrMapOvr>
+    <a:masterClrMapping/>
+  </p:clrMapOvr>
+</p:sld>
+</file>
+
+<file path=ppt/slides/slide27.xml><?xml version="1.0" encoding="utf-8"?>
+<p:sld xmlns:a="http://schemas.openxmlformats.org/drawingml/2006/main" xmlns:r="http://schemas.openxmlformats.org/officeDocument/2006/relationships" xmlns:p="http://schemas.openxmlformats.org/presentationml/2006/main">
+  <p:cSld>
+    <p:spTree>
+      <p:nvGrpSpPr>
+        <p:cNvPr id="1" name=""/>
+        <p:cNvGrpSpPr/>
+        <p:nvPr/>
+      </p:nvGrpSpPr>
+      <p:grpSpPr>
+        <a:xfrm>
+          <a:off x="0" y="0"/>
+          <a:ext cx="0" cy="0"/>
+          <a:chOff x="0" y="0"/>
+          <a:chExt cx="0" cy="0"/>
+        </a:xfrm>
+      </p:grpSpPr>
+      <p:sp>
+        <p:nvSpPr>
+          <p:cNvPr id="2" name="제목 1">
+            <a:extLst>
+              <a:ext uri="{FF2B5EF4-FFF2-40B4-BE49-F238E27FC236}">
+                <a16:creationId xmlns:a16="http://schemas.microsoft.com/office/drawing/2014/main" id="{38B1AFB4-299A-4C2E-0EA7-33D658348EB3}"/>
+              </a:ext>
+            </a:extLst>
+          </p:cNvPr>
+          <p:cNvSpPr>
+            <a:spLocks noGrp="1"/>
+          </p:cNvSpPr>
+          <p:nvPr>
+            <p:ph type="title"/>
+          </p:nvPr>
+        </p:nvSpPr>
+        <p:spPr/>
+        <p:txBody>
+          <a:bodyPr>
+            <a:normAutofit/>
+          </a:bodyPr>
+          <a:lstStyle/>
+          <a:p>
+            <a:r>
+              <a:rPr lang="ko-KR" altLang="en-US" sz="3200" dirty="0"/>
+              <a:t>가상환경생성</a:t>
+            </a:r>
+          </a:p>
+        </p:txBody>
+      </p:sp>
+      <p:sp>
+        <p:nvSpPr>
+          <p:cNvPr id="3" name="내용 개체 틀 2">
+            <a:extLst>
+              <a:ext uri="{FF2B5EF4-FFF2-40B4-BE49-F238E27FC236}">
+                <a16:creationId xmlns:a16="http://schemas.microsoft.com/office/drawing/2014/main" id="{DB6695F6-36FD-16CA-5F16-33739651FFAF}"/>
+              </a:ext>
+            </a:extLst>
+          </p:cNvPr>
+          <p:cNvSpPr>
+            <a:spLocks noGrp="1"/>
+          </p:cNvSpPr>
+          <p:nvPr>
+            <p:ph idx="1"/>
+          </p:nvPr>
+        </p:nvSpPr>
+        <p:spPr/>
+        <p:txBody>
+          <a:bodyPr>
+            <a:normAutofit fontScale="92500" lnSpcReduction="10000"/>
+          </a:bodyPr>
+          <a:lstStyle/>
+          <a:p>
+            <a:r>
+              <a:rPr lang="ko-KR" altLang="en-US" dirty="0"/>
+              <a:t>프로젝트마다 독립된 파이썬 실험실</a:t>
+            </a:r>
+            <a:r>
+              <a:rPr lang="en-US" altLang="ko-KR" dirty="0"/>
+              <a:t>(</a:t>
+            </a:r>
+            <a:r>
+              <a:rPr lang="ko-KR" altLang="en-US" dirty="0"/>
+              <a:t>파이썬 기능</a:t>
+            </a:r>
+            <a:r>
+              <a:rPr lang="en-US" altLang="ko-KR" dirty="0"/>
+              <a:t>)</a:t>
+            </a:r>
+          </a:p>
+          <a:p>
+            <a:r>
+              <a:rPr lang="ko-KR" altLang="en-US" b="1" dirty="0"/>
+              <a:t>🔹 </a:t>
+            </a:r>
+            <a:r>
+              <a:rPr lang="en-US" altLang="ko-KR" b="1" dirty="0"/>
+              <a:t>1. </a:t>
+            </a:r>
+            <a:r>
+              <a:rPr lang="ko-KR" altLang="en-US" b="1" dirty="0"/>
+              <a:t>패키지 버전 격리</a:t>
+            </a:r>
+          </a:p>
+          <a:p>
+            <a:r>
+              <a:rPr lang="ko-KR" altLang="en-US" dirty="0"/>
+              <a:t>프로젝트 </a:t>
+            </a:r>
+            <a:r>
+              <a:rPr lang="en-US" altLang="ko-KR" dirty="0"/>
+              <a:t>A → </a:t>
+            </a:r>
+            <a:r>
+              <a:rPr lang="en-US" altLang="ko-KR" dirty="0" err="1"/>
+              <a:t>numpy</a:t>
+            </a:r>
+            <a:r>
+              <a:rPr lang="en-US" altLang="ko-KR" dirty="0"/>
+              <a:t> 1.23</a:t>
+            </a:r>
+          </a:p>
+          <a:p>
+            <a:r>
+              <a:rPr lang="ko-KR" altLang="en-US" dirty="0"/>
+              <a:t>프로젝트 </a:t>
+            </a:r>
+            <a:r>
+              <a:rPr lang="en-US" altLang="ko-KR" dirty="0"/>
+              <a:t>B → </a:t>
+            </a:r>
+            <a:r>
+              <a:rPr lang="en-US" altLang="ko-KR" dirty="0" err="1"/>
+              <a:t>numpy</a:t>
+            </a:r>
+            <a:r>
+              <a:rPr lang="en-US" altLang="ko-KR" dirty="0"/>
+              <a:t> 1.26</a:t>
+            </a:r>
+          </a:p>
+          <a:p>
+            <a:r>
+              <a:rPr lang="ko-KR" altLang="en-US" dirty="0"/>
+              <a:t>서로 </a:t>
+            </a:r>
+            <a:r>
+              <a:rPr lang="ko-KR" altLang="en-US" b="1" dirty="0"/>
+              <a:t>완전히 독립</a:t>
+            </a:r>
+            <a:endParaRPr lang="ko-KR" altLang="en-US" dirty="0"/>
+          </a:p>
+          <a:p>
+            <a:r>
+              <a:rPr lang="ko-KR" altLang="en-US" b="1" dirty="0"/>
+              <a:t>🔹 </a:t>
+            </a:r>
+            <a:r>
+              <a:rPr lang="en-US" altLang="ko-KR" b="1" dirty="0"/>
+              <a:t>2. </a:t>
+            </a:r>
+            <a:r>
+              <a:rPr lang="ko-KR" altLang="en-US" b="1" dirty="0"/>
+              <a:t>재현성 </a:t>
+            </a:r>
+            <a:r>
+              <a:rPr lang="en-US" altLang="ko-KR" b="1" dirty="0"/>
+              <a:t>(Reproducibility)</a:t>
+            </a:r>
+          </a:p>
+          <a:p>
+            <a:r>
+              <a:rPr lang="en-US" altLang="ko-KR" dirty="0"/>
+              <a:t>pip install -r requirements.txt</a:t>
+            </a:r>
+          </a:p>
+          <a:p>
+            <a:r>
+              <a:rPr lang="ko-KR" altLang="en-US" dirty="0"/>
+              <a:t>👉 </a:t>
+            </a:r>
+            <a:r>
+              <a:rPr lang="en-US" altLang="ko-KR" b="1" dirty="0"/>
+              <a:t>6</a:t>
+            </a:r>
+            <a:r>
+              <a:rPr lang="ko-KR" altLang="en-US" b="1" dirty="0"/>
+              <a:t>개월 뒤 </a:t>
+            </a:r>
+            <a:r>
+              <a:rPr lang="en-US" altLang="ko-KR" b="1" dirty="0"/>
+              <a:t>/ </a:t>
+            </a:r>
+            <a:r>
+              <a:rPr lang="ko-KR" altLang="en-US" b="1" dirty="0"/>
+              <a:t>다른 </a:t>
+            </a:r>
+            <a:r>
+              <a:rPr lang="en-US" altLang="ko-KR" b="1" dirty="0"/>
+              <a:t>PC / </a:t>
+            </a:r>
+            <a:r>
+              <a:rPr lang="ko-KR" altLang="en-US" b="1" dirty="0"/>
+              <a:t>다른 사람</a:t>
+            </a:r>
+            <a:r>
+              <a:rPr lang="ko-KR" altLang="en-US" dirty="0"/>
+              <a:t>도</a:t>
+            </a:r>
+            <a:br>
+              <a:rPr lang="ko-KR" altLang="en-US" dirty="0"/>
+            </a:br>
+            <a:r>
+              <a:rPr lang="ko-KR" altLang="en-US" b="1" dirty="0"/>
+              <a:t>완전히 동일한 환경</a:t>
+            </a:r>
+            <a:r>
+              <a:rPr lang="ko-KR" altLang="en-US" dirty="0"/>
+              <a:t> 재현 가능</a:t>
+            </a:r>
+          </a:p>
+          <a:p>
+            <a:r>
+              <a:rPr lang="ko-KR" altLang="en-US" dirty="0"/>
+              <a:t>이건 연구</a:t>
+            </a:r>
+            <a:r>
+              <a:rPr lang="en-US" altLang="ko-KR" dirty="0"/>
+              <a:t>·</a:t>
+            </a:r>
+            <a:r>
+              <a:rPr lang="ko-KR" altLang="en-US" dirty="0"/>
+              <a:t>백테스트</a:t>
+            </a:r>
+            <a:r>
+              <a:rPr lang="en-US" altLang="ko-KR" dirty="0"/>
+              <a:t>·</a:t>
+            </a:r>
+            <a:r>
+              <a:rPr lang="ko-KR" altLang="en-US" dirty="0"/>
+              <a:t>금융 프로젝트에선 거의 필수야</a:t>
+            </a:r>
+            <a:r>
+              <a:rPr lang="en-US" altLang="ko-KR" dirty="0"/>
+              <a:t>.</a:t>
+            </a:r>
+          </a:p>
+          <a:p>
+            <a:endParaRPr lang="ko-KR" altLang="en-US" dirty="0"/>
+          </a:p>
+        </p:txBody>
+      </p:sp>
+    </p:spTree>
+    <p:extLst>
+      <p:ext uri="{BB962C8B-B14F-4D97-AF65-F5344CB8AC3E}">
+        <p14:creationId xmlns:p14="http://schemas.microsoft.com/office/powerpoint/2010/main" val="595479664"/>
+      </p:ext>
+    </p:extLst>
+  </p:cSld>
+  <p:clrMapOvr>
+    <a:masterClrMapping/>
+  </p:clrMapOvr>
+</p:sld>
+</file>
+
+<file path=ppt/slides/slide28.xml><?xml version="1.0" encoding="utf-8"?>
+<p:sld xmlns:a="http://schemas.openxmlformats.org/drawingml/2006/main" xmlns:r="http://schemas.openxmlformats.org/officeDocument/2006/relationships" xmlns:p="http://schemas.openxmlformats.org/presentationml/2006/main">
+  <p:cSld>
+    <p:spTree>
+      <p:nvGrpSpPr>
+        <p:cNvPr id="1" name=""/>
+        <p:cNvGrpSpPr/>
+        <p:nvPr/>
+      </p:nvGrpSpPr>
+      <p:grpSpPr>
+        <a:xfrm>
+          <a:off x="0" y="0"/>
+          <a:ext cx="0" cy="0"/>
+          <a:chOff x="0" y="0"/>
+          <a:chExt cx="0" cy="0"/>
+        </a:xfrm>
+      </p:grpSpPr>
+      <p:sp>
+        <p:nvSpPr>
+          <p:cNvPr id="2" name="제목 1">
+            <a:extLst>
+              <a:ext uri="{FF2B5EF4-FFF2-40B4-BE49-F238E27FC236}">
+                <a16:creationId xmlns:a16="http://schemas.microsoft.com/office/drawing/2014/main" id="{E74E2FB0-5B22-DF29-79EE-01821CE3FBAB}"/>
+              </a:ext>
+            </a:extLst>
+          </p:cNvPr>
+          <p:cNvSpPr>
+            <a:spLocks noGrp="1"/>
+          </p:cNvSpPr>
+          <p:nvPr>
+            <p:ph type="title"/>
+          </p:nvPr>
+        </p:nvSpPr>
+        <p:spPr/>
+        <p:txBody>
+          <a:bodyPr/>
+          <a:lstStyle/>
+          <a:p>
+            <a:endParaRPr lang="ko-KR" altLang="en-US"/>
+          </a:p>
+        </p:txBody>
+      </p:sp>
+      <p:sp>
+        <p:nvSpPr>
+          <p:cNvPr id="3" name="내용 개체 틀 2">
+            <a:extLst>
+              <a:ext uri="{FF2B5EF4-FFF2-40B4-BE49-F238E27FC236}">
+                <a16:creationId xmlns:a16="http://schemas.microsoft.com/office/drawing/2014/main" id="{BBB8D2EE-FD1E-1A29-C652-6697B8615A69}"/>
+              </a:ext>
+            </a:extLst>
+          </p:cNvPr>
+          <p:cNvSpPr>
+            <a:spLocks noGrp="1"/>
+          </p:cNvSpPr>
+          <p:nvPr>
+            <p:ph idx="1"/>
+          </p:nvPr>
+        </p:nvSpPr>
+        <p:spPr/>
+        <p:txBody>
+          <a:bodyPr/>
+          <a:lstStyle/>
+          <a:p>
+            <a:r>
+              <a:rPr lang="ko-KR" altLang="en-US" b="1" dirty="0"/>
+              <a:t>🔹 </a:t>
+            </a:r>
+            <a:r>
+              <a:rPr lang="en-US" altLang="ko-KR" b="1" dirty="0"/>
+              <a:t>3. </a:t>
+            </a:r>
+            <a:r>
+              <a:rPr lang="ko-KR" altLang="en-US" b="1" dirty="0"/>
+              <a:t>시스템 파이썬 보호</a:t>
+            </a:r>
+          </a:p>
+          <a:p>
+            <a:r>
+              <a:rPr lang="ko-KR" altLang="en-US" dirty="0"/>
+              <a:t>가상환경 없이 설치하면</a:t>
+            </a:r>
+            <a:r>
+              <a:rPr lang="en-US" altLang="ko-KR" dirty="0"/>
+              <a:t>:</a:t>
+            </a:r>
+          </a:p>
+          <a:p>
+            <a:r>
+              <a:rPr lang="en-US" altLang="ko-KR" dirty="0"/>
+              <a:t>pip install </a:t>
+            </a:r>
+            <a:r>
+              <a:rPr lang="en-US" altLang="ko-KR" dirty="0" err="1"/>
+              <a:t>scipy</a:t>
+            </a:r>
+            <a:endParaRPr lang="en-US" altLang="ko-KR" dirty="0"/>
+          </a:p>
+          <a:p>
+            <a:r>
+              <a:rPr lang="ko-KR" altLang="en-US" dirty="0"/>
+              <a:t>➡️ </a:t>
+            </a:r>
+            <a:r>
+              <a:rPr lang="en-US" altLang="ko-KR" dirty="0"/>
+              <a:t>OS</a:t>
+            </a:r>
+            <a:r>
+              <a:rPr lang="ko-KR" altLang="en-US" dirty="0"/>
+              <a:t>가 쓰는 </a:t>
+            </a:r>
+            <a:r>
+              <a:rPr lang="en-US" altLang="ko-KR" dirty="0"/>
+              <a:t>Python </a:t>
+            </a:r>
+            <a:r>
+              <a:rPr lang="ko-KR" altLang="en-US" dirty="0"/>
+              <a:t>라이브러리를 덮어씀</a:t>
+            </a:r>
+            <a:br>
+              <a:rPr lang="ko-KR" altLang="en-US" dirty="0"/>
+            </a:br>
+            <a:r>
+              <a:rPr lang="ko-KR" altLang="en-US" dirty="0"/>
+              <a:t>➡️ 최악의 경우 </a:t>
+            </a:r>
+            <a:r>
+              <a:rPr lang="en-US" altLang="ko-KR" b="1" dirty="0"/>
+              <a:t>Python </a:t>
+            </a:r>
+            <a:r>
+              <a:rPr lang="ko-KR" altLang="en-US" b="1" dirty="0"/>
+              <a:t>자체가 고장</a:t>
+            </a:r>
+            <a:endParaRPr lang="ko-KR" altLang="en-US" dirty="0"/>
+          </a:p>
+          <a:p>
+            <a:r>
+              <a:rPr lang="ko-KR" altLang="en-US" dirty="0"/>
+              <a:t>가상환경은</a:t>
+            </a:r>
+            <a:r>
+              <a:rPr lang="en-US" altLang="ko-KR" dirty="0"/>
+              <a:t>:</a:t>
+            </a:r>
+          </a:p>
+          <a:p>
+            <a:r>
+              <a:rPr lang="ko-KR" altLang="en-US" dirty="0"/>
+              <a:t>시스템 </a:t>
+            </a:r>
+            <a:r>
+              <a:rPr lang="en-US" altLang="ko-KR" dirty="0"/>
+              <a:t>Python ❌ </a:t>
+            </a:r>
+            <a:r>
+              <a:rPr lang="ko-KR" altLang="en-US" dirty="0"/>
+              <a:t>건드리지 않음</a:t>
+            </a:r>
+          </a:p>
+          <a:p>
+            <a:endParaRPr lang="ko-KR" altLang="en-US" dirty="0"/>
+          </a:p>
+        </p:txBody>
+      </p:sp>
+    </p:spTree>
+    <p:extLst>
+      <p:ext uri="{BB962C8B-B14F-4D97-AF65-F5344CB8AC3E}">
+        <p14:creationId xmlns:p14="http://schemas.microsoft.com/office/powerpoint/2010/main" val="3333474430"/>
+      </p:ext>
+    </p:extLst>
+  </p:cSld>
+  <p:clrMapOvr>
+    <a:masterClrMapping/>
+  </p:clrMapOvr>
+</p:sld>
+</file>
+
+<file path=ppt/slides/slide29.xml><?xml version="1.0" encoding="utf-8"?>
+<p:sld xmlns:a="http://schemas.openxmlformats.org/drawingml/2006/main" xmlns:r="http://schemas.openxmlformats.org/officeDocument/2006/relationships" xmlns:p="http://schemas.openxmlformats.org/presentationml/2006/main">
+  <p:cSld>
+    <p:spTree>
+      <p:nvGrpSpPr>
+        <p:cNvPr id="1" name=""/>
+        <p:cNvGrpSpPr/>
+        <p:nvPr/>
+      </p:nvGrpSpPr>
+      <p:grpSpPr>
+        <a:xfrm>
+          <a:off x="0" y="0"/>
+          <a:ext cx="0" cy="0"/>
+          <a:chOff x="0" y="0"/>
+          <a:chExt cx="0" cy="0"/>
+        </a:xfrm>
+      </p:grpSpPr>
+      <p:sp>
+        <p:nvSpPr>
+          <p:cNvPr id="2" name="제목 1">
+            <a:extLst>
+              <a:ext uri="{FF2B5EF4-FFF2-40B4-BE49-F238E27FC236}">
+                <a16:creationId xmlns:a16="http://schemas.microsoft.com/office/drawing/2014/main" id="{2B0EC50B-5BE6-F786-65D4-8624A8A5BFDD}"/>
+              </a:ext>
+            </a:extLst>
+          </p:cNvPr>
+          <p:cNvSpPr>
+            <a:spLocks noGrp="1"/>
+          </p:cNvSpPr>
+          <p:nvPr>
+            <p:ph type="title"/>
+          </p:nvPr>
+        </p:nvSpPr>
+        <p:spPr/>
+        <p:txBody>
+          <a:bodyPr/>
+          <a:lstStyle/>
+          <a:p>
+            <a:r>
+              <a:rPr lang="ko-KR" altLang="en-US" dirty="0"/>
+              <a:t>가상환경 코드</a:t>
+            </a:r>
+          </a:p>
+        </p:txBody>
+      </p:sp>
+      <p:sp>
+        <p:nvSpPr>
+          <p:cNvPr id="3" name="내용 개체 틀 2">
+            <a:extLst>
+              <a:ext uri="{FF2B5EF4-FFF2-40B4-BE49-F238E27FC236}">
+                <a16:creationId xmlns:a16="http://schemas.microsoft.com/office/drawing/2014/main" id="{CB0B2737-AAD8-44B9-ED0D-9E60B8719223}"/>
+              </a:ext>
+            </a:extLst>
+          </p:cNvPr>
+          <p:cNvSpPr>
+            <a:spLocks noGrp="1"/>
+          </p:cNvSpPr>
+          <p:nvPr>
+            <p:ph idx="1"/>
+          </p:nvPr>
+        </p:nvSpPr>
+        <p:spPr/>
+        <p:txBody>
+          <a:bodyPr>
+            <a:normAutofit fontScale="85000" lnSpcReduction="20000"/>
+          </a:bodyPr>
+          <a:lstStyle/>
+          <a:p>
+            <a:r>
+              <a:rPr lang="ko-KR" altLang="en-US" dirty="0"/>
+              <a:t>새 위치로 이동</a:t>
+            </a:r>
+            <a:endParaRPr lang="en-US" altLang="ko-KR" dirty="0"/>
+          </a:p>
+          <a:p>
+            <a:r>
+              <a:rPr lang="ko-KR" altLang="en-US" dirty="0"/>
+              <a:t>기존 가상환경 삭제</a:t>
+            </a:r>
+            <a:endParaRPr lang="en-US" altLang="ko-KR" dirty="0"/>
+          </a:p>
+          <a:p>
+            <a:r>
+              <a:rPr lang="en-US" altLang="ko-KR" dirty="0" err="1"/>
+              <a:t>rmdir</a:t>
+            </a:r>
+            <a:r>
+              <a:rPr lang="en-US" altLang="ko-KR" dirty="0"/>
+              <a:t> /s /q .</a:t>
+            </a:r>
+            <a:r>
+              <a:rPr lang="en-US" altLang="ko-KR" dirty="0" err="1"/>
+              <a:t>venv</a:t>
+            </a:r>
+            <a:endParaRPr lang="en-US" altLang="ko-KR" dirty="0"/>
+          </a:p>
+          <a:p>
+            <a:r>
+              <a:rPr lang="ko-KR" altLang="en-US" dirty="0"/>
+              <a:t>새로운 가상환경 생성</a:t>
+            </a:r>
+            <a:endParaRPr lang="en-US" altLang="ko-KR" dirty="0"/>
+          </a:p>
+          <a:p>
+            <a:r>
+              <a:rPr lang="en-US" altLang="ko-KR" dirty="0"/>
+              <a:t>python -m </a:t>
+            </a:r>
+            <a:r>
+              <a:rPr lang="en-US" altLang="ko-KR" dirty="0" err="1"/>
+              <a:t>venv</a:t>
+            </a:r>
+            <a:r>
+              <a:rPr lang="en-US" altLang="ko-KR" dirty="0"/>
+              <a:t> .</a:t>
+            </a:r>
+            <a:r>
+              <a:rPr lang="en-US" altLang="ko-KR" dirty="0" err="1"/>
+              <a:t>venv</a:t>
+            </a:r>
+            <a:endParaRPr lang="en-US" altLang="ko-KR" dirty="0"/>
+          </a:p>
+          <a:p>
+            <a:r>
+              <a:rPr lang="ko-KR" altLang="en-US" dirty="0"/>
+              <a:t>활성화</a:t>
+            </a:r>
+            <a:endParaRPr lang="en-US" altLang="ko-KR" dirty="0"/>
+          </a:p>
+          <a:p>
+            <a:r>
+              <a:rPr lang="en-US" altLang="ko-KR" dirty="0"/>
+              <a:t>source .</a:t>
+            </a:r>
+            <a:r>
+              <a:rPr lang="en-US" altLang="ko-KR" dirty="0" err="1"/>
+              <a:t>venv</a:t>
+            </a:r>
+            <a:r>
+              <a:rPr lang="en-US" altLang="ko-KR" dirty="0"/>
+              <a:t>/bin/activate</a:t>
+            </a:r>
+          </a:p>
+          <a:p>
+            <a:r>
+              <a:rPr lang="ko-KR" altLang="en-US" dirty="0"/>
+              <a:t>패키지 재설치</a:t>
+            </a:r>
+            <a:endParaRPr lang="en-US" altLang="ko-KR" dirty="0"/>
+          </a:p>
+          <a:p>
+            <a:r>
+              <a:rPr lang="en-US" altLang="ko-KR" dirty="0"/>
+              <a:t>pip install --upgrade pip</a:t>
+            </a:r>
+          </a:p>
+          <a:p>
+            <a:r>
+              <a:rPr lang="en-US" altLang="ko-KR" dirty="0"/>
+              <a:t>pip install -r requirements.txt</a:t>
+            </a:r>
+          </a:p>
+          <a:p>
+            <a:r>
+              <a:rPr lang="en-US" altLang="ko-KR" dirty="0"/>
+              <a:t>pip install </a:t>
+            </a:r>
+            <a:r>
+              <a:rPr lang="en-US" altLang="ko-KR" dirty="0" err="1"/>
+              <a:t>yfinance</a:t>
+            </a:r>
+            <a:endParaRPr lang="ko-KR" altLang="en-US" dirty="0"/>
+          </a:p>
+        </p:txBody>
+      </p:sp>
+    </p:spTree>
+    <p:extLst>
+      <p:ext uri="{BB962C8B-B14F-4D97-AF65-F5344CB8AC3E}">
+        <p14:creationId xmlns:p14="http://schemas.microsoft.com/office/powerpoint/2010/main" val="3079119012"/>
+      </p:ext>
+    </p:extLst>
+  </p:cSld>
+  <p:clrMapOvr>
+    <a:masterClrMapping/>
+  </p:clrMapOvr>
+</p:sld>
+</file>
+
+<file path=ppt/slides/slide3.xml><?xml version="1.0" encoding="utf-8"?>
 <p:sld xmlns:a="http://schemas.openxmlformats.org/drawingml/2006/main" xmlns:r="http://schemas.openxmlformats.org/officeDocument/2006/relationships" xmlns:p="http://schemas.openxmlformats.org/presentationml/2006/main">
   <p:cSld>
     <p:spTree>
@@ -6465,2692 +9587,7 @@
 </p:sld>
 </file>
 
-<file path=ppt/slides/slide20.xml><?xml version="1.0" encoding="utf-8"?>
-<p:sld xmlns:a="http://schemas.openxmlformats.org/drawingml/2006/main" xmlns:r="http://schemas.openxmlformats.org/officeDocument/2006/relationships" xmlns:p="http://schemas.openxmlformats.org/presentationml/2006/main">
-  <p:cSld>
-    <p:spTree>
-      <p:nvGrpSpPr>
-        <p:cNvPr id="1" name=""/>
-        <p:cNvGrpSpPr/>
-        <p:nvPr/>
-      </p:nvGrpSpPr>
-      <p:grpSpPr>
-        <a:xfrm>
-          <a:off x="0" y="0"/>
-          <a:ext cx="0" cy="0"/>
-          <a:chOff x="0" y="0"/>
-          <a:chExt cx="0" cy="0"/>
-        </a:xfrm>
-      </p:grpSpPr>
-      <p:sp>
-        <p:nvSpPr>
-          <p:cNvPr id="2" name="제목 1">
-            <a:extLst>
-              <a:ext uri="{FF2B5EF4-FFF2-40B4-BE49-F238E27FC236}">
-                <a16:creationId xmlns:a16="http://schemas.microsoft.com/office/drawing/2014/main" id="{E384A405-1FE1-476A-47A7-A8BEE6299E5A}"/>
-              </a:ext>
-            </a:extLst>
-          </p:cNvPr>
-          <p:cNvSpPr>
-            <a:spLocks noGrp="1"/>
-          </p:cNvSpPr>
-          <p:nvPr>
-            <p:ph type="title"/>
-          </p:nvPr>
-        </p:nvSpPr>
-        <p:spPr/>
-        <p:txBody>
-          <a:bodyPr/>
-          <a:lstStyle/>
-          <a:p>
-            <a:endParaRPr lang="ko-KR" altLang="en-US"/>
-          </a:p>
-        </p:txBody>
-      </p:sp>
-      <p:pic>
-        <p:nvPicPr>
-          <p:cNvPr id="5" name="그림 4" descr="텍스트, 스크린샷, 폰트, 번호이(가) 표시된 사진&#10;&#10;AI 생성 콘텐츠는 정확하지 않을 수 있습니다.">
-            <a:extLst>
-              <a:ext uri="{FF2B5EF4-FFF2-40B4-BE49-F238E27FC236}">
-                <a16:creationId xmlns:a16="http://schemas.microsoft.com/office/drawing/2014/main" id="{4BAB4373-105D-547B-1D92-BA05875FFD5C}"/>
-              </a:ext>
-            </a:extLst>
-          </p:cNvPr>
-          <p:cNvPicPr>
-            <a:picLocks noChangeAspect="1"/>
-          </p:cNvPicPr>
-          <p:nvPr/>
-        </p:nvPicPr>
-        <p:blipFill>
-          <a:blip r:embed="rId2"/>
-          <a:stretch>
-            <a:fillRect/>
-          </a:stretch>
-        </p:blipFill>
-        <p:spPr>
-          <a:xfrm>
-            <a:off x="838200" y="1826358"/>
-            <a:ext cx="3697514" cy="4666517"/>
-          </a:xfrm>
-          <a:prstGeom prst="rect">
-            <a:avLst/>
-          </a:prstGeom>
-        </p:spPr>
-      </p:pic>
-      <p:sp>
-        <p:nvSpPr>
-          <p:cNvPr id="6" name="TextBox 5">
-            <a:extLst>
-              <a:ext uri="{FF2B5EF4-FFF2-40B4-BE49-F238E27FC236}">
-                <a16:creationId xmlns:a16="http://schemas.microsoft.com/office/drawing/2014/main" id="{FE8089A4-EB80-2581-EBAF-72F8C8F43C96}"/>
-              </a:ext>
-            </a:extLst>
-          </p:cNvPr>
-          <p:cNvSpPr txBox="1"/>
-          <p:nvPr/>
-        </p:nvSpPr>
-        <p:spPr>
-          <a:xfrm>
-            <a:off x="5486399" y="3874551"/>
-            <a:ext cx="5205046" cy="1200329"/>
-          </a:xfrm>
-          <a:prstGeom prst="rect">
-            <a:avLst/>
-          </a:prstGeom>
-          <a:noFill/>
-        </p:spPr>
-        <p:txBody>
-          <a:bodyPr wrap="square" rtlCol="0">
-            <a:spAutoFit/>
-          </a:bodyPr>
-          <a:lstStyle/>
-          <a:p>
-            <a:r>
-              <a:rPr lang="en-US" altLang="ko-KR" dirty="0"/>
-              <a:t>0.768377 / 1.282976 ≈ 0.599</a:t>
-            </a:r>
-          </a:p>
-          <a:p>
-            <a:endParaRPr lang="en-US" altLang="ko-KR" dirty="0"/>
-          </a:p>
-          <a:p>
-            <a:r>
-              <a:rPr lang="en-US" altLang="ko-KR" dirty="0"/>
-              <a:t>2026-01-29 </a:t>
-            </a:r>
-            <a:r>
-              <a:rPr lang="ko-KR" altLang="en-US" dirty="0"/>
-              <a:t>이후부터 </a:t>
-            </a:r>
-            <a:r>
-              <a:rPr lang="en-US" altLang="ko-KR" dirty="0"/>
-              <a:t>2026-02-04</a:t>
-            </a:r>
-            <a:r>
-              <a:rPr lang="ko-KR" altLang="en-US" dirty="0"/>
-              <a:t>까지</a:t>
-            </a:r>
-            <a:br>
-              <a:rPr lang="ko-KR" altLang="en-US" dirty="0"/>
-            </a:br>
-            <a:r>
-              <a:rPr lang="en-US" altLang="ko-KR" dirty="0"/>
-              <a:t>2x </a:t>
-            </a:r>
-            <a:r>
-              <a:rPr lang="ko-KR" altLang="en-US" dirty="0"/>
-              <a:t>레버리지 기준으로 약 </a:t>
-            </a:r>
-            <a:r>
-              <a:rPr lang="en-US" altLang="ko-KR" dirty="0"/>
-              <a:t>-40% </a:t>
-            </a:r>
-            <a:r>
-              <a:rPr lang="ko-KR" altLang="en-US" dirty="0"/>
-              <a:t>추가 손실이 났다</a:t>
-            </a:r>
-          </a:p>
-        </p:txBody>
-      </p:sp>
-      <p:sp>
-        <p:nvSpPr>
-          <p:cNvPr id="7" name="TextBox 6">
-            <a:extLst>
-              <a:ext uri="{FF2B5EF4-FFF2-40B4-BE49-F238E27FC236}">
-                <a16:creationId xmlns:a16="http://schemas.microsoft.com/office/drawing/2014/main" id="{D820A18F-5C06-2CBB-7C7D-844B8601A553}"/>
-              </a:ext>
-            </a:extLst>
-          </p:cNvPr>
-          <p:cNvSpPr txBox="1"/>
-          <p:nvPr/>
-        </p:nvSpPr>
-        <p:spPr>
-          <a:xfrm>
-            <a:off x="5486399" y="2182455"/>
-            <a:ext cx="5205046" cy="1200329"/>
-          </a:xfrm>
-          <a:prstGeom prst="rect">
-            <a:avLst/>
-          </a:prstGeom>
-          <a:noFill/>
-        </p:spPr>
-        <p:txBody>
-          <a:bodyPr wrap="square" rtlCol="0">
-            <a:spAutoFit/>
-          </a:bodyPr>
-          <a:lstStyle/>
-          <a:p>
-            <a:r>
-              <a:rPr lang="en-US" altLang="ko-KR" dirty="0"/>
-              <a:t>0.905509  / 1.140673 ≈ 0.793</a:t>
-            </a:r>
-          </a:p>
-          <a:p>
-            <a:endParaRPr lang="en-US" altLang="ko-KR" dirty="0"/>
-          </a:p>
-          <a:p>
-            <a:r>
-              <a:rPr lang="en-US" altLang="ko-KR" dirty="0"/>
-              <a:t>2026-01-29 </a:t>
-            </a:r>
-            <a:r>
-              <a:rPr lang="ko-KR" altLang="en-US" dirty="0"/>
-              <a:t>이후부터 </a:t>
-            </a:r>
-            <a:r>
-              <a:rPr lang="en-US" altLang="ko-KR" dirty="0"/>
-              <a:t>2026-02-04</a:t>
-            </a:r>
-            <a:r>
-              <a:rPr lang="ko-KR" altLang="en-US" dirty="0"/>
-              <a:t>까지</a:t>
-            </a:r>
-            <a:br>
-              <a:rPr lang="ko-KR" altLang="en-US" dirty="0"/>
-            </a:br>
-            <a:r>
-              <a:rPr lang="ko-KR" altLang="en-US" dirty="0"/>
-              <a:t>기본형 기준으로 약 </a:t>
-            </a:r>
-            <a:r>
-              <a:rPr lang="en-US" altLang="ko-KR" dirty="0"/>
-              <a:t>-20% </a:t>
-            </a:r>
-            <a:r>
-              <a:rPr lang="ko-KR" altLang="en-US" dirty="0"/>
-              <a:t>추가 손실이 났다</a:t>
-            </a:r>
-          </a:p>
-        </p:txBody>
-      </p:sp>
-      <p:sp>
-        <p:nvSpPr>
-          <p:cNvPr id="8" name="TextBox 7">
-            <a:extLst>
-              <a:ext uri="{FF2B5EF4-FFF2-40B4-BE49-F238E27FC236}">
-                <a16:creationId xmlns:a16="http://schemas.microsoft.com/office/drawing/2014/main" id="{E8F4BF64-2629-5A0B-8192-EEF334C7D473}"/>
-              </a:ext>
-            </a:extLst>
-          </p:cNvPr>
-          <p:cNvSpPr txBox="1"/>
-          <p:nvPr/>
-        </p:nvSpPr>
-        <p:spPr>
-          <a:xfrm>
-            <a:off x="5209735" y="5566647"/>
-            <a:ext cx="6021200" cy="646331"/>
-          </a:xfrm>
-          <a:prstGeom prst="rect">
-            <a:avLst/>
-          </a:prstGeom>
-          <a:noFill/>
-        </p:spPr>
-        <p:txBody>
-          <a:bodyPr wrap="none" rtlCol="0">
-            <a:spAutoFit/>
-          </a:bodyPr>
-          <a:lstStyle/>
-          <a:p>
-            <a:r>
-              <a:rPr lang="ko-KR" altLang="en-US" dirty="0"/>
-              <a:t>👉 </a:t>
-            </a:r>
-            <a:r>
-              <a:rPr lang="ko-KR" altLang="en-US" b="1" dirty="0"/>
-              <a:t>하락 구간에서 손실이 “비대칭적으로” 커짐</a:t>
-            </a:r>
-            <a:br>
-              <a:rPr lang="ko-KR" altLang="en-US" dirty="0"/>
-            </a:br>
-            <a:r>
-              <a:rPr lang="ko-KR" altLang="en-US" dirty="0"/>
-              <a:t>👉 이게 바로 </a:t>
-            </a:r>
-            <a:r>
-              <a:rPr lang="ko-KR" altLang="en-US" b="1" dirty="0"/>
-              <a:t>변동성 드래그 </a:t>
-            </a:r>
-            <a:r>
-              <a:rPr lang="en-US" altLang="ko-KR" b="1" dirty="0"/>
-              <a:t>+ </a:t>
-            </a:r>
-            <a:r>
-              <a:rPr lang="ko-KR" altLang="en-US" b="1" dirty="0"/>
-              <a:t>일일 레버리지 리셋 효과</a:t>
-            </a:r>
-            <a:endParaRPr lang="ko-KR" altLang="en-US" dirty="0"/>
-          </a:p>
-        </p:txBody>
-      </p:sp>
-    </p:spTree>
-    <p:extLst>
-      <p:ext uri="{BB962C8B-B14F-4D97-AF65-F5344CB8AC3E}">
-        <p14:creationId xmlns:p14="http://schemas.microsoft.com/office/powerpoint/2010/main" val="4142459265"/>
-      </p:ext>
-    </p:extLst>
-  </p:cSld>
-  <p:clrMapOvr>
-    <a:masterClrMapping/>
-  </p:clrMapOvr>
-</p:sld>
-</file>
-
-<file path=ppt/slides/slide21.xml><?xml version="1.0" encoding="utf-8"?>
-<p:sld xmlns:a="http://schemas.openxmlformats.org/drawingml/2006/main" xmlns:r="http://schemas.openxmlformats.org/officeDocument/2006/relationships" xmlns:p="http://schemas.openxmlformats.org/presentationml/2006/main">
-  <p:cSld>
-    <p:spTree>
-      <p:nvGrpSpPr>
-        <p:cNvPr id="1" name=""/>
-        <p:cNvGrpSpPr/>
-        <p:nvPr/>
-      </p:nvGrpSpPr>
-      <p:grpSpPr>
-        <a:xfrm>
-          <a:off x="0" y="0"/>
-          <a:ext cx="0" cy="0"/>
-          <a:chOff x="0" y="0"/>
-          <a:chExt cx="0" cy="0"/>
-        </a:xfrm>
-      </p:grpSpPr>
-      <p:sp>
-        <p:nvSpPr>
-          <p:cNvPr id="2" name="제목 1">
-            <a:extLst>
-              <a:ext uri="{FF2B5EF4-FFF2-40B4-BE49-F238E27FC236}">
-                <a16:creationId xmlns:a16="http://schemas.microsoft.com/office/drawing/2014/main" id="{BFD14F93-7E5C-2DF8-4E66-5B68D0DE402C}"/>
-              </a:ext>
-            </a:extLst>
-          </p:cNvPr>
-          <p:cNvSpPr>
-            <a:spLocks noGrp="1"/>
-          </p:cNvSpPr>
-          <p:nvPr>
-            <p:ph type="title"/>
-          </p:nvPr>
-        </p:nvSpPr>
-        <p:spPr/>
-        <p:txBody>
-          <a:bodyPr/>
-          <a:lstStyle/>
-          <a:p>
-            <a:endParaRPr lang="ko-KR" altLang="en-US"/>
-          </a:p>
-        </p:txBody>
-      </p:sp>
-      <p:sp>
-        <p:nvSpPr>
-          <p:cNvPr id="3" name="내용 개체 틀 2">
-            <a:extLst>
-              <a:ext uri="{FF2B5EF4-FFF2-40B4-BE49-F238E27FC236}">
-                <a16:creationId xmlns:a16="http://schemas.microsoft.com/office/drawing/2014/main" id="{7BB78230-8716-A5C5-2877-771FA2BA812D}"/>
-              </a:ext>
-            </a:extLst>
-          </p:cNvPr>
-          <p:cNvSpPr>
-            <a:spLocks noGrp="1"/>
-          </p:cNvSpPr>
-          <p:nvPr>
-            <p:ph idx="1"/>
-          </p:nvPr>
-        </p:nvSpPr>
-        <p:spPr/>
-        <p:txBody>
-          <a:bodyPr/>
-          <a:lstStyle/>
-          <a:p>
-            <a:r>
-              <a:rPr lang="en-US" altLang="ko-KR" dirty="0"/>
-              <a:t>Series</a:t>
-            </a:r>
-            <a:r>
-              <a:rPr lang="ko-KR" altLang="en-US" dirty="0"/>
-              <a:t> 객체는 </a:t>
-            </a:r>
-            <a:r>
-              <a:rPr lang="ko-KR" altLang="en-US" i="1" dirty="0"/>
-              <a:t>항상</a:t>
-            </a:r>
-            <a:br>
-              <a:rPr lang="ko-KR" altLang="en-US" dirty="0"/>
-            </a:br>
-            <a:r>
-              <a:rPr lang="en-US" altLang="ko-KR" dirty="0"/>
-              <a:t>index</a:t>
-            </a:r>
-            <a:r>
-              <a:rPr lang="ko-KR" altLang="en-US" dirty="0"/>
-              <a:t> </a:t>
-            </a:r>
-            <a:r>
-              <a:rPr lang="en-US" altLang="ko-KR" dirty="0"/>
-              <a:t>+ values</a:t>
-            </a:r>
-            <a:r>
-              <a:rPr lang="ko-KR" altLang="en-US" dirty="0"/>
-              <a:t> 쌍으로 구성된다</a:t>
-            </a:r>
-            <a:r>
-              <a:rPr lang="en-US" altLang="ko-KR" dirty="0"/>
-              <a:t>.</a:t>
-            </a:r>
-          </a:p>
-          <a:p>
-            <a:r>
-              <a:rPr lang="en-US" altLang="ko-KR" dirty="0" err="1"/>
-              <a:t>plt.plot</a:t>
-            </a:r>
-            <a:r>
-              <a:rPr lang="en-US" altLang="ko-KR" dirty="0"/>
-              <a:t>(cum_1x.index, cum_1x, label="AMD 1x")</a:t>
-            </a:r>
-            <a:r>
-              <a:rPr lang="en-US" altLang="ko-KR" dirty="0" err="1"/>
-              <a:t>plt.plot</a:t>
-            </a:r>
-            <a:r>
-              <a:rPr lang="en-US" altLang="ko-KR" dirty="0"/>
-              <a:t>(cum_2x.index, cum_2x, label="AMD 2x (daily)")</a:t>
-            </a:r>
-          </a:p>
-          <a:p>
-            <a:r>
-              <a:rPr lang="en-US" altLang="ko-KR" dirty="0"/>
-              <a:t>Index</a:t>
-            </a:r>
-            <a:r>
-              <a:rPr lang="ko-KR" altLang="en-US" dirty="0"/>
-              <a:t>를 </a:t>
-            </a:r>
-            <a:r>
-              <a:rPr lang="en-US" altLang="ko-KR" dirty="0"/>
-              <a:t>x</a:t>
-            </a:r>
-            <a:r>
-              <a:rPr lang="ko-KR" altLang="en-US" dirty="0"/>
-              <a:t>축</a:t>
-            </a:r>
-            <a:r>
-              <a:rPr lang="en-US" altLang="ko-KR" dirty="0"/>
-              <a:t>, value</a:t>
-            </a:r>
-            <a:r>
-              <a:rPr lang="ko-KR" altLang="en-US" dirty="0"/>
-              <a:t>를 </a:t>
-            </a:r>
-            <a:r>
-              <a:rPr lang="en-US" altLang="ko-KR" dirty="0"/>
-              <a:t>y</a:t>
-            </a:r>
-            <a:r>
-              <a:rPr lang="ko-KR" altLang="en-US" dirty="0"/>
-              <a:t>축으로 해서 그림 그리기</a:t>
-            </a:r>
-          </a:p>
-        </p:txBody>
-      </p:sp>
-      <p:pic>
-        <p:nvPicPr>
-          <p:cNvPr id="5" name="그림 4" descr="텍스트, 도표, 그래프, 라인이(가) 표시된 사진&#10;&#10;AI 생성 콘텐츠는 정확하지 않을 수 있습니다.">
-            <a:extLst>
-              <a:ext uri="{FF2B5EF4-FFF2-40B4-BE49-F238E27FC236}">
-                <a16:creationId xmlns:a16="http://schemas.microsoft.com/office/drawing/2014/main" id="{E7A65FBC-AD71-4745-356F-3AB432D66100}"/>
-              </a:ext>
-            </a:extLst>
-          </p:cNvPr>
-          <p:cNvPicPr>
-            <a:picLocks noChangeAspect="1"/>
-          </p:cNvPicPr>
-          <p:nvPr/>
-        </p:nvPicPr>
-        <p:blipFill>
-          <a:blip r:embed="rId2"/>
-          <a:stretch>
-            <a:fillRect/>
-          </a:stretch>
-        </p:blipFill>
-        <p:spPr>
-          <a:xfrm>
-            <a:off x="936674" y="4178002"/>
-            <a:ext cx="8364117" cy="4267796"/>
-          </a:xfrm>
-          <a:prstGeom prst="rect">
-            <a:avLst/>
-          </a:prstGeom>
-        </p:spPr>
-      </p:pic>
-    </p:spTree>
-    <p:extLst>
-      <p:ext uri="{BB962C8B-B14F-4D97-AF65-F5344CB8AC3E}">
-        <p14:creationId xmlns:p14="http://schemas.microsoft.com/office/powerpoint/2010/main" val="3673200067"/>
-      </p:ext>
-    </p:extLst>
-  </p:cSld>
-  <p:clrMapOvr>
-    <a:masterClrMapping/>
-  </p:clrMapOvr>
-</p:sld>
-</file>
-
-<file path=ppt/slides/slide22.xml><?xml version="1.0" encoding="utf-8"?>
-<p:sld xmlns:a="http://schemas.openxmlformats.org/drawingml/2006/main" xmlns:r="http://schemas.openxmlformats.org/officeDocument/2006/relationships" xmlns:p="http://schemas.openxmlformats.org/presentationml/2006/main">
-  <p:cSld>
-    <p:spTree>
-      <p:nvGrpSpPr>
-        <p:cNvPr id="1" name=""/>
-        <p:cNvGrpSpPr/>
-        <p:nvPr/>
-      </p:nvGrpSpPr>
-      <p:grpSpPr>
-        <a:xfrm>
-          <a:off x="0" y="0"/>
-          <a:ext cx="0" cy="0"/>
-          <a:chOff x="0" y="0"/>
-          <a:chExt cx="0" cy="0"/>
-        </a:xfrm>
-      </p:grpSpPr>
-      <p:sp>
-        <p:nvSpPr>
-          <p:cNvPr id="2" name="제목 1">
-            <a:extLst>
-              <a:ext uri="{FF2B5EF4-FFF2-40B4-BE49-F238E27FC236}">
-                <a16:creationId xmlns:a16="http://schemas.microsoft.com/office/drawing/2014/main" id="{91CA5165-BC5E-C35D-F731-DC1FD7CDC5BF}"/>
-              </a:ext>
-            </a:extLst>
-          </p:cNvPr>
-          <p:cNvSpPr>
-            <a:spLocks noGrp="1"/>
-          </p:cNvSpPr>
-          <p:nvPr>
-            <p:ph type="title"/>
-          </p:nvPr>
-        </p:nvSpPr>
-        <p:spPr/>
-        <p:txBody>
-          <a:bodyPr/>
-          <a:lstStyle/>
-          <a:p>
-            <a:endParaRPr lang="ko-KR" altLang="en-US"/>
-          </a:p>
-        </p:txBody>
-      </p:sp>
-      <p:sp>
-        <p:nvSpPr>
-          <p:cNvPr id="3" name="내용 개체 틀 2">
-            <a:extLst>
-              <a:ext uri="{FF2B5EF4-FFF2-40B4-BE49-F238E27FC236}">
-                <a16:creationId xmlns:a16="http://schemas.microsoft.com/office/drawing/2014/main" id="{2040F135-7278-5ECE-497E-97ED0A8A0876}"/>
-              </a:ext>
-            </a:extLst>
-          </p:cNvPr>
-          <p:cNvSpPr>
-            <a:spLocks noGrp="1"/>
-          </p:cNvSpPr>
-          <p:nvPr>
-            <p:ph idx="1"/>
-          </p:nvPr>
-        </p:nvSpPr>
-        <p:spPr/>
-        <p:txBody>
-          <a:bodyPr>
-            <a:normAutofit lnSpcReduction="10000"/>
-          </a:bodyPr>
-          <a:lstStyle/>
-          <a:p>
-            <a:r>
-              <a:rPr lang="en-US" altLang="ko-KR" dirty="0"/>
-              <a:t>returns = [0.10, -0.05, 0.02]</a:t>
-            </a:r>
-          </a:p>
-          <a:p>
-            <a:r>
-              <a:rPr lang="en-US" altLang="ko-KR" dirty="0"/>
-              <a:t>Day 1: +10%</a:t>
-            </a:r>
-          </a:p>
-          <a:p>
-            <a:r>
-              <a:rPr lang="en-US" altLang="ko-KR" dirty="0"/>
-              <a:t>Day 2: -5%</a:t>
-            </a:r>
-          </a:p>
-          <a:p>
-            <a:r>
-              <a:rPr lang="en-US" altLang="ko-KR" dirty="0"/>
-              <a:t>Day 3: +2%</a:t>
-            </a:r>
-          </a:p>
-          <a:p>
-            <a:endParaRPr lang="en-US" altLang="ko-KR" dirty="0"/>
-          </a:p>
-          <a:p>
-            <a:r>
-              <a:rPr lang="en-US" altLang="ko-KR" dirty="0"/>
-              <a:t>(1 + returns).</a:t>
-            </a:r>
-            <a:r>
-              <a:rPr lang="en-US" altLang="ko-KR" dirty="0" err="1"/>
-              <a:t>cumprod</a:t>
-            </a:r>
-            <a:r>
-              <a:rPr lang="en-US" altLang="ko-KR" dirty="0"/>
-              <a:t>()</a:t>
-            </a:r>
-          </a:p>
-          <a:p>
-            <a:r>
-              <a:rPr lang="en-US" altLang="ko-KR" dirty="0"/>
-              <a:t>Day 1: 1.10</a:t>
-            </a:r>
-          </a:p>
-          <a:p>
-            <a:r>
-              <a:rPr lang="en-US" altLang="ko-KR" dirty="0"/>
-              <a:t>Day 2: 1.10 × 0.95 = 1.045</a:t>
-            </a:r>
-          </a:p>
-          <a:p>
-            <a:r>
-              <a:rPr lang="en-US" altLang="ko-KR" dirty="0"/>
-              <a:t>Day 3: 1.045 × 1.02 ≈ 1.066</a:t>
-            </a:r>
-          </a:p>
-        </p:txBody>
-      </p:sp>
-    </p:spTree>
-    <p:extLst>
-      <p:ext uri="{BB962C8B-B14F-4D97-AF65-F5344CB8AC3E}">
-        <p14:creationId xmlns:p14="http://schemas.microsoft.com/office/powerpoint/2010/main" val="3700395950"/>
-      </p:ext>
-    </p:extLst>
-  </p:cSld>
-  <p:clrMapOvr>
-    <a:masterClrMapping/>
-  </p:clrMapOvr>
-</p:sld>
-</file>
-
-<file path=ppt/slides/slide23.xml><?xml version="1.0" encoding="utf-8"?>
-<p:sld xmlns:a="http://schemas.openxmlformats.org/drawingml/2006/main" xmlns:r="http://schemas.openxmlformats.org/officeDocument/2006/relationships" xmlns:p="http://schemas.openxmlformats.org/presentationml/2006/main">
-  <p:cSld>
-    <p:spTree>
-      <p:nvGrpSpPr>
-        <p:cNvPr id="1" name=""/>
-        <p:cNvGrpSpPr/>
-        <p:nvPr/>
-      </p:nvGrpSpPr>
-      <p:grpSpPr>
-        <a:xfrm>
-          <a:off x="0" y="0"/>
-          <a:ext cx="0" cy="0"/>
-          <a:chOff x="0" y="0"/>
-          <a:chExt cx="0" cy="0"/>
-        </a:xfrm>
-      </p:grpSpPr>
-      <p:sp>
-        <p:nvSpPr>
-          <p:cNvPr id="2" name="제목 1">
-            <a:extLst>
-              <a:ext uri="{FF2B5EF4-FFF2-40B4-BE49-F238E27FC236}">
-                <a16:creationId xmlns:a16="http://schemas.microsoft.com/office/drawing/2014/main" id="{DB622689-210F-0ED0-C4EE-76CCED21D167}"/>
-              </a:ext>
-            </a:extLst>
-          </p:cNvPr>
-          <p:cNvSpPr>
-            <a:spLocks noGrp="1"/>
-          </p:cNvSpPr>
-          <p:nvPr>
-            <p:ph type="title"/>
-          </p:nvPr>
-        </p:nvSpPr>
-        <p:spPr/>
-        <p:txBody>
-          <a:bodyPr/>
-          <a:lstStyle/>
-          <a:p>
-            <a:endParaRPr lang="ko-KR" altLang="en-US"/>
-          </a:p>
-        </p:txBody>
-      </p:sp>
-      <p:sp>
-        <p:nvSpPr>
-          <p:cNvPr id="3" name="내용 개체 틀 2">
-            <a:extLst>
-              <a:ext uri="{FF2B5EF4-FFF2-40B4-BE49-F238E27FC236}">
-                <a16:creationId xmlns:a16="http://schemas.microsoft.com/office/drawing/2014/main" id="{ACD6722E-B2A8-53A1-EDAE-4CD2E1490DB6}"/>
-              </a:ext>
-            </a:extLst>
-          </p:cNvPr>
-          <p:cNvSpPr>
-            <a:spLocks noGrp="1"/>
-          </p:cNvSpPr>
-          <p:nvPr>
-            <p:ph idx="1"/>
-          </p:nvPr>
-        </p:nvSpPr>
-        <p:spPr>
-          <a:xfrm>
-            <a:off x="838200" y="1825625"/>
-            <a:ext cx="4577862" cy="4351338"/>
-          </a:xfrm>
-        </p:spPr>
-        <p:txBody>
-          <a:bodyPr>
-            <a:normAutofit lnSpcReduction="10000"/>
-          </a:bodyPr>
-          <a:lstStyle/>
-          <a:p>
-            <a:r>
-              <a:rPr lang="ko-KR" altLang="en-US" b="1" dirty="0"/>
-              <a:t>예시</a:t>
-            </a:r>
-            <a:r>
-              <a:rPr lang="en-US" altLang="ko-KR" b="1" dirty="0"/>
-              <a:t>: </a:t>
-            </a:r>
-            <a:r>
-              <a:rPr lang="ko-KR" altLang="en-US" b="1" dirty="0"/>
-              <a:t>하루 급락 이후</a:t>
-            </a:r>
-          </a:p>
-          <a:p>
-            <a:r>
-              <a:rPr lang="en-US" altLang="ko-KR" b="1" dirty="0"/>
-              <a:t>1x</a:t>
-            </a:r>
-          </a:p>
-          <a:p>
-            <a:r>
-              <a:rPr lang="ko-KR" altLang="en-US" dirty="0"/>
-              <a:t>시작 </a:t>
-            </a:r>
-            <a:r>
-              <a:rPr lang="en-US" altLang="ko-KR" dirty="0"/>
-              <a:t>1.00</a:t>
-            </a:r>
-          </a:p>
-          <a:p>
-            <a:r>
-              <a:rPr lang="en-US" altLang="ko-KR" dirty="0"/>
-              <a:t>-18% → 0.82</a:t>
-            </a:r>
-          </a:p>
-          <a:p>
-            <a:r>
-              <a:rPr lang="en-US" altLang="ko-KR" b="1" dirty="0"/>
-              <a:t>2x</a:t>
-            </a:r>
-          </a:p>
-          <a:p>
-            <a:r>
-              <a:rPr lang="ko-KR" altLang="en-US" dirty="0"/>
-              <a:t>시작 </a:t>
-            </a:r>
-            <a:r>
-              <a:rPr lang="en-US" altLang="ko-KR" dirty="0"/>
-              <a:t>1.00</a:t>
-            </a:r>
-          </a:p>
-          <a:p>
-            <a:r>
-              <a:rPr lang="en-US" altLang="ko-KR" dirty="0"/>
-              <a:t>-36% → 0.64</a:t>
-            </a:r>
-          </a:p>
-          <a:p>
-            <a:r>
-              <a:rPr lang="ko-KR" altLang="en-US" dirty="0"/>
-              <a:t>여기까지는</a:t>
-            </a:r>
-            <a:r>
-              <a:rPr lang="en-US" altLang="ko-KR" dirty="0"/>
-              <a:t>:</a:t>
-            </a:r>
-          </a:p>
-          <a:p>
-            <a:r>
-              <a:rPr lang="en-US" altLang="ko-KR" dirty="0"/>
-              <a:t>“</a:t>
-            </a:r>
-            <a:r>
-              <a:rPr lang="ko-KR" altLang="en-US" dirty="0"/>
-              <a:t>응</a:t>
-            </a:r>
-            <a:r>
-              <a:rPr lang="en-US" altLang="ko-KR" dirty="0"/>
-              <a:t>, </a:t>
-            </a:r>
-            <a:r>
-              <a:rPr lang="ko-KR" altLang="en-US" dirty="0"/>
-              <a:t>딱 </a:t>
-            </a:r>
-            <a:r>
-              <a:rPr lang="en-US" altLang="ko-KR" dirty="0"/>
-              <a:t>2</a:t>
-            </a:r>
-            <a:r>
-              <a:rPr lang="ko-KR" altLang="en-US" dirty="0"/>
-              <a:t>배네” 맞아</a:t>
-            </a:r>
-          </a:p>
-          <a:p>
-            <a:endParaRPr lang="ko-KR" altLang="en-US" dirty="0"/>
-          </a:p>
-        </p:txBody>
-      </p:sp>
-      <p:sp>
-        <p:nvSpPr>
-          <p:cNvPr id="6" name="내용 개체 틀 2">
-            <a:extLst>
-              <a:ext uri="{FF2B5EF4-FFF2-40B4-BE49-F238E27FC236}">
-                <a16:creationId xmlns:a16="http://schemas.microsoft.com/office/drawing/2014/main" id="{F579B488-4D69-D543-7F9F-745E66C37048}"/>
-              </a:ext>
-            </a:extLst>
-          </p:cNvPr>
-          <p:cNvSpPr txBox="1">
-            <a:spLocks/>
-          </p:cNvSpPr>
-          <p:nvPr/>
-        </p:nvSpPr>
-        <p:spPr>
-          <a:xfrm>
-            <a:off x="6096000" y="1825625"/>
-            <a:ext cx="4577862" cy="4351338"/>
-          </a:xfrm>
-          <a:prstGeom prst="rect">
-            <a:avLst/>
-          </a:prstGeom>
-        </p:spPr>
-        <p:txBody>
-          <a:bodyPr vert="horz" lIns="91440" tIns="45720" rIns="91440" bIns="45720" rtlCol="0">
-            <a:normAutofit lnSpcReduction="10000"/>
-          </a:bodyPr>
-          <a:lstStyle>
-            <a:lvl1pPr marL="228600" indent="-228600" algn="l" defTabSz="914400" rtl="0" eaLnBrk="1" latinLnBrk="1" hangingPunct="1">
-              <a:lnSpc>
-                <a:spcPct val="90000"/>
-              </a:lnSpc>
-              <a:spcBef>
-                <a:spcPts val="1000"/>
-              </a:spcBef>
-              <a:buFont typeface="Arial" panose="020B0604020202020204" pitchFamily="34" charset="0"/>
-              <a:buChar char="•"/>
-              <a:defRPr sz="2800" kern="1200">
-                <a:solidFill>
-                  <a:schemeClr val="tx1"/>
-                </a:solidFill>
-                <a:latin typeface="+mn-lt"/>
-                <a:ea typeface="+mn-ea"/>
-                <a:cs typeface="+mn-cs"/>
-              </a:defRPr>
-            </a:lvl1pPr>
-            <a:lvl2pPr marL="685800" indent="-228600" algn="l" defTabSz="914400" rtl="0" eaLnBrk="1" latinLnBrk="1" hangingPunct="1">
-              <a:lnSpc>
-                <a:spcPct val="90000"/>
-              </a:lnSpc>
-              <a:spcBef>
-                <a:spcPts val="500"/>
-              </a:spcBef>
-              <a:buFont typeface="Arial" panose="020B0604020202020204" pitchFamily="34" charset="0"/>
-              <a:buChar char="•"/>
-              <a:defRPr sz="2400" kern="1200">
-                <a:solidFill>
-                  <a:schemeClr val="tx1"/>
-                </a:solidFill>
-                <a:latin typeface="+mn-lt"/>
-                <a:ea typeface="+mn-ea"/>
-                <a:cs typeface="+mn-cs"/>
-              </a:defRPr>
-            </a:lvl2pPr>
-            <a:lvl3pPr marL="1143000" indent="-228600" algn="l" defTabSz="914400" rtl="0" eaLnBrk="1" latinLnBrk="1" hangingPunct="1">
-              <a:lnSpc>
-                <a:spcPct val="90000"/>
-              </a:lnSpc>
-              <a:spcBef>
-                <a:spcPts val="500"/>
-              </a:spcBef>
-              <a:buFont typeface="Arial" panose="020B0604020202020204" pitchFamily="34" charset="0"/>
-              <a:buChar char="•"/>
-              <a:defRPr sz="2000" kern="1200">
-                <a:solidFill>
-                  <a:schemeClr val="tx1"/>
-                </a:solidFill>
-                <a:latin typeface="+mn-lt"/>
-                <a:ea typeface="+mn-ea"/>
-                <a:cs typeface="+mn-cs"/>
-              </a:defRPr>
-            </a:lvl3pPr>
-            <a:lvl4pPr marL="1600200" indent="-228600" algn="l" defTabSz="914400" rtl="0" eaLnBrk="1" latinLnBrk="1" hangingPunct="1">
-              <a:lnSpc>
-                <a:spcPct val="90000"/>
-              </a:lnSpc>
-              <a:spcBef>
-                <a:spcPts val="500"/>
-              </a:spcBef>
-              <a:buFont typeface="Arial" panose="020B0604020202020204" pitchFamily="34" charset="0"/>
-              <a:buChar char="•"/>
-              <a:defRPr sz="1800" kern="1200">
-                <a:solidFill>
-                  <a:schemeClr val="tx1"/>
-                </a:solidFill>
-                <a:latin typeface="+mn-lt"/>
-                <a:ea typeface="+mn-ea"/>
-                <a:cs typeface="+mn-cs"/>
-              </a:defRPr>
-            </a:lvl4pPr>
-            <a:lvl5pPr marL="2057400" indent="-228600" algn="l" defTabSz="914400" rtl="0" eaLnBrk="1" latinLnBrk="1" hangingPunct="1">
-              <a:lnSpc>
-                <a:spcPct val="90000"/>
-              </a:lnSpc>
-              <a:spcBef>
-                <a:spcPts val="500"/>
-              </a:spcBef>
-              <a:buFont typeface="Arial" panose="020B0604020202020204" pitchFamily="34" charset="0"/>
-              <a:buChar char="•"/>
-              <a:defRPr sz="1800" kern="1200">
-                <a:solidFill>
-                  <a:schemeClr val="tx1"/>
-                </a:solidFill>
-                <a:latin typeface="+mn-lt"/>
-                <a:ea typeface="+mn-ea"/>
-                <a:cs typeface="+mn-cs"/>
-              </a:defRPr>
-            </a:lvl5pPr>
-            <a:lvl6pPr marL="2514600" indent="-228600" algn="l" defTabSz="914400" rtl="0" eaLnBrk="1" latinLnBrk="1" hangingPunct="1">
-              <a:lnSpc>
-                <a:spcPct val="90000"/>
-              </a:lnSpc>
-              <a:spcBef>
-                <a:spcPts val="500"/>
-              </a:spcBef>
-              <a:buFont typeface="Arial" panose="020B0604020202020204" pitchFamily="34" charset="0"/>
-              <a:buChar char="•"/>
-              <a:defRPr sz="1800" kern="1200">
-                <a:solidFill>
-                  <a:schemeClr val="tx1"/>
-                </a:solidFill>
-                <a:latin typeface="+mn-lt"/>
-                <a:ea typeface="+mn-ea"/>
-                <a:cs typeface="+mn-cs"/>
-              </a:defRPr>
-            </a:lvl6pPr>
-            <a:lvl7pPr marL="2971800" indent="-228600" algn="l" defTabSz="914400" rtl="0" eaLnBrk="1" latinLnBrk="1" hangingPunct="1">
-              <a:lnSpc>
-                <a:spcPct val="90000"/>
-              </a:lnSpc>
-              <a:spcBef>
-                <a:spcPts val="500"/>
-              </a:spcBef>
-              <a:buFont typeface="Arial" panose="020B0604020202020204" pitchFamily="34" charset="0"/>
-              <a:buChar char="•"/>
-              <a:defRPr sz="1800" kern="1200">
-                <a:solidFill>
-                  <a:schemeClr val="tx1"/>
-                </a:solidFill>
-                <a:latin typeface="+mn-lt"/>
-                <a:ea typeface="+mn-ea"/>
-                <a:cs typeface="+mn-cs"/>
-              </a:defRPr>
-            </a:lvl7pPr>
-            <a:lvl8pPr marL="3429000" indent="-228600" algn="l" defTabSz="914400" rtl="0" eaLnBrk="1" latinLnBrk="1" hangingPunct="1">
-              <a:lnSpc>
-                <a:spcPct val="90000"/>
-              </a:lnSpc>
-              <a:spcBef>
-                <a:spcPts val="500"/>
-              </a:spcBef>
-              <a:buFont typeface="Arial" panose="020B0604020202020204" pitchFamily="34" charset="0"/>
-              <a:buChar char="•"/>
-              <a:defRPr sz="1800" kern="1200">
-                <a:solidFill>
-                  <a:schemeClr val="tx1"/>
-                </a:solidFill>
-                <a:latin typeface="+mn-lt"/>
-                <a:ea typeface="+mn-ea"/>
-                <a:cs typeface="+mn-cs"/>
-              </a:defRPr>
-            </a:lvl8pPr>
-            <a:lvl9pPr marL="3886200" indent="-228600" algn="l" defTabSz="914400" rtl="0" eaLnBrk="1" latinLnBrk="1" hangingPunct="1">
-              <a:lnSpc>
-                <a:spcPct val="90000"/>
-              </a:lnSpc>
-              <a:spcBef>
-                <a:spcPts val="500"/>
-              </a:spcBef>
-              <a:buFont typeface="Arial" panose="020B0604020202020204" pitchFamily="34" charset="0"/>
-              <a:buChar char="•"/>
-              <a:defRPr sz="1800" kern="1200">
-                <a:solidFill>
-                  <a:schemeClr val="tx1"/>
-                </a:solidFill>
-                <a:latin typeface="+mn-lt"/>
-                <a:ea typeface="+mn-ea"/>
-                <a:cs typeface="+mn-cs"/>
-              </a:defRPr>
-            </a:lvl9pPr>
-          </a:lstStyle>
-          <a:p>
-            <a:r>
-              <a:rPr lang="ko-KR" altLang="en-US" b="1" dirty="0"/>
-              <a:t>그런데 다음 날 </a:t>
-            </a:r>
-            <a:r>
-              <a:rPr lang="en-US" altLang="ko-KR" b="1" dirty="0"/>
-              <a:t>+10% </a:t>
-            </a:r>
-            <a:r>
-              <a:rPr lang="ko-KR" altLang="en-US" b="1" dirty="0"/>
-              <a:t>반등이 오면</a:t>
-            </a:r>
-            <a:r>
-              <a:rPr lang="en-US" altLang="ko-KR" b="1" dirty="0"/>
-              <a:t>?</a:t>
-            </a:r>
-          </a:p>
-          <a:p>
-            <a:r>
-              <a:rPr lang="en-US" altLang="ko-KR" b="1" dirty="0"/>
-              <a:t>1x</a:t>
-            </a:r>
-          </a:p>
-          <a:p>
-            <a:r>
-              <a:rPr lang="en-US" altLang="ko-KR" dirty="0"/>
-              <a:t>0.82 × 1.10 = 0.902</a:t>
-            </a:r>
-          </a:p>
-          <a:p>
-            <a:r>
-              <a:rPr lang="en-US" altLang="ko-KR" b="1" dirty="0"/>
-              <a:t>2x (</a:t>
-            </a:r>
-            <a:r>
-              <a:rPr lang="ko-KR" altLang="en-US" b="1" dirty="0"/>
-              <a:t>일일 </a:t>
-            </a:r>
-            <a:r>
-              <a:rPr lang="en-US" altLang="ko-KR" b="1" dirty="0"/>
-              <a:t>2</a:t>
-            </a:r>
-            <a:r>
-              <a:rPr lang="ko-KR" altLang="en-US" b="1" dirty="0"/>
-              <a:t>배 → </a:t>
-            </a:r>
-            <a:r>
-              <a:rPr lang="en-US" altLang="ko-KR" b="1" dirty="0"/>
-              <a:t>+20%)</a:t>
-            </a:r>
-          </a:p>
-          <a:p>
-            <a:r>
-              <a:rPr lang="en-US" altLang="ko-KR" dirty="0"/>
-              <a:t>0.64 × 1.20 = 0.768</a:t>
-            </a:r>
-          </a:p>
-          <a:p>
-            <a:r>
-              <a:rPr lang="ko-KR" altLang="en-US" dirty="0"/>
-              <a:t>👉 결과</a:t>
-            </a:r>
-            <a:r>
-              <a:rPr lang="en-US" altLang="ko-KR" dirty="0"/>
-              <a:t>:</a:t>
-            </a:r>
-          </a:p>
-          <a:p>
-            <a:r>
-              <a:rPr lang="en-US" altLang="ko-KR" dirty="0"/>
-              <a:t>1x</a:t>
-            </a:r>
-            <a:r>
-              <a:rPr lang="ko-KR" altLang="en-US" dirty="0"/>
-              <a:t>는 </a:t>
-            </a:r>
-            <a:r>
-              <a:rPr lang="en-US" altLang="ko-KR" b="1" dirty="0"/>
-              <a:t>0.90</a:t>
-            </a:r>
-            <a:r>
-              <a:rPr lang="ko-KR" altLang="en-US" b="1" dirty="0"/>
-              <a:t>까지 회복</a:t>
-            </a:r>
-            <a:endParaRPr lang="ko-KR" altLang="en-US" dirty="0"/>
-          </a:p>
-          <a:p>
-            <a:r>
-              <a:rPr lang="en-US" altLang="ko-KR" dirty="0"/>
-              <a:t>2x</a:t>
-            </a:r>
-            <a:r>
-              <a:rPr lang="ko-KR" altLang="en-US" dirty="0"/>
-              <a:t>는 </a:t>
-            </a:r>
-            <a:r>
-              <a:rPr lang="en-US" altLang="ko-KR" b="1" dirty="0"/>
-              <a:t>0.77</a:t>
-            </a:r>
-            <a:r>
-              <a:rPr lang="ko-KR" altLang="en-US" b="1" dirty="0"/>
-              <a:t>에 그침</a:t>
-            </a:r>
-            <a:endParaRPr lang="ko-KR" altLang="en-US" dirty="0"/>
-          </a:p>
-        </p:txBody>
-      </p:sp>
-      <p:sp>
-        <p:nvSpPr>
-          <p:cNvPr id="8" name="Rectangle 2">
-            <a:extLst>
-              <a:ext uri="{FF2B5EF4-FFF2-40B4-BE49-F238E27FC236}">
-                <a16:creationId xmlns:a16="http://schemas.microsoft.com/office/drawing/2014/main" id="{BBAC0B6B-53BB-0ADF-4794-33E9AC8E0109}"/>
-              </a:ext>
-            </a:extLst>
-          </p:cNvPr>
-          <p:cNvSpPr>
-            <a:spLocks noChangeArrowheads="1"/>
-          </p:cNvSpPr>
-          <p:nvPr/>
-        </p:nvSpPr>
-        <p:spPr bwMode="auto">
-          <a:xfrm>
-            <a:off x="6231988" y="6513341"/>
-            <a:ext cx="12192000" cy="0"/>
-          </a:xfrm>
-          <a:prstGeom prst="rect">
-            <a:avLst/>
-          </a:prstGeom>
-          <a:noFill/>
-          <a:ln>
-            <a:noFill/>
-          </a:ln>
-          <a:effectLst/>
-          <a:extLst>
-            <a:ext uri="{909E8E84-426E-40DD-AFC4-6F175D3DCCD1}">
-              <a14:hiddenFill xmlns:a14="http://schemas.microsoft.com/office/drawing/2010/main">
-                <a:solidFill>
-                  <a:schemeClr val="accent1"/>
-                </a:solidFill>
-              </a14:hiddenFill>
-            </a:ext>
-            <a:ext uri="{91240B29-F687-4F45-9708-019B960494DF}">
-              <a14:hiddenLine xmlns:a14="http://schemas.microsoft.com/office/drawing/2010/main" w="9525">
-                <a:solidFill>
-                  <a:schemeClr val="tx1"/>
-                </a:solidFill>
-                <a:miter lim="800000"/>
-                <a:headEnd/>
-                <a:tailEnd/>
-              </a14:hiddenLine>
-            </a:ext>
-            <a:ext uri="{AF507438-7753-43E0-B8FC-AC1667EBCBE1}">
-              <a14:hiddenEffects xmlns:a14="http://schemas.microsoft.com/office/drawing/2010/main">
-                <a:effectLst>
-                  <a:outerShdw dist="35921" dir="2700000" algn="ctr" rotWithShape="0">
-                    <a:schemeClr val="bg2"/>
-                  </a:outerShdw>
-                </a:effectLst>
-              </a14:hiddenEffects>
-            </a:ext>
-          </a:extLst>
-        </p:spPr>
-        <p:txBody>
-          <a:bodyPr vert="horz" wrap="none" lIns="91440" tIns="45720" rIns="91440" bIns="45720" numCol="1" anchor="ctr" anchorCtr="0" compatLnSpc="1">
-            <a:prstTxWarp prst="textNoShape">
-              <a:avLst/>
-            </a:prstTxWarp>
-            <a:spAutoFit/>
-          </a:bodyPr>
-          <a:lstStyle/>
-          <a:p>
-            <a:pPr marL="0" marR="0" lvl="0" indent="0" algn="l" defTabSz="914400" rtl="0" eaLnBrk="0" fontAlgn="base" latinLnBrk="0" hangingPunct="0">
-              <a:lnSpc>
-                <a:spcPct val="100000"/>
-              </a:lnSpc>
-              <a:spcBef>
-                <a:spcPct val="0"/>
-              </a:spcBef>
-              <a:spcAft>
-                <a:spcPct val="0"/>
-              </a:spcAft>
-              <a:buClrTx/>
-              <a:buSzTx/>
-              <a:buFontTx/>
-              <a:buChar char="•"/>
-              <a:tabLst/>
-            </a:pPr>
-            <a:r>
-              <a:rPr kumimoji="0" lang="ko-KR" altLang="ko-KR" sz="1800" b="0" i="0" u="none" strike="noStrike" cap="none" normalizeH="0" baseline="0" dirty="0">
-                <a:ln>
-                  <a:noFill/>
-                </a:ln>
-                <a:solidFill>
-                  <a:schemeClr val="tx1"/>
-                </a:solidFill>
-                <a:effectLst/>
-                <a:latin typeface="Arial" panose="020B0604020202020204" pitchFamily="34" charset="0"/>
-              </a:rPr>
-              <a:t>✔ “일일 수익률 기준으로는 맞다”</a:t>
-            </a:r>
-          </a:p>
-          <a:p>
-            <a:pPr marL="0" marR="0" lvl="0" indent="0" algn="l" defTabSz="914400" rtl="0" eaLnBrk="0" fontAlgn="base" latinLnBrk="0" hangingPunct="0">
-              <a:lnSpc>
-                <a:spcPct val="100000"/>
-              </a:lnSpc>
-              <a:spcBef>
-                <a:spcPct val="0"/>
-              </a:spcBef>
-              <a:spcAft>
-                <a:spcPct val="0"/>
-              </a:spcAft>
-              <a:buClrTx/>
-              <a:buSzTx/>
-              <a:buFontTx/>
-              <a:buChar char="•"/>
-              <a:tabLst/>
-            </a:pPr>
-            <a:r>
-              <a:rPr kumimoji="0" lang="ko-KR" altLang="ko-KR" sz="1800" b="0" i="0" u="none" strike="noStrike" cap="none" normalizeH="0" baseline="0" dirty="0">
-                <a:ln>
-                  <a:noFill/>
-                </a:ln>
-                <a:solidFill>
-                  <a:schemeClr val="tx1"/>
-                </a:solidFill>
-                <a:effectLst/>
-                <a:latin typeface="Arial" panose="020B0604020202020204" pitchFamily="34" charset="0"/>
-              </a:rPr>
-              <a:t>✔ “누적 수익률 기준으로는 틀리다”</a:t>
-            </a:r>
-          </a:p>
-          <a:p>
-            <a:pPr marL="0" marR="0" lvl="0" indent="0" algn="l" defTabSz="914400" rtl="0" eaLnBrk="0" fontAlgn="base" latinLnBrk="0" hangingPunct="0">
-              <a:lnSpc>
-                <a:spcPct val="100000"/>
-              </a:lnSpc>
-              <a:spcBef>
-                <a:spcPct val="0"/>
-              </a:spcBef>
-              <a:spcAft>
-                <a:spcPct val="0"/>
-              </a:spcAft>
-              <a:buClrTx/>
-              <a:buSzTx/>
-              <a:buFontTx/>
-              <a:buChar char="•"/>
-              <a:tabLst/>
-            </a:pPr>
-            <a:r>
-              <a:rPr kumimoji="0" lang="ko-KR" altLang="ko-KR" sz="1800" b="0" i="0" u="none" strike="noStrike" cap="none" normalizeH="0" baseline="0" dirty="0">
-                <a:ln>
-                  <a:noFill/>
-                </a:ln>
-                <a:solidFill>
-                  <a:schemeClr val="tx1"/>
-                </a:solidFill>
-                <a:effectLst/>
-                <a:latin typeface="Arial" panose="020B0604020202020204" pitchFamily="34" charset="0"/>
-              </a:rPr>
-              <a:t>✔ 왜 그래프 두 개를 같이 봐야 하는지</a:t>
-            </a:r>
-          </a:p>
-        </p:txBody>
-      </p:sp>
-    </p:spTree>
-    <p:extLst>
-      <p:ext uri="{BB962C8B-B14F-4D97-AF65-F5344CB8AC3E}">
-        <p14:creationId xmlns:p14="http://schemas.microsoft.com/office/powerpoint/2010/main" val="272917281"/>
-      </p:ext>
-    </p:extLst>
-  </p:cSld>
-  <p:clrMapOvr>
-    <a:masterClrMapping/>
-  </p:clrMapOvr>
-</p:sld>
-</file>
-
-<file path=ppt/slides/slide24.xml><?xml version="1.0" encoding="utf-8"?>
-<p:sld xmlns:a="http://schemas.openxmlformats.org/drawingml/2006/main" xmlns:r="http://schemas.openxmlformats.org/officeDocument/2006/relationships" xmlns:p="http://schemas.openxmlformats.org/presentationml/2006/main">
-  <p:cSld>
-    <p:spTree>
-      <p:nvGrpSpPr>
-        <p:cNvPr id="1" name=""/>
-        <p:cNvGrpSpPr/>
-        <p:nvPr/>
-      </p:nvGrpSpPr>
-      <p:grpSpPr>
-        <a:xfrm>
-          <a:off x="0" y="0"/>
-          <a:ext cx="0" cy="0"/>
-          <a:chOff x="0" y="0"/>
-          <a:chExt cx="0" cy="0"/>
-        </a:xfrm>
-      </p:grpSpPr>
-      <p:sp>
-        <p:nvSpPr>
-          <p:cNvPr id="2" name="제목 1">
-            <a:extLst>
-              <a:ext uri="{FF2B5EF4-FFF2-40B4-BE49-F238E27FC236}">
-                <a16:creationId xmlns:a16="http://schemas.microsoft.com/office/drawing/2014/main" id="{CE48D19C-52FC-73EF-918A-2169ADC49EB7}"/>
-              </a:ext>
-            </a:extLst>
-          </p:cNvPr>
-          <p:cNvSpPr>
-            <a:spLocks noGrp="1"/>
-          </p:cNvSpPr>
-          <p:nvPr>
-            <p:ph type="title"/>
-          </p:nvPr>
-        </p:nvSpPr>
-        <p:spPr/>
-        <p:txBody>
-          <a:bodyPr/>
-          <a:lstStyle/>
-          <a:p>
-            <a:endParaRPr lang="ko-KR" altLang="en-US"/>
-          </a:p>
-        </p:txBody>
-      </p:sp>
-      <p:sp>
-        <p:nvSpPr>
-          <p:cNvPr id="3" name="내용 개체 틀 2">
-            <a:extLst>
-              <a:ext uri="{FF2B5EF4-FFF2-40B4-BE49-F238E27FC236}">
-                <a16:creationId xmlns:a16="http://schemas.microsoft.com/office/drawing/2014/main" id="{7205A427-E4EA-D6F3-AA94-0C15A651830F}"/>
-              </a:ext>
-            </a:extLst>
-          </p:cNvPr>
-          <p:cNvSpPr>
-            <a:spLocks noGrp="1"/>
-          </p:cNvSpPr>
-          <p:nvPr>
-            <p:ph idx="1"/>
-          </p:nvPr>
-        </p:nvSpPr>
-        <p:spPr/>
-        <p:txBody>
-          <a:bodyPr>
-            <a:normAutofit/>
-          </a:bodyPr>
-          <a:lstStyle/>
-          <a:p>
-            <a:r>
-              <a:rPr lang="en-US" altLang="ko-KR" b="1" dirty="0"/>
-              <a:t>High / Low</a:t>
-            </a:r>
-            <a:r>
-              <a:rPr lang="ko-KR" altLang="en-US" dirty="0"/>
-              <a:t>는</a:t>
-            </a:r>
-            <a:r>
-              <a:rPr lang="en-US" altLang="ko-KR" dirty="0"/>
-              <a:t>:</a:t>
-            </a:r>
-          </a:p>
-          <a:p>
-            <a:pPr lvl="1"/>
-            <a:r>
-              <a:rPr lang="ko-KR" altLang="en-US" dirty="0"/>
-              <a:t>변동성 측정</a:t>
-            </a:r>
-          </a:p>
-          <a:p>
-            <a:pPr lvl="1"/>
-            <a:r>
-              <a:rPr lang="ko-KR" altLang="en-US" dirty="0"/>
-              <a:t>리스크 분석</a:t>
-            </a:r>
-          </a:p>
-          <a:p>
-            <a:pPr lvl="1"/>
-            <a:r>
-              <a:rPr lang="ko-KR" altLang="en-US" dirty="0"/>
-              <a:t>캔들 패턴</a:t>
-            </a:r>
-          </a:p>
-          <a:p>
-            <a:r>
-              <a:rPr lang="en-US" altLang="ko-KR" b="1" dirty="0"/>
-              <a:t>Open</a:t>
-            </a:r>
-            <a:r>
-              <a:rPr lang="ko-KR" altLang="en-US" dirty="0"/>
-              <a:t>은</a:t>
-            </a:r>
-            <a:r>
-              <a:rPr lang="en-US" altLang="ko-KR" dirty="0"/>
-              <a:t>:</a:t>
-            </a:r>
-          </a:p>
-          <a:p>
-            <a:pPr lvl="1"/>
-            <a:r>
-              <a:rPr lang="ko-KR" altLang="en-US" dirty="0"/>
-              <a:t>갭 상승</a:t>
-            </a:r>
-            <a:r>
-              <a:rPr lang="en-US" altLang="ko-KR" dirty="0"/>
-              <a:t>/</a:t>
-            </a:r>
-            <a:r>
-              <a:rPr lang="ko-KR" altLang="en-US" dirty="0"/>
-              <a:t>하락 분석</a:t>
-            </a:r>
-          </a:p>
-          <a:p>
-            <a:r>
-              <a:rPr lang="en-US" altLang="ko-KR" b="1" dirty="0"/>
-              <a:t>Close</a:t>
-            </a:r>
-            <a:r>
-              <a:rPr lang="ko-KR" altLang="en-US" dirty="0"/>
-              <a:t>는</a:t>
-            </a:r>
-            <a:r>
-              <a:rPr lang="en-US" altLang="ko-KR" dirty="0"/>
-              <a:t>:</a:t>
-            </a:r>
-          </a:p>
-          <a:p>
-            <a:pPr lvl="1"/>
-            <a:r>
-              <a:rPr lang="ko-KR" altLang="en-US" dirty="0"/>
-              <a:t>수익률</a:t>
-            </a:r>
-          </a:p>
-          <a:p>
-            <a:pPr lvl="1"/>
-            <a:r>
-              <a:rPr lang="ko-KR" altLang="en-US" dirty="0"/>
-              <a:t>레버리지</a:t>
-            </a:r>
-          </a:p>
-          <a:p>
-            <a:pPr lvl="1"/>
-            <a:r>
-              <a:rPr lang="ko-KR" altLang="en-US" dirty="0"/>
-              <a:t>지표 계산</a:t>
-            </a:r>
-          </a:p>
-          <a:p>
-            <a:endParaRPr lang="ko-KR" altLang="en-US" dirty="0"/>
-          </a:p>
-        </p:txBody>
-      </p:sp>
-    </p:spTree>
-    <p:extLst>
-      <p:ext uri="{BB962C8B-B14F-4D97-AF65-F5344CB8AC3E}">
-        <p14:creationId xmlns:p14="http://schemas.microsoft.com/office/powerpoint/2010/main" val="1885189974"/>
-      </p:ext>
-    </p:extLst>
-  </p:cSld>
-  <p:clrMapOvr>
-    <a:masterClrMapping/>
-  </p:clrMapOvr>
-</p:sld>
-</file>
-
-<file path=ppt/slides/slide25.xml><?xml version="1.0" encoding="utf-8"?>
-<p:sld xmlns:a="http://schemas.openxmlformats.org/drawingml/2006/main" xmlns:r="http://schemas.openxmlformats.org/officeDocument/2006/relationships" xmlns:p="http://schemas.openxmlformats.org/presentationml/2006/main">
-  <p:cSld>
-    <p:spTree>
-      <p:nvGrpSpPr>
-        <p:cNvPr id="1" name=""/>
-        <p:cNvGrpSpPr/>
-        <p:nvPr/>
-      </p:nvGrpSpPr>
-      <p:grpSpPr>
-        <a:xfrm>
-          <a:off x="0" y="0"/>
-          <a:ext cx="0" cy="0"/>
-          <a:chOff x="0" y="0"/>
-          <a:chExt cx="0" cy="0"/>
-        </a:xfrm>
-      </p:grpSpPr>
-      <p:sp>
-        <p:nvSpPr>
-          <p:cNvPr id="2" name="제목 1">
-            <a:extLst>
-              <a:ext uri="{FF2B5EF4-FFF2-40B4-BE49-F238E27FC236}">
-                <a16:creationId xmlns:a16="http://schemas.microsoft.com/office/drawing/2014/main" id="{B39D1A63-703E-81AE-96B4-992C06152DD2}"/>
-              </a:ext>
-            </a:extLst>
-          </p:cNvPr>
-          <p:cNvSpPr>
-            <a:spLocks noGrp="1"/>
-          </p:cNvSpPr>
-          <p:nvPr>
-            <p:ph type="title"/>
-          </p:nvPr>
-        </p:nvSpPr>
-        <p:spPr/>
-        <p:txBody>
-          <a:bodyPr/>
-          <a:lstStyle/>
-          <a:p>
-            <a:r>
-              <a:rPr lang="en-US" altLang="ko-KR" dirty="0"/>
-              <a:t>Requirements.txt</a:t>
-            </a:r>
-            <a:endParaRPr lang="ko-KR" altLang="en-US" dirty="0"/>
-          </a:p>
-        </p:txBody>
-      </p:sp>
-      <p:sp>
-        <p:nvSpPr>
-          <p:cNvPr id="4" name="내용 개체 틀 2">
-            <a:extLst>
-              <a:ext uri="{FF2B5EF4-FFF2-40B4-BE49-F238E27FC236}">
-                <a16:creationId xmlns:a16="http://schemas.microsoft.com/office/drawing/2014/main" id="{34CAF790-F9B7-476E-F500-5870FCF5A41C}"/>
-              </a:ext>
-            </a:extLst>
-          </p:cNvPr>
-          <p:cNvSpPr txBox="1">
-            <a:spLocks/>
-          </p:cNvSpPr>
-          <p:nvPr/>
-        </p:nvSpPr>
-        <p:spPr>
-          <a:xfrm>
-            <a:off x="990600" y="1978025"/>
-            <a:ext cx="4759751" cy="4351338"/>
-          </a:xfrm>
-          <a:prstGeom prst="rect">
-            <a:avLst/>
-          </a:prstGeom>
-        </p:spPr>
-        <p:txBody>
-          <a:bodyPr vert="horz" lIns="91440" tIns="45720" rIns="91440" bIns="45720" rtlCol="0">
-            <a:normAutofit fontScale="92500" lnSpcReduction="10000"/>
-          </a:bodyPr>
-          <a:lstStyle>
-            <a:lvl1pPr marL="228600" indent="-228600" algn="l" defTabSz="914400" rtl="0" eaLnBrk="1" latinLnBrk="1" hangingPunct="1">
-              <a:lnSpc>
-                <a:spcPct val="90000"/>
-              </a:lnSpc>
-              <a:spcBef>
-                <a:spcPts val="1000"/>
-              </a:spcBef>
-              <a:buFont typeface="Arial" panose="020B0604020202020204" pitchFamily="34" charset="0"/>
-              <a:buChar char="•"/>
-              <a:defRPr sz="2800" kern="1200">
-                <a:solidFill>
-                  <a:schemeClr val="tx1"/>
-                </a:solidFill>
-                <a:latin typeface="+mn-lt"/>
-                <a:ea typeface="+mn-ea"/>
-                <a:cs typeface="+mn-cs"/>
-              </a:defRPr>
-            </a:lvl1pPr>
-            <a:lvl2pPr marL="685800" indent="-228600" algn="l" defTabSz="914400" rtl="0" eaLnBrk="1" latinLnBrk="1" hangingPunct="1">
-              <a:lnSpc>
-                <a:spcPct val="90000"/>
-              </a:lnSpc>
-              <a:spcBef>
-                <a:spcPts val="500"/>
-              </a:spcBef>
-              <a:buFont typeface="Arial" panose="020B0604020202020204" pitchFamily="34" charset="0"/>
-              <a:buChar char="•"/>
-              <a:defRPr sz="2400" kern="1200">
-                <a:solidFill>
-                  <a:schemeClr val="tx1"/>
-                </a:solidFill>
-                <a:latin typeface="+mn-lt"/>
-                <a:ea typeface="+mn-ea"/>
-                <a:cs typeface="+mn-cs"/>
-              </a:defRPr>
-            </a:lvl2pPr>
-            <a:lvl3pPr marL="1143000" indent="-228600" algn="l" defTabSz="914400" rtl="0" eaLnBrk="1" latinLnBrk="1" hangingPunct="1">
-              <a:lnSpc>
-                <a:spcPct val="90000"/>
-              </a:lnSpc>
-              <a:spcBef>
-                <a:spcPts val="500"/>
-              </a:spcBef>
-              <a:buFont typeface="Arial" panose="020B0604020202020204" pitchFamily="34" charset="0"/>
-              <a:buChar char="•"/>
-              <a:defRPr sz="2000" kern="1200">
-                <a:solidFill>
-                  <a:schemeClr val="tx1"/>
-                </a:solidFill>
-                <a:latin typeface="+mn-lt"/>
-                <a:ea typeface="+mn-ea"/>
-                <a:cs typeface="+mn-cs"/>
-              </a:defRPr>
-            </a:lvl3pPr>
-            <a:lvl4pPr marL="1600200" indent="-228600" algn="l" defTabSz="914400" rtl="0" eaLnBrk="1" latinLnBrk="1" hangingPunct="1">
-              <a:lnSpc>
-                <a:spcPct val="90000"/>
-              </a:lnSpc>
-              <a:spcBef>
-                <a:spcPts val="500"/>
-              </a:spcBef>
-              <a:buFont typeface="Arial" panose="020B0604020202020204" pitchFamily="34" charset="0"/>
-              <a:buChar char="•"/>
-              <a:defRPr sz="1800" kern="1200">
-                <a:solidFill>
-                  <a:schemeClr val="tx1"/>
-                </a:solidFill>
-                <a:latin typeface="+mn-lt"/>
-                <a:ea typeface="+mn-ea"/>
-                <a:cs typeface="+mn-cs"/>
-              </a:defRPr>
-            </a:lvl4pPr>
-            <a:lvl5pPr marL="2057400" indent="-228600" algn="l" defTabSz="914400" rtl="0" eaLnBrk="1" latinLnBrk="1" hangingPunct="1">
-              <a:lnSpc>
-                <a:spcPct val="90000"/>
-              </a:lnSpc>
-              <a:spcBef>
-                <a:spcPts val="500"/>
-              </a:spcBef>
-              <a:buFont typeface="Arial" panose="020B0604020202020204" pitchFamily="34" charset="0"/>
-              <a:buChar char="•"/>
-              <a:defRPr sz="1800" kern="1200">
-                <a:solidFill>
-                  <a:schemeClr val="tx1"/>
-                </a:solidFill>
-                <a:latin typeface="+mn-lt"/>
-                <a:ea typeface="+mn-ea"/>
-                <a:cs typeface="+mn-cs"/>
-              </a:defRPr>
-            </a:lvl5pPr>
-            <a:lvl6pPr marL="2514600" indent="-228600" algn="l" defTabSz="914400" rtl="0" eaLnBrk="1" latinLnBrk="1" hangingPunct="1">
-              <a:lnSpc>
-                <a:spcPct val="90000"/>
-              </a:lnSpc>
-              <a:spcBef>
-                <a:spcPts val="500"/>
-              </a:spcBef>
-              <a:buFont typeface="Arial" panose="020B0604020202020204" pitchFamily="34" charset="0"/>
-              <a:buChar char="•"/>
-              <a:defRPr sz="1800" kern="1200">
-                <a:solidFill>
-                  <a:schemeClr val="tx1"/>
-                </a:solidFill>
-                <a:latin typeface="+mn-lt"/>
-                <a:ea typeface="+mn-ea"/>
-                <a:cs typeface="+mn-cs"/>
-              </a:defRPr>
-            </a:lvl6pPr>
-            <a:lvl7pPr marL="2971800" indent="-228600" algn="l" defTabSz="914400" rtl="0" eaLnBrk="1" latinLnBrk="1" hangingPunct="1">
-              <a:lnSpc>
-                <a:spcPct val="90000"/>
-              </a:lnSpc>
-              <a:spcBef>
-                <a:spcPts val="500"/>
-              </a:spcBef>
-              <a:buFont typeface="Arial" panose="020B0604020202020204" pitchFamily="34" charset="0"/>
-              <a:buChar char="•"/>
-              <a:defRPr sz="1800" kern="1200">
-                <a:solidFill>
-                  <a:schemeClr val="tx1"/>
-                </a:solidFill>
-                <a:latin typeface="+mn-lt"/>
-                <a:ea typeface="+mn-ea"/>
-                <a:cs typeface="+mn-cs"/>
-              </a:defRPr>
-            </a:lvl7pPr>
-            <a:lvl8pPr marL="3429000" indent="-228600" algn="l" defTabSz="914400" rtl="0" eaLnBrk="1" latinLnBrk="1" hangingPunct="1">
-              <a:lnSpc>
-                <a:spcPct val="90000"/>
-              </a:lnSpc>
-              <a:spcBef>
-                <a:spcPts val="500"/>
-              </a:spcBef>
-              <a:buFont typeface="Arial" panose="020B0604020202020204" pitchFamily="34" charset="0"/>
-              <a:buChar char="•"/>
-              <a:defRPr sz="1800" kern="1200">
-                <a:solidFill>
-                  <a:schemeClr val="tx1"/>
-                </a:solidFill>
-                <a:latin typeface="+mn-lt"/>
-                <a:ea typeface="+mn-ea"/>
-                <a:cs typeface="+mn-cs"/>
-              </a:defRPr>
-            </a:lvl8pPr>
-            <a:lvl9pPr marL="3886200" indent="-228600" algn="l" defTabSz="914400" rtl="0" eaLnBrk="1" latinLnBrk="1" hangingPunct="1">
-              <a:lnSpc>
-                <a:spcPct val="90000"/>
-              </a:lnSpc>
-              <a:spcBef>
-                <a:spcPts val="500"/>
-              </a:spcBef>
-              <a:buFont typeface="Arial" panose="020B0604020202020204" pitchFamily="34" charset="0"/>
-              <a:buChar char="•"/>
-              <a:defRPr sz="1800" kern="1200">
-                <a:solidFill>
-                  <a:schemeClr val="tx1"/>
-                </a:solidFill>
-                <a:latin typeface="+mn-lt"/>
-                <a:ea typeface="+mn-ea"/>
-                <a:cs typeface="+mn-cs"/>
-              </a:defRPr>
-            </a:lvl9pPr>
-          </a:lstStyle>
-          <a:p>
-            <a:r>
-              <a:rPr lang="en-US" altLang="ko-KR" sz="1000" dirty="0"/>
-              <a:t># core</a:t>
-            </a:r>
-          </a:p>
-          <a:p>
-            <a:r>
-              <a:rPr lang="en-US" altLang="ko-KR" sz="1000" dirty="0" err="1"/>
-              <a:t>numpy</a:t>
-            </a:r>
-            <a:r>
-              <a:rPr lang="en-US" altLang="ko-KR" sz="1000" dirty="0"/>
-              <a:t>&gt;=1.26</a:t>
-            </a:r>
-          </a:p>
-          <a:p>
-            <a:r>
-              <a:rPr lang="en-US" altLang="ko-KR" sz="1000" dirty="0"/>
-              <a:t>pandas&gt;=2.1</a:t>
-            </a:r>
-          </a:p>
-          <a:p>
-            <a:endParaRPr lang="en-US" altLang="ko-KR" sz="1000" dirty="0"/>
-          </a:p>
-          <a:p>
-            <a:r>
-              <a:rPr lang="en-US" altLang="ko-KR" sz="1000" dirty="0"/>
-              <a:t># data</a:t>
-            </a:r>
-          </a:p>
-          <a:p>
-            <a:r>
-              <a:rPr lang="en-US" altLang="ko-KR" sz="1000" dirty="0" err="1"/>
-              <a:t>yfinance</a:t>
-            </a:r>
-            <a:r>
-              <a:rPr lang="en-US" altLang="ko-KR" sz="1000" dirty="0"/>
-              <a:t>&gt;=0.2</a:t>
-            </a:r>
-          </a:p>
-          <a:p>
-            <a:r>
-              <a:rPr lang="en-US" altLang="ko-KR" sz="1000" dirty="0"/>
-              <a:t>requests&gt;=2.31</a:t>
-            </a:r>
-          </a:p>
-          <a:p>
-            <a:endParaRPr lang="en-US" altLang="ko-KR" sz="1000" dirty="0"/>
-          </a:p>
-          <a:p>
-            <a:r>
-              <a:rPr lang="en-US" altLang="ko-KR" sz="1000" dirty="0"/>
-              <a:t># analysis &amp; metrics</a:t>
-            </a:r>
-          </a:p>
-          <a:p>
-            <a:r>
-              <a:rPr lang="en-US" altLang="ko-KR" sz="1000" dirty="0" err="1"/>
-              <a:t>scipy</a:t>
-            </a:r>
-            <a:r>
-              <a:rPr lang="en-US" altLang="ko-KR" sz="1000" dirty="0"/>
-              <a:t>&gt;=1.11</a:t>
-            </a:r>
-          </a:p>
-          <a:p>
-            <a:endParaRPr lang="en-US" altLang="ko-KR" sz="1000" dirty="0"/>
-          </a:p>
-          <a:p>
-            <a:r>
-              <a:rPr lang="en-US" altLang="ko-KR" sz="1000" dirty="0"/>
-              <a:t># plotting</a:t>
-            </a:r>
-          </a:p>
-          <a:p>
-            <a:r>
-              <a:rPr lang="en-US" altLang="ko-KR" sz="1000" dirty="0"/>
-              <a:t>matplotlib&gt;=3.8</a:t>
-            </a:r>
-          </a:p>
-          <a:p>
-            <a:r>
-              <a:rPr lang="en-US" altLang="ko-KR" sz="1000" dirty="0"/>
-              <a:t>seaborn&gt;=0.13</a:t>
-            </a:r>
-          </a:p>
-          <a:p>
-            <a:endParaRPr lang="en-US" altLang="ko-KR" sz="1000" dirty="0"/>
-          </a:p>
-          <a:p>
-            <a:r>
-              <a:rPr lang="en-US" altLang="ko-KR" sz="1000" dirty="0"/>
-              <a:t># notebooks</a:t>
-            </a:r>
-          </a:p>
-          <a:p>
-            <a:r>
-              <a:rPr lang="en-US" altLang="ko-KR" sz="1000" dirty="0" err="1"/>
-              <a:t>jupyter</a:t>
-            </a:r>
-            <a:r>
-              <a:rPr lang="en-US" altLang="ko-KR" sz="1000" dirty="0"/>
-              <a:t>&gt;=1.0</a:t>
-            </a:r>
-          </a:p>
-          <a:p>
-            <a:r>
-              <a:rPr lang="en-US" altLang="ko-KR" sz="1000" dirty="0" err="1"/>
-              <a:t>ipykernel</a:t>
-            </a:r>
-            <a:r>
-              <a:rPr lang="en-US" altLang="ko-KR" sz="1000" dirty="0"/>
-              <a:t>&gt;=6.29</a:t>
-            </a:r>
-            <a:endParaRPr lang="ko-KR" altLang="en-US" sz="1000" dirty="0"/>
-          </a:p>
-        </p:txBody>
-      </p:sp>
-      <p:sp>
-        <p:nvSpPr>
-          <p:cNvPr id="9" name="TextBox 8">
-            <a:extLst>
-              <a:ext uri="{FF2B5EF4-FFF2-40B4-BE49-F238E27FC236}">
-                <a16:creationId xmlns:a16="http://schemas.microsoft.com/office/drawing/2014/main" id="{DD5A54B8-E28A-FD8D-B053-8A8D799375C9}"/>
-              </a:ext>
-            </a:extLst>
-          </p:cNvPr>
-          <p:cNvSpPr txBox="1"/>
-          <p:nvPr/>
-        </p:nvSpPr>
-        <p:spPr>
-          <a:xfrm>
-            <a:off x="5768502" y="2337847"/>
-            <a:ext cx="5992346" cy="1846659"/>
-          </a:xfrm>
-          <a:prstGeom prst="rect">
-            <a:avLst/>
-          </a:prstGeom>
-          <a:noFill/>
-        </p:spPr>
-        <p:txBody>
-          <a:bodyPr wrap="none" rtlCol="0">
-            <a:spAutoFit/>
-          </a:bodyPr>
-          <a:lstStyle/>
-          <a:p>
-            <a:pPr marL="285750" indent="-285750">
-              <a:buFont typeface="Arial" panose="020B0604020202020204" pitchFamily="34" charset="0"/>
-              <a:buChar char="•"/>
-            </a:pPr>
-            <a:r>
-              <a:rPr lang="ko-KR" altLang="ko-KR" b="1" dirty="0" err="1">
-                <a:latin typeface="Arial" panose="020B0604020202020204" pitchFamily="34" charset="0"/>
-              </a:rPr>
-              <a:t>numpy</a:t>
-            </a:r>
-            <a:r>
-              <a:rPr lang="ko-KR" altLang="ko-KR" b="1" dirty="0">
-                <a:latin typeface="Arial" panose="020B0604020202020204" pitchFamily="34" charset="0"/>
-              </a:rPr>
-              <a:t> / </a:t>
-            </a:r>
-            <a:r>
-              <a:rPr lang="ko-KR" altLang="ko-KR" b="1" dirty="0" err="1">
-                <a:latin typeface="Arial" panose="020B0604020202020204" pitchFamily="34" charset="0"/>
-              </a:rPr>
-              <a:t>pandas</a:t>
-            </a:r>
-            <a:r>
-              <a:rPr lang="ko-KR" altLang="ko-KR" dirty="0">
-                <a:latin typeface="Arial" panose="020B0604020202020204" pitchFamily="34" charset="0"/>
-              </a:rPr>
-              <a:t> → </a:t>
-            </a:r>
-            <a:r>
-              <a:rPr lang="ko-KR" altLang="ko-KR" dirty="0" err="1">
-                <a:latin typeface="Arial" panose="020B0604020202020204" pitchFamily="34" charset="0"/>
-              </a:rPr>
-              <a:t>수익률·누적·변동성</a:t>
-            </a:r>
-            <a:r>
-              <a:rPr lang="ko-KR" altLang="ko-KR" dirty="0">
-                <a:latin typeface="Arial" panose="020B0604020202020204" pitchFamily="34" charset="0"/>
-              </a:rPr>
-              <a:t> 계산 핵심</a:t>
-            </a:r>
-            <a:endParaRPr lang="en-US" altLang="ko-KR" dirty="0">
-              <a:latin typeface="Arial" panose="020B0604020202020204" pitchFamily="34" charset="0"/>
-            </a:endParaRPr>
-          </a:p>
-          <a:p>
-            <a:pPr marL="285750" indent="-285750">
-              <a:buFont typeface="Arial" panose="020B0604020202020204" pitchFamily="34" charset="0"/>
-              <a:buChar char="•"/>
-            </a:pPr>
-            <a:r>
-              <a:rPr lang="ko-KR" altLang="ko-KR" b="1" dirty="0" err="1">
-                <a:latin typeface="Arial" panose="020B0604020202020204" pitchFamily="34" charset="0"/>
-              </a:rPr>
-              <a:t>yfinance</a:t>
-            </a:r>
-            <a:r>
-              <a:rPr lang="ko-KR" altLang="ko-KR" dirty="0">
-                <a:latin typeface="Arial" panose="020B0604020202020204" pitchFamily="34" charset="0"/>
-              </a:rPr>
-              <a:t> → AMD 등 주가 데이터 수집</a:t>
-            </a:r>
-          </a:p>
-          <a:p>
-            <a:pPr marL="285750" indent="-285750">
-              <a:buFont typeface="Arial" panose="020B0604020202020204" pitchFamily="34" charset="0"/>
-              <a:buChar char="•"/>
-            </a:pPr>
-            <a:r>
-              <a:rPr lang="ko-KR" altLang="ko-KR" b="1" dirty="0" err="1">
-                <a:latin typeface="Arial" panose="020B0604020202020204" pitchFamily="34" charset="0"/>
-              </a:rPr>
-              <a:t>scipy</a:t>
-            </a:r>
-            <a:r>
-              <a:rPr lang="ko-KR" altLang="ko-KR" dirty="0">
-                <a:latin typeface="Arial" panose="020B0604020202020204" pitchFamily="34" charset="0"/>
-              </a:rPr>
-              <a:t> → </a:t>
-            </a:r>
-            <a:r>
-              <a:rPr lang="ko-KR" altLang="ko-KR" dirty="0" err="1">
-                <a:latin typeface="Arial" panose="020B0604020202020204" pitchFamily="34" charset="0"/>
-              </a:rPr>
-              <a:t>Sharpe</a:t>
-            </a:r>
-            <a:r>
-              <a:rPr lang="ko-KR" altLang="ko-KR" dirty="0">
-                <a:latin typeface="Arial" panose="020B0604020202020204" pitchFamily="34" charset="0"/>
-              </a:rPr>
-              <a:t>, </a:t>
-            </a:r>
-            <a:r>
-              <a:rPr lang="ko-KR" altLang="ko-KR" dirty="0" err="1">
-                <a:latin typeface="Arial" panose="020B0604020202020204" pitchFamily="34" charset="0"/>
-              </a:rPr>
-              <a:t>Max</a:t>
-            </a:r>
-            <a:r>
-              <a:rPr lang="ko-KR" altLang="ko-KR" dirty="0">
-                <a:latin typeface="Arial" panose="020B0604020202020204" pitchFamily="34" charset="0"/>
-              </a:rPr>
-              <a:t> </a:t>
-            </a:r>
-            <a:r>
-              <a:rPr lang="ko-KR" altLang="ko-KR" dirty="0" err="1">
-                <a:latin typeface="Arial" panose="020B0604020202020204" pitchFamily="34" charset="0"/>
-              </a:rPr>
-              <a:t>Drawdown</a:t>
-            </a:r>
-            <a:r>
-              <a:rPr lang="ko-KR" altLang="ko-KR" dirty="0">
-                <a:latin typeface="Arial" panose="020B0604020202020204" pitchFamily="34" charset="0"/>
-              </a:rPr>
-              <a:t> 등 지표 계산</a:t>
-            </a:r>
-          </a:p>
-          <a:p>
-            <a:pPr marL="285750" indent="-285750">
-              <a:buFont typeface="Arial" panose="020B0604020202020204" pitchFamily="34" charset="0"/>
-              <a:buChar char="•"/>
-            </a:pPr>
-            <a:r>
-              <a:rPr lang="ko-KR" altLang="ko-KR" b="1" dirty="0" err="1">
-                <a:latin typeface="Arial" panose="020B0604020202020204" pitchFamily="34" charset="0"/>
-              </a:rPr>
-              <a:t>matplotlib</a:t>
-            </a:r>
-            <a:r>
-              <a:rPr lang="ko-KR" altLang="ko-KR" b="1" dirty="0">
-                <a:latin typeface="Arial" panose="020B0604020202020204" pitchFamily="34" charset="0"/>
-              </a:rPr>
-              <a:t> / </a:t>
-            </a:r>
-            <a:r>
-              <a:rPr lang="ko-KR" altLang="ko-KR" b="1" dirty="0" err="1">
-                <a:latin typeface="Arial" panose="020B0604020202020204" pitchFamily="34" charset="0"/>
-              </a:rPr>
-              <a:t>seaborn</a:t>
-            </a:r>
-            <a:r>
-              <a:rPr lang="ko-KR" altLang="ko-KR" dirty="0">
-                <a:latin typeface="Arial" panose="020B0604020202020204" pitchFamily="34" charset="0"/>
-              </a:rPr>
-              <a:t> → 레버리지 효과 시각화</a:t>
-            </a:r>
-            <a:endParaRPr lang="en-US" altLang="ko-KR" dirty="0">
-              <a:latin typeface="Arial" panose="020B0604020202020204" pitchFamily="34" charset="0"/>
-            </a:endParaRPr>
-          </a:p>
-          <a:p>
-            <a:pPr marL="285750" indent="-285750">
-              <a:buFont typeface="Arial" panose="020B0604020202020204" pitchFamily="34" charset="0"/>
-              <a:buChar char="•"/>
-            </a:pPr>
-            <a:r>
-              <a:rPr lang="ko-KR" altLang="ko-KR" b="1" dirty="0" err="1">
-                <a:latin typeface="Arial" panose="020B0604020202020204" pitchFamily="34" charset="0"/>
-              </a:rPr>
-              <a:t>jupyter</a:t>
-            </a:r>
-            <a:r>
-              <a:rPr lang="ko-KR" altLang="ko-KR" b="1" dirty="0">
-                <a:latin typeface="Arial" panose="020B0604020202020204" pitchFamily="34" charset="0"/>
-              </a:rPr>
-              <a:t> / </a:t>
-            </a:r>
-            <a:r>
-              <a:rPr lang="ko-KR" altLang="ko-KR" b="1" dirty="0" err="1">
-                <a:latin typeface="Arial" panose="020B0604020202020204" pitchFamily="34" charset="0"/>
-              </a:rPr>
-              <a:t>ipykernel</a:t>
-            </a:r>
-            <a:r>
-              <a:rPr lang="ko-KR" altLang="ko-KR" dirty="0">
-                <a:latin typeface="Arial" panose="020B0604020202020204" pitchFamily="34" charset="0"/>
-              </a:rPr>
-              <a:t> → </a:t>
-            </a:r>
-            <a:r>
-              <a:rPr kumimoji="0" lang="ko-KR" altLang="ko-KR" b="0" i="0" u="none" strike="noStrike" cap="none" normalizeH="0" baseline="0" dirty="0">
-                <a:ln>
-                  <a:noFill/>
-                </a:ln>
-                <a:solidFill>
-                  <a:schemeClr val="tx1"/>
-                </a:solidFill>
-                <a:effectLst/>
-                <a:latin typeface="Arial Unicode MS" panose="020B0604020202020204" pitchFamily="50" charset="-127"/>
-              </a:rPr>
-              <a:t>01_backtest_amd.ipynb</a:t>
-            </a:r>
-            <a:r>
-              <a:rPr kumimoji="0" lang="ko-KR" altLang="ko-KR" b="0" i="0" u="none" strike="noStrike" cap="none" normalizeH="0" baseline="0" dirty="0">
-                <a:ln>
-                  <a:noFill/>
-                </a:ln>
-                <a:solidFill>
-                  <a:schemeClr val="tx1"/>
-                </a:solidFill>
-                <a:effectLst/>
-              </a:rPr>
-              <a:t> 실행용</a:t>
-            </a:r>
-            <a:endParaRPr lang="ko-KR" altLang="ko-KR" dirty="0">
-              <a:latin typeface="Arial" panose="020B0604020202020204" pitchFamily="34" charset="0"/>
-            </a:endParaRPr>
-          </a:p>
-          <a:p>
-            <a:pPr marL="285750" indent="-285750">
-              <a:buFont typeface="Arial" panose="020B0604020202020204" pitchFamily="34" charset="0"/>
-              <a:buChar char="•"/>
-            </a:pPr>
-            <a:endParaRPr lang="ko-KR" altLang="ko-KR" sz="2400" dirty="0">
-              <a:latin typeface="Arial" panose="020B0604020202020204" pitchFamily="34" charset="0"/>
-            </a:endParaRPr>
-          </a:p>
-        </p:txBody>
-      </p:sp>
-    </p:spTree>
-    <p:extLst>
-      <p:ext uri="{BB962C8B-B14F-4D97-AF65-F5344CB8AC3E}">
-        <p14:creationId xmlns:p14="http://schemas.microsoft.com/office/powerpoint/2010/main" val="2670566322"/>
-      </p:ext>
-    </p:extLst>
-  </p:cSld>
-  <p:clrMapOvr>
-    <a:masterClrMapping/>
-  </p:clrMapOvr>
-</p:sld>
-</file>
-
-<file path=ppt/slides/slide26.xml><?xml version="1.0" encoding="utf-8"?>
-<p:sld xmlns:a="http://schemas.openxmlformats.org/drawingml/2006/main" xmlns:r="http://schemas.openxmlformats.org/officeDocument/2006/relationships" xmlns:p="http://schemas.openxmlformats.org/presentationml/2006/main">
-  <p:cSld>
-    <p:spTree>
-      <p:nvGrpSpPr>
-        <p:cNvPr id="1" name=""/>
-        <p:cNvGrpSpPr/>
-        <p:nvPr/>
-      </p:nvGrpSpPr>
-      <p:grpSpPr>
-        <a:xfrm>
-          <a:off x="0" y="0"/>
-          <a:ext cx="0" cy="0"/>
-          <a:chOff x="0" y="0"/>
-          <a:chExt cx="0" cy="0"/>
-        </a:xfrm>
-      </p:grpSpPr>
-      <p:sp>
-        <p:nvSpPr>
-          <p:cNvPr id="2" name="제목 1">
-            <a:extLst>
-              <a:ext uri="{FF2B5EF4-FFF2-40B4-BE49-F238E27FC236}">
-                <a16:creationId xmlns:a16="http://schemas.microsoft.com/office/drawing/2014/main" id="{38B1AFB4-299A-4C2E-0EA7-33D658348EB3}"/>
-              </a:ext>
-            </a:extLst>
-          </p:cNvPr>
-          <p:cNvSpPr>
-            <a:spLocks noGrp="1"/>
-          </p:cNvSpPr>
-          <p:nvPr>
-            <p:ph type="title"/>
-          </p:nvPr>
-        </p:nvSpPr>
-        <p:spPr/>
-        <p:txBody>
-          <a:bodyPr>
-            <a:normAutofit/>
-          </a:bodyPr>
-          <a:lstStyle/>
-          <a:p>
-            <a:r>
-              <a:rPr lang="ko-KR" altLang="en-US" sz="3200" dirty="0"/>
-              <a:t>가상환경생성</a:t>
-            </a:r>
-          </a:p>
-        </p:txBody>
-      </p:sp>
-      <p:sp>
-        <p:nvSpPr>
-          <p:cNvPr id="3" name="내용 개체 틀 2">
-            <a:extLst>
-              <a:ext uri="{FF2B5EF4-FFF2-40B4-BE49-F238E27FC236}">
-                <a16:creationId xmlns:a16="http://schemas.microsoft.com/office/drawing/2014/main" id="{DB6695F6-36FD-16CA-5F16-33739651FFAF}"/>
-              </a:ext>
-            </a:extLst>
-          </p:cNvPr>
-          <p:cNvSpPr>
-            <a:spLocks noGrp="1"/>
-          </p:cNvSpPr>
-          <p:nvPr>
-            <p:ph idx="1"/>
-          </p:nvPr>
-        </p:nvSpPr>
-        <p:spPr/>
-        <p:txBody>
-          <a:bodyPr>
-            <a:normAutofit fontScale="92500" lnSpcReduction="10000"/>
-          </a:bodyPr>
-          <a:lstStyle/>
-          <a:p>
-            <a:r>
-              <a:rPr lang="ko-KR" altLang="en-US" dirty="0"/>
-              <a:t>프로젝트마다 독립된 파이썬 실험실</a:t>
-            </a:r>
-            <a:r>
-              <a:rPr lang="en-US" altLang="ko-KR" dirty="0"/>
-              <a:t>(</a:t>
-            </a:r>
-            <a:r>
-              <a:rPr lang="ko-KR" altLang="en-US" dirty="0"/>
-              <a:t>파이썬 기능</a:t>
-            </a:r>
-            <a:r>
-              <a:rPr lang="en-US" altLang="ko-KR" dirty="0"/>
-              <a:t>)</a:t>
-            </a:r>
-          </a:p>
-          <a:p>
-            <a:r>
-              <a:rPr lang="ko-KR" altLang="en-US" b="1" dirty="0"/>
-              <a:t>🔹 </a:t>
-            </a:r>
-            <a:r>
-              <a:rPr lang="en-US" altLang="ko-KR" b="1" dirty="0"/>
-              <a:t>1. </a:t>
-            </a:r>
-            <a:r>
-              <a:rPr lang="ko-KR" altLang="en-US" b="1" dirty="0"/>
-              <a:t>패키지 버전 격리</a:t>
-            </a:r>
-          </a:p>
-          <a:p>
-            <a:r>
-              <a:rPr lang="ko-KR" altLang="en-US" dirty="0"/>
-              <a:t>프로젝트 </a:t>
-            </a:r>
-            <a:r>
-              <a:rPr lang="en-US" altLang="ko-KR" dirty="0"/>
-              <a:t>A → </a:t>
-            </a:r>
-            <a:r>
-              <a:rPr lang="en-US" altLang="ko-KR" dirty="0" err="1"/>
-              <a:t>numpy</a:t>
-            </a:r>
-            <a:r>
-              <a:rPr lang="en-US" altLang="ko-KR" dirty="0"/>
-              <a:t> 1.23</a:t>
-            </a:r>
-          </a:p>
-          <a:p>
-            <a:r>
-              <a:rPr lang="ko-KR" altLang="en-US" dirty="0"/>
-              <a:t>프로젝트 </a:t>
-            </a:r>
-            <a:r>
-              <a:rPr lang="en-US" altLang="ko-KR" dirty="0"/>
-              <a:t>B → </a:t>
-            </a:r>
-            <a:r>
-              <a:rPr lang="en-US" altLang="ko-KR" dirty="0" err="1"/>
-              <a:t>numpy</a:t>
-            </a:r>
-            <a:r>
-              <a:rPr lang="en-US" altLang="ko-KR" dirty="0"/>
-              <a:t> 1.26</a:t>
-            </a:r>
-          </a:p>
-          <a:p>
-            <a:r>
-              <a:rPr lang="ko-KR" altLang="en-US" dirty="0"/>
-              <a:t>서로 </a:t>
-            </a:r>
-            <a:r>
-              <a:rPr lang="ko-KR" altLang="en-US" b="1" dirty="0"/>
-              <a:t>완전히 독립</a:t>
-            </a:r>
-            <a:endParaRPr lang="ko-KR" altLang="en-US" dirty="0"/>
-          </a:p>
-          <a:p>
-            <a:r>
-              <a:rPr lang="ko-KR" altLang="en-US" b="1" dirty="0"/>
-              <a:t>🔹 </a:t>
-            </a:r>
-            <a:r>
-              <a:rPr lang="en-US" altLang="ko-KR" b="1" dirty="0"/>
-              <a:t>2. </a:t>
-            </a:r>
-            <a:r>
-              <a:rPr lang="ko-KR" altLang="en-US" b="1" dirty="0"/>
-              <a:t>재현성 </a:t>
-            </a:r>
-            <a:r>
-              <a:rPr lang="en-US" altLang="ko-KR" b="1" dirty="0"/>
-              <a:t>(Reproducibility)</a:t>
-            </a:r>
-          </a:p>
-          <a:p>
-            <a:r>
-              <a:rPr lang="en-US" altLang="ko-KR" dirty="0"/>
-              <a:t>pip install -r requirements.txt</a:t>
-            </a:r>
-          </a:p>
-          <a:p>
-            <a:r>
-              <a:rPr lang="ko-KR" altLang="en-US" dirty="0"/>
-              <a:t>👉 </a:t>
-            </a:r>
-            <a:r>
-              <a:rPr lang="en-US" altLang="ko-KR" b="1" dirty="0"/>
-              <a:t>6</a:t>
-            </a:r>
-            <a:r>
-              <a:rPr lang="ko-KR" altLang="en-US" b="1" dirty="0"/>
-              <a:t>개월 뒤 </a:t>
-            </a:r>
-            <a:r>
-              <a:rPr lang="en-US" altLang="ko-KR" b="1" dirty="0"/>
-              <a:t>/ </a:t>
-            </a:r>
-            <a:r>
-              <a:rPr lang="ko-KR" altLang="en-US" b="1" dirty="0"/>
-              <a:t>다른 </a:t>
-            </a:r>
-            <a:r>
-              <a:rPr lang="en-US" altLang="ko-KR" b="1" dirty="0"/>
-              <a:t>PC / </a:t>
-            </a:r>
-            <a:r>
-              <a:rPr lang="ko-KR" altLang="en-US" b="1" dirty="0"/>
-              <a:t>다른 사람</a:t>
-            </a:r>
-            <a:r>
-              <a:rPr lang="ko-KR" altLang="en-US" dirty="0"/>
-              <a:t>도</a:t>
-            </a:r>
-            <a:br>
-              <a:rPr lang="ko-KR" altLang="en-US" dirty="0"/>
-            </a:br>
-            <a:r>
-              <a:rPr lang="ko-KR" altLang="en-US" b="1" dirty="0"/>
-              <a:t>완전히 동일한 환경</a:t>
-            </a:r>
-            <a:r>
-              <a:rPr lang="ko-KR" altLang="en-US" dirty="0"/>
-              <a:t> 재현 가능</a:t>
-            </a:r>
-          </a:p>
-          <a:p>
-            <a:r>
-              <a:rPr lang="ko-KR" altLang="en-US" dirty="0"/>
-              <a:t>이건 연구</a:t>
-            </a:r>
-            <a:r>
-              <a:rPr lang="en-US" altLang="ko-KR" dirty="0"/>
-              <a:t>·</a:t>
-            </a:r>
-            <a:r>
-              <a:rPr lang="ko-KR" altLang="en-US" dirty="0"/>
-              <a:t>백테스트</a:t>
-            </a:r>
-            <a:r>
-              <a:rPr lang="en-US" altLang="ko-KR" dirty="0"/>
-              <a:t>·</a:t>
-            </a:r>
-            <a:r>
-              <a:rPr lang="ko-KR" altLang="en-US" dirty="0"/>
-              <a:t>금융 프로젝트에선 거의 필수야</a:t>
-            </a:r>
-            <a:r>
-              <a:rPr lang="en-US" altLang="ko-KR" dirty="0"/>
-              <a:t>.</a:t>
-            </a:r>
-          </a:p>
-          <a:p>
-            <a:endParaRPr lang="ko-KR" altLang="en-US" dirty="0"/>
-          </a:p>
-        </p:txBody>
-      </p:sp>
-    </p:spTree>
-    <p:extLst>
-      <p:ext uri="{BB962C8B-B14F-4D97-AF65-F5344CB8AC3E}">
-        <p14:creationId xmlns:p14="http://schemas.microsoft.com/office/powerpoint/2010/main" val="595479664"/>
-      </p:ext>
-    </p:extLst>
-  </p:cSld>
-  <p:clrMapOvr>
-    <a:masterClrMapping/>
-  </p:clrMapOvr>
-</p:sld>
-</file>
-
-<file path=ppt/slides/slide27.xml><?xml version="1.0" encoding="utf-8"?>
-<p:sld xmlns:a="http://schemas.openxmlformats.org/drawingml/2006/main" xmlns:r="http://schemas.openxmlformats.org/officeDocument/2006/relationships" xmlns:p="http://schemas.openxmlformats.org/presentationml/2006/main">
-  <p:cSld>
-    <p:spTree>
-      <p:nvGrpSpPr>
-        <p:cNvPr id="1" name=""/>
-        <p:cNvGrpSpPr/>
-        <p:nvPr/>
-      </p:nvGrpSpPr>
-      <p:grpSpPr>
-        <a:xfrm>
-          <a:off x="0" y="0"/>
-          <a:ext cx="0" cy="0"/>
-          <a:chOff x="0" y="0"/>
-          <a:chExt cx="0" cy="0"/>
-        </a:xfrm>
-      </p:grpSpPr>
-      <p:sp>
-        <p:nvSpPr>
-          <p:cNvPr id="2" name="제목 1">
-            <a:extLst>
-              <a:ext uri="{FF2B5EF4-FFF2-40B4-BE49-F238E27FC236}">
-                <a16:creationId xmlns:a16="http://schemas.microsoft.com/office/drawing/2014/main" id="{E74E2FB0-5B22-DF29-79EE-01821CE3FBAB}"/>
-              </a:ext>
-            </a:extLst>
-          </p:cNvPr>
-          <p:cNvSpPr>
-            <a:spLocks noGrp="1"/>
-          </p:cNvSpPr>
-          <p:nvPr>
-            <p:ph type="title"/>
-          </p:nvPr>
-        </p:nvSpPr>
-        <p:spPr/>
-        <p:txBody>
-          <a:bodyPr/>
-          <a:lstStyle/>
-          <a:p>
-            <a:endParaRPr lang="ko-KR" altLang="en-US"/>
-          </a:p>
-        </p:txBody>
-      </p:sp>
-      <p:sp>
-        <p:nvSpPr>
-          <p:cNvPr id="3" name="내용 개체 틀 2">
-            <a:extLst>
-              <a:ext uri="{FF2B5EF4-FFF2-40B4-BE49-F238E27FC236}">
-                <a16:creationId xmlns:a16="http://schemas.microsoft.com/office/drawing/2014/main" id="{BBB8D2EE-FD1E-1A29-C652-6697B8615A69}"/>
-              </a:ext>
-            </a:extLst>
-          </p:cNvPr>
-          <p:cNvSpPr>
-            <a:spLocks noGrp="1"/>
-          </p:cNvSpPr>
-          <p:nvPr>
-            <p:ph idx="1"/>
-          </p:nvPr>
-        </p:nvSpPr>
-        <p:spPr/>
-        <p:txBody>
-          <a:bodyPr/>
-          <a:lstStyle/>
-          <a:p>
-            <a:r>
-              <a:rPr lang="ko-KR" altLang="en-US" b="1" dirty="0"/>
-              <a:t>🔹 </a:t>
-            </a:r>
-            <a:r>
-              <a:rPr lang="en-US" altLang="ko-KR" b="1" dirty="0"/>
-              <a:t>3. </a:t>
-            </a:r>
-            <a:r>
-              <a:rPr lang="ko-KR" altLang="en-US" b="1" dirty="0"/>
-              <a:t>시스템 파이썬 보호</a:t>
-            </a:r>
-          </a:p>
-          <a:p>
-            <a:r>
-              <a:rPr lang="ko-KR" altLang="en-US" dirty="0"/>
-              <a:t>가상환경 없이 설치하면</a:t>
-            </a:r>
-            <a:r>
-              <a:rPr lang="en-US" altLang="ko-KR" dirty="0"/>
-              <a:t>:</a:t>
-            </a:r>
-          </a:p>
-          <a:p>
-            <a:r>
-              <a:rPr lang="en-US" altLang="ko-KR" dirty="0"/>
-              <a:t>pip install </a:t>
-            </a:r>
-            <a:r>
-              <a:rPr lang="en-US" altLang="ko-KR" dirty="0" err="1"/>
-              <a:t>scipy</a:t>
-            </a:r>
-            <a:endParaRPr lang="en-US" altLang="ko-KR" dirty="0"/>
-          </a:p>
-          <a:p>
-            <a:r>
-              <a:rPr lang="ko-KR" altLang="en-US" dirty="0"/>
-              <a:t>➡️ </a:t>
-            </a:r>
-            <a:r>
-              <a:rPr lang="en-US" altLang="ko-KR" dirty="0"/>
-              <a:t>OS</a:t>
-            </a:r>
-            <a:r>
-              <a:rPr lang="ko-KR" altLang="en-US" dirty="0"/>
-              <a:t>가 쓰는 </a:t>
-            </a:r>
-            <a:r>
-              <a:rPr lang="en-US" altLang="ko-KR" dirty="0"/>
-              <a:t>Python </a:t>
-            </a:r>
-            <a:r>
-              <a:rPr lang="ko-KR" altLang="en-US" dirty="0"/>
-              <a:t>라이브러리를 덮어씀</a:t>
-            </a:r>
-            <a:br>
-              <a:rPr lang="ko-KR" altLang="en-US" dirty="0"/>
-            </a:br>
-            <a:r>
-              <a:rPr lang="ko-KR" altLang="en-US" dirty="0"/>
-              <a:t>➡️ 최악의 경우 </a:t>
-            </a:r>
-            <a:r>
-              <a:rPr lang="en-US" altLang="ko-KR" b="1" dirty="0"/>
-              <a:t>Python </a:t>
-            </a:r>
-            <a:r>
-              <a:rPr lang="ko-KR" altLang="en-US" b="1" dirty="0"/>
-              <a:t>자체가 고장</a:t>
-            </a:r>
-            <a:endParaRPr lang="ko-KR" altLang="en-US" dirty="0"/>
-          </a:p>
-          <a:p>
-            <a:r>
-              <a:rPr lang="ko-KR" altLang="en-US" dirty="0"/>
-              <a:t>가상환경은</a:t>
-            </a:r>
-            <a:r>
-              <a:rPr lang="en-US" altLang="ko-KR" dirty="0"/>
-              <a:t>:</a:t>
-            </a:r>
-          </a:p>
-          <a:p>
-            <a:r>
-              <a:rPr lang="ko-KR" altLang="en-US" dirty="0"/>
-              <a:t>시스템 </a:t>
-            </a:r>
-            <a:r>
-              <a:rPr lang="en-US" altLang="ko-KR" dirty="0"/>
-              <a:t>Python ❌ </a:t>
-            </a:r>
-            <a:r>
-              <a:rPr lang="ko-KR" altLang="en-US" dirty="0"/>
-              <a:t>건드리지 않음</a:t>
-            </a:r>
-          </a:p>
-          <a:p>
-            <a:endParaRPr lang="ko-KR" altLang="en-US" dirty="0"/>
-          </a:p>
-        </p:txBody>
-      </p:sp>
-    </p:spTree>
-    <p:extLst>
-      <p:ext uri="{BB962C8B-B14F-4D97-AF65-F5344CB8AC3E}">
-        <p14:creationId xmlns:p14="http://schemas.microsoft.com/office/powerpoint/2010/main" val="3333474430"/>
-      </p:ext>
-    </p:extLst>
-  </p:cSld>
-  <p:clrMapOvr>
-    <a:masterClrMapping/>
-  </p:clrMapOvr>
-</p:sld>
-</file>
-
-<file path=ppt/slides/slide28.xml><?xml version="1.0" encoding="utf-8"?>
-<p:sld xmlns:a="http://schemas.openxmlformats.org/drawingml/2006/main" xmlns:r="http://schemas.openxmlformats.org/officeDocument/2006/relationships" xmlns:p="http://schemas.openxmlformats.org/presentationml/2006/main">
-  <p:cSld>
-    <p:spTree>
-      <p:nvGrpSpPr>
-        <p:cNvPr id="1" name=""/>
-        <p:cNvGrpSpPr/>
-        <p:nvPr/>
-      </p:nvGrpSpPr>
-      <p:grpSpPr>
-        <a:xfrm>
-          <a:off x="0" y="0"/>
-          <a:ext cx="0" cy="0"/>
-          <a:chOff x="0" y="0"/>
-          <a:chExt cx="0" cy="0"/>
-        </a:xfrm>
-      </p:grpSpPr>
-      <p:sp>
-        <p:nvSpPr>
-          <p:cNvPr id="2" name="제목 1">
-            <a:extLst>
-              <a:ext uri="{FF2B5EF4-FFF2-40B4-BE49-F238E27FC236}">
-                <a16:creationId xmlns:a16="http://schemas.microsoft.com/office/drawing/2014/main" id="{2B0EC50B-5BE6-F786-65D4-8624A8A5BFDD}"/>
-              </a:ext>
-            </a:extLst>
-          </p:cNvPr>
-          <p:cNvSpPr>
-            <a:spLocks noGrp="1"/>
-          </p:cNvSpPr>
-          <p:nvPr>
-            <p:ph type="title"/>
-          </p:nvPr>
-        </p:nvSpPr>
-        <p:spPr/>
-        <p:txBody>
-          <a:bodyPr/>
-          <a:lstStyle/>
-          <a:p>
-            <a:r>
-              <a:rPr lang="ko-KR" altLang="en-US" dirty="0"/>
-              <a:t>가상환경 코드</a:t>
-            </a:r>
-          </a:p>
-        </p:txBody>
-      </p:sp>
-      <p:sp>
-        <p:nvSpPr>
-          <p:cNvPr id="3" name="내용 개체 틀 2">
-            <a:extLst>
-              <a:ext uri="{FF2B5EF4-FFF2-40B4-BE49-F238E27FC236}">
-                <a16:creationId xmlns:a16="http://schemas.microsoft.com/office/drawing/2014/main" id="{CB0B2737-AAD8-44B9-ED0D-9E60B8719223}"/>
-              </a:ext>
-            </a:extLst>
-          </p:cNvPr>
-          <p:cNvSpPr>
-            <a:spLocks noGrp="1"/>
-          </p:cNvSpPr>
-          <p:nvPr>
-            <p:ph idx="1"/>
-          </p:nvPr>
-        </p:nvSpPr>
-        <p:spPr/>
-        <p:txBody>
-          <a:bodyPr>
-            <a:normAutofit fontScale="85000" lnSpcReduction="20000"/>
-          </a:bodyPr>
-          <a:lstStyle/>
-          <a:p>
-            <a:r>
-              <a:rPr lang="ko-KR" altLang="en-US" dirty="0"/>
-              <a:t>새 위치로 이동</a:t>
-            </a:r>
-            <a:endParaRPr lang="en-US" altLang="ko-KR" dirty="0"/>
-          </a:p>
-          <a:p>
-            <a:r>
-              <a:rPr lang="ko-KR" altLang="en-US" dirty="0"/>
-              <a:t>기존 가상환경 삭제</a:t>
-            </a:r>
-            <a:endParaRPr lang="en-US" altLang="ko-KR" dirty="0"/>
-          </a:p>
-          <a:p>
-            <a:r>
-              <a:rPr lang="en-US" altLang="ko-KR" dirty="0" err="1"/>
-              <a:t>rmdir</a:t>
-            </a:r>
-            <a:r>
-              <a:rPr lang="en-US" altLang="ko-KR" dirty="0"/>
-              <a:t> /s /q .</a:t>
-            </a:r>
-            <a:r>
-              <a:rPr lang="en-US" altLang="ko-KR" dirty="0" err="1"/>
-              <a:t>venv</a:t>
-            </a:r>
-            <a:endParaRPr lang="en-US" altLang="ko-KR" dirty="0"/>
-          </a:p>
-          <a:p>
-            <a:r>
-              <a:rPr lang="ko-KR" altLang="en-US" dirty="0"/>
-              <a:t>새로운 가상환경 생성</a:t>
-            </a:r>
-            <a:endParaRPr lang="en-US" altLang="ko-KR" dirty="0"/>
-          </a:p>
-          <a:p>
-            <a:r>
-              <a:rPr lang="en-US" altLang="ko-KR" dirty="0"/>
-              <a:t>python -m </a:t>
-            </a:r>
-            <a:r>
-              <a:rPr lang="en-US" altLang="ko-KR" dirty="0" err="1"/>
-              <a:t>venv</a:t>
-            </a:r>
-            <a:r>
-              <a:rPr lang="en-US" altLang="ko-KR" dirty="0"/>
-              <a:t> .</a:t>
-            </a:r>
-            <a:r>
-              <a:rPr lang="en-US" altLang="ko-KR" dirty="0" err="1"/>
-              <a:t>venv</a:t>
-            </a:r>
-            <a:endParaRPr lang="en-US" altLang="ko-KR" dirty="0"/>
-          </a:p>
-          <a:p>
-            <a:r>
-              <a:rPr lang="ko-KR" altLang="en-US" dirty="0"/>
-              <a:t>활성화</a:t>
-            </a:r>
-            <a:endParaRPr lang="en-US" altLang="ko-KR" dirty="0"/>
-          </a:p>
-          <a:p>
-            <a:r>
-              <a:rPr lang="en-US" altLang="ko-KR" dirty="0"/>
-              <a:t>source .</a:t>
-            </a:r>
-            <a:r>
-              <a:rPr lang="en-US" altLang="ko-KR" dirty="0" err="1"/>
-              <a:t>venv</a:t>
-            </a:r>
-            <a:r>
-              <a:rPr lang="en-US" altLang="ko-KR" dirty="0"/>
-              <a:t>/bin/activate</a:t>
-            </a:r>
-          </a:p>
-          <a:p>
-            <a:r>
-              <a:rPr lang="ko-KR" altLang="en-US" dirty="0"/>
-              <a:t>패키지 재설치</a:t>
-            </a:r>
-            <a:endParaRPr lang="en-US" altLang="ko-KR" dirty="0"/>
-          </a:p>
-          <a:p>
-            <a:r>
-              <a:rPr lang="en-US" altLang="ko-KR" dirty="0"/>
-              <a:t>pip install --upgrade pip</a:t>
-            </a:r>
-          </a:p>
-          <a:p>
-            <a:r>
-              <a:rPr lang="en-US" altLang="ko-KR" dirty="0"/>
-              <a:t>pip install -r requirements.txt</a:t>
-            </a:r>
-          </a:p>
-          <a:p>
-            <a:r>
-              <a:rPr lang="en-US" altLang="ko-KR" dirty="0"/>
-              <a:t>pip install </a:t>
-            </a:r>
-            <a:r>
-              <a:rPr lang="en-US" altLang="ko-KR" dirty="0" err="1"/>
-              <a:t>yfinance</a:t>
-            </a:r>
-            <a:endParaRPr lang="ko-KR" altLang="en-US" dirty="0"/>
-          </a:p>
-        </p:txBody>
-      </p:sp>
-    </p:spTree>
-    <p:extLst>
-      <p:ext uri="{BB962C8B-B14F-4D97-AF65-F5344CB8AC3E}">
-        <p14:creationId xmlns:p14="http://schemas.microsoft.com/office/powerpoint/2010/main" val="3079119012"/>
-      </p:ext>
-    </p:extLst>
-  </p:cSld>
-  <p:clrMapOvr>
-    <a:masterClrMapping/>
-  </p:clrMapOvr>
-</p:sld>
-</file>
-
-<file path=ppt/slides/slide29.xml><?xml version="1.0" encoding="utf-8"?>
+<file path=ppt/slides/slide30.xml><?xml version="1.0" encoding="utf-8"?>
 <p:sld xmlns:a="http://schemas.openxmlformats.org/drawingml/2006/main" xmlns:r="http://schemas.openxmlformats.org/officeDocument/2006/relationships" xmlns:p="http://schemas.openxmlformats.org/presentationml/2006/main">
   <p:cSld>
     <p:spTree>
@@ -9303,173 +9740,7 @@
 </p:sld>
 </file>
 
-<file path=ppt/slides/slide3.xml><?xml version="1.0" encoding="utf-8"?>
-<p:sld xmlns:a="http://schemas.openxmlformats.org/drawingml/2006/main" xmlns:r="http://schemas.openxmlformats.org/officeDocument/2006/relationships" xmlns:p="http://schemas.openxmlformats.org/presentationml/2006/main">
-  <p:cSld>
-    <p:spTree>
-      <p:nvGrpSpPr>
-        <p:cNvPr id="1" name=""/>
-        <p:cNvGrpSpPr/>
-        <p:nvPr/>
-      </p:nvGrpSpPr>
-      <p:grpSpPr>
-        <a:xfrm>
-          <a:off x="0" y="0"/>
-          <a:ext cx="0" cy="0"/>
-          <a:chOff x="0" y="0"/>
-          <a:chExt cx="0" cy="0"/>
-        </a:xfrm>
-      </p:grpSpPr>
-      <p:sp>
-        <p:nvSpPr>
-          <p:cNvPr id="2" name="제목 1">
-            <a:extLst>
-              <a:ext uri="{FF2B5EF4-FFF2-40B4-BE49-F238E27FC236}">
-                <a16:creationId xmlns:a16="http://schemas.microsoft.com/office/drawing/2014/main" id="{094FC460-DBBA-47E0-2D2B-0F433EB386D7}"/>
-              </a:ext>
-            </a:extLst>
-          </p:cNvPr>
-          <p:cNvSpPr>
-            <a:spLocks noGrp="1"/>
-          </p:cNvSpPr>
-          <p:nvPr>
-            <p:ph type="title"/>
-          </p:nvPr>
-        </p:nvSpPr>
-        <p:spPr/>
-        <p:txBody>
-          <a:bodyPr/>
-          <a:lstStyle/>
-          <a:p>
-            <a:r>
-              <a:rPr lang="ko-KR" altLang="en-US" dirty="0"/>
-              <a:t>백테스트에서 반드시 보는 </a:t>
-            </a:r>
-            <a:r>
-              <a:rPr lang="en-US" altLang="ko-KR" dirty="0"/>
-              <a:t>3</a:t>
-            </a:r>
-            <a:r>
-              <a:rPr lang="ko-KR" altLang="en-US" dirty="0"/>
-              <a:t>가지</a:t>
-            </a:r>
-          </a:p>
-        </p:txBody>
-      </p:sp>
-      <p:sp>
-        <p:nvSpPr>
-          <p:cNvPr id="3" name="내용 개체 틀 2">
-            <a:extLst>
-              <a:ext uri="{FF2B5EF4-FFF2-40B4-BE49-F238E27FC236}">
-                <a16:creationId xmlns:a16="http://schemas.microsoft.com/office/drawing/2014/main" id="{D7F20071-0DEC-4109-AE56-F8CC69DD2BA8}"/>
-              </a:ext>
-            </a:extLst>
-          </p:cNvPr>
-          <p:cNvSpPr>
-            <a:spLocks noGrp="1"/>
-          </p:cNvSpPr>
-          <p:nvPr>
-            <p:ph idx="1"/>
-          </p:nvPr>
-        </p:nvSpPr>
-        <p:spPr/>
-        <p:txBody>
-          <a:bodyPr/>
-          <a:lstStyle/>
-          <a:p>
-            <a:r>
-              <a:rPr lang="en-US" altLang="ko-KR" b="1" dirty="0"/>
-              <a:t>1️⃣ </a:t>
-            </a:r>
-            <a:r>
-              <a:rPr lang="ko-KR" altLang="en-US" b="1" dirty="0"/>
-              <a:t>수익률</a:t>
-            </a:r>
-          </a:p>
-          <a:p>
-            <a:r>
-              <a:rPr lang="en-US" altLang="ko-KR" dirty="0"/>
-              <a:t>cum_2x.iloc[-1] - 1</a:t>
-            </a:r>
-          </a:p>
-          <a:p>
-            <a:r>
-              <a:rPr lang="en-US" altLang="ko-KR" b="1" dirty="0"/>
-              <a:t>2️⃣ </a:t>
-            </a:r>
-            <a:r>
-              <a:rPr lang="ko-KR" altLang="en-US" b="1" dirty="0"/>
-              <a:t>변동성 </a:t>
-            </a:r>
-            <a:r>
-              <a:rPr lang="en-US" altLang="ko-KR" b="1" dirty="0"/>
-              <a:t>(</a:t>
-            </a:r>
-            <a:r>
-              <a:rPr lang="ko-KR" altLang="en-US" b="1" dirty="0"/>
-              <a:t>얼마나 흔들렸는지</a:t>
-            </a:r>
-            <a:r>
-              <a:rPr lang="en-US" altLang="ko-KR" b="1" dirty="0"/>
-              <a:t>)</a:t>
-            </a:r>
-          </a:p>
-          <a:p>
-            <a:r>
-              <a:rPr lang="en-US" altLang="ko-KR" dirty="0" err="1"/>
-              <a:t>returns.std</a:t>
-            </a:r>
-            <a:r>
-              <a:rPr lang="en-US" altLang="ko-KR" dirty="0"/>
-              <a:t>()</a:t>
-            </a:r>
-          </a:p>
-          <a:p>
-            <a:r>
-              <a:rPr lang="en-US" altLang="ko-KR" b="1" dirty="0"/>
-              <a:t>3️⃣ </a:t>
-            </a:r>
-            <a:r>
-              <a:rPr lang="ko-KR" altLang="en-US" b="1" dirty="0"/>
-              <a:t>최대 낙폭 </a:t>
-            </a:r>
-            <a:r>
-              <a:rPr lang="en-US" altLang="ko-KR" b="1" dirty="0"/>
-              <a:t>(MDD)</a:t>
-            </a:r>
-          </a:p>
-          <a:p>
-            <a:r>
-              <a:rPr lang="ko-KR" altLang="en-US" dirty="0"/>
-              <a:t>“중간에 얼마나 크게 빠졌는지”</a:t>
-            </a:r>
-            <a:endParaRPr lang="en-US" altLang="ko-KR" dirty="0"/>
-          </a:p>
-          <a:p>
-            <a:r>
-              <a:rPr lang="ko-KR" altLang="en-US" dirty="0"/>
-              <a:t>✔ “이 전략의 구조적 특성은 이렇다”</a:t>
-            </a:r>
-          </a:p>
-          <a:p>
-            <a:endParaRPr lang="ko-KR" altLang="en-US" dirty="0"/>
-          </a:p>
-        </p:txBody>
-      </p:sp>
-    </p:spTree>
-    <p:extLst>
-      <p:ext uri="{BB962C8B-B14F-4D97-AF65-F5344CB8AC3E}">
-        <p14:creationId xmlns:p14="http://schemas.microsoft.com/office/powerpoint/2010/main" val="1283701118"/>
-      </p:ext>
-    </p:extLst>
-  </p:cSld>
-  <p:clrMapOvr>
-    <a:masterClrMapping/>
-  </p:clrMapOvr>
-</p:sld>
-</file>
-
-<file path=ppt/slides/slide30.xml><?xml version="1.0" encoding="utf-8"?>
+<file path=ppt/slides/slide31.xml><?xml version="1.0" encoding="utf-8"?>
 <p:sld xmlns:a="http://schemas.openxmlformats.org/drawingml/2006/main" xmlns:r="http://schemas.openxmlformats.org/officeDocument/2006/relationships" xmlns:p="http://schemas.openxmlformats.org/presentationml/2006/main">
   <p:cSld>
     <p:spTree>
@@ -9797,23 +10068,19 @@
             </a:r>
             <a:r>
               <a:rPr lang="ko-KR" altLang="en-US" dirty="0"/>
-              <a:t>에 아무 코드도 안 </a:t>
-            </a:r>
-            <a:r>
-              <a:rPr lang="ko-KR" altLang="en-US"/>
-              <a:t>써도</a:t>
-            </a:r>
-            <a:r>
-              <a:rPr lang="en-US" altLang="ko-KR"/>
+              <a:t>에 아무 코드도 안 써도</a:t>
+            </a:r>
+            <a:r>
+              <a:rPr lang="en-US" altLang="ko-KR" dirty="0"/>
               <a:t>, </a:t>
             </a:r>
             <a:r>
-              <a:rPr lang="ko-KR" altLang="en-US"/>
-              <a:t>파이썬은 </a:t>
-            </a:r>
-            <a:r>
-              <a:rPr lang="ko-KR" altLang="en-US" dirty="0"/>
-              <a:t>이렇게 생각해</a:t>
+              <a:rPr lang="ko-KR" altLang="en-US" dirty="0" err="1"/>
+              <a:t>파이썬은</a:t>
+            </a:r>
+            <a:r>
+              <a:rPr lang="ko-KR" altLang="en-US" dirty="0"/>
+              <a:t> 이렇게 생각해</a:t>
             </a:r>
             <a:r>
               <a:rPr lang="en-US" altLang="ko-KR" dirty="0"/>
@@ -9865,6 +10132,172 @@
 </file>
 
 <file path=ppt/slides/slide4.xml><?xml version="1.0" encoding="utf-8"?>
+<p:sld xmlns:a="http://schemas.openxmlformats.org/drawingml/2006/main" xmlns:r="http://schemas.openxmlformats.org/officeDocument/2006/relationships" xmlns:p="http://schemas.openxmlformats.org/presentationml/2006/main">
+  <p:cSld>
+    <p:spTree>
+      <p:nvGrpSpPr>
+        <p:cNvPr id="1" name=""/>
+        <p:cNvGrpSpPr/>
+        <p:nvPr/>
+      </p:nvGrpSpPr>
+      <p:grpSpPr>
+        <a:xfrm>
+          <a:off x="0" y="0"/>
+          <a:ext cx="0" cy="0"/>
+          <a:chOff x="0" y="0"/>
+          <a:chExt cx="0" cy="0"/>
+        </a:xfrm>
+      </p:grpSpPr>
+      <p:sp>
+        <p:nvSpPr>
+          <p:cNvPr id="2" name="제목 1">
+            <a:extLst>
+              <a:ext uri="{FF2B5EF4-FFF2-40B4-BE49-F238E27FC236}">
+                <a16:creationId xmlns:a16="http://schemas.microsoft.com/office/drawing/2014/main" id="{094FC460-DBBA-47E0-2D2B-0F433EB386D7}"/>
+              </a:ext>
+            </a:extLst>
+          </p:cNvPr>
+          <p:cNvSpPr>
+            <a:spLocks noGrp="1"/>
+          </p:cNvSpPr>
+          <p:nvPr>
+            <p:ph type="title"/>
+          </p:nvPr>
+        </p:nvSpPr>
+        <p:spPr/>
+        <p:txBody>
+          <a:bodyPr/>
+          <a:lstStyle/>
+          <a:p>
+            <a:r>
+              <a:rPr lang="ko-KR" altLang="en-US" dirty="0"/>
+              <a:t>백테스트에서 반드시 보는 </a:t>
+            </a:r>
+            <a:r>
+              <a:rPr lang="en-US" altLang="ko-KR" dirty="0"/>
+              <a:t>3</a:t>
+            </a:r>
+            <a:r>
+              <a:rPr lang="ko-KR" altLang="en-US" dirty="0"/>
+              <a:t>가지</a:t>
+            </a:r>
+          </a:p>
+        </p:txBody>
+      </p:sp>
+      <p:sp>
+        <p:nvSpPr>
+          <p:cNvPr id="3" name="내용 개체 틀 2">
+            <a:extLst>
+              <a:ext uri="{FF2B5EF4-FFF2-40B4-BE49-F238E27FC236}">
+                <a16:creationId xmlns:a16="http://schemas.microsoft.com/office/drawing/2014/main" id="{D7F20071-0DEC-4109-AE56-F8CC69DD2BA8}"/>
+              </a:ext>
+            </a:extLst>
+          </p:cNvPr>
+          <p:cNvSpPr>
+            <a:spLocks noGrp="1"/>
+          </p:cNvSpPr>
+          <p:nvPr>
+            <p:ph idx="1"/>
+          </p:nvPr>
+        </p:nvSpPr>
+        <p:spPr/>
+        <p:txBody>
+          <a:bodyPr/>
+          <a:lstStyle/>
+          <a:p>
+            <a:r>
+              <a:rPr lang="en-US" altLang="ko-KR" b="1" dirty="0"/>
+              <a:t>1️⃣ </a:t>
+            </a:r>
+            <a:r>
+              <a:rPr lang="ko-KR" altLang="en-US" b="1" dirty="0"/>
+              <a:t>수익률</a:t>
+            </a:r>
+          </a:p>
+          <a:p>
+            <a:r>
+              <a:rPr lang="en-US" altLang="ko-KR" dirty="0"/>
+              <a:t>cum_2x.iloc[-1] - 1</a:t>
+            </a:r>
+          </a:p>
+          <a:p>
+            <a:r>
+              <a:rPr lang="en-US" altLang="ko-KR" b="1" dirty="0"/>
+              <a:t>2️⃣ </a:t>
+            </a:r>
+            <a:r>
+              <a:rPr lang="ko-KR" altLang="en-US" b="1" dirty="0"/>
+              <a:t>변동성 </a:t>
+            </a:r>
+            <a:r>
+              <a:rPr lang="en-US" altLang="ko-KR" b="1" dirty="0"/>
+              <a:t>(</a:t>
+            </a:r>
+            <a:r>
+              <a:rPr lang="ko-KR" altLang="en-US" b="1" dirty="0"/>
+              <a:t>얼마나 흔들렸는지</a:t>
+            </a:r>
+            <a:r>
+              <a:rPr lang="en-US" altLang="ko-KR" b="1" dirty="0"/>
+              <a:t>)</a:t>
+            </a:r>
+          </a:p>
+          <a:p>
+            <a:r>
+              <a:rPr lang="en-US" altLang="ko-KR" dirty="0" err="1"/>
+              <a:t>returns.std</a:t>
+            </a:r>
+            <a:r>
+              <a:rPr lang="en-US" altLang="ko-KR" dirty="0"/>
+              <a:t>()</a:t>
+            </a:r>
+          </a:p>
+          <a:p>
+            <a:r>
+              <a:rPr lang="en-US" altLang="ko-KR" b="1" dirty="0"/>
+              <a:t>3️⃣ </a:t>
+            </a:r>
+            <a:r>
+              <a:rPr lang="ko-KR" altLang="en-US" b="1" dirty="0"/>
+              <a:t>최대 낙폭 </a:t>
+            </a:r>
+            <a:r>
+              <a:rPr lang="en-US" altLang="ko-KR" b="1" dirty="0"/>
+              <a:t>(MDD)</a:t>
+            </a:r>
+          </a:p>
+          <a:p>
+            <a:r>
+              <a:rPr lang="ko-KR" altLang="en-US" dirty="0"/>
+              <a:t>“중간에 얼마나 크게 빠졌는지”</a:t>
+            </a:r>
+            <a:endParaRPr lang="en-US" altLang="ko-KR" dirty="0"/>
+          </a:p>
+          <a:p>
+            <a:r>
+              <a:rPr lang="ko-KR" altLang="en-US" dirty="0"/>
+              <a:t>✔ “이 전략의 구조적 특성은 이렇다”</a:t>
+            </a:r>
+          </a:p>
+          <a:p>
+            <a:endParaRPr lang="ko-KR" altLang="en-US" dirty="0"/>
+          </a:p>
+        </p:txBody>
+      </p:sp>
+    </p:spTree>
+    <p:extLst>
+      <p:ext uri="{BB962C8B-B14F-4D97-AF65-F5344CB8AC3E}">
+        <p14:creationId xmlns:p14="http://schemas.microsoft.com/office/powerpoint/2010/main" val="1283701118"/>
+      </p:ext>
+    </p:extLst>
+  </p:cSld>
+  <p:clrMapOvr>
+    <a:masterClrMapping/>
+  </p:clrMapOvr>
+</p:sld>
+</file>
+
+<file path=ppt/slides/slide5.xml><?xml version="1.0" encoding="utf-8"?>
 <p:sld xmlns:a="http://schemas.openxmlformats.org/drawingml/2006/main" xmlns:r="http://schemas.openxmlformats.org/officeDocument/2006/relationships" xmlns:p="http://schemas.openxmlformats.org/presentationml/2006/main">
   <p:cSld>
     <p:spTree>
@@ -10239,174 +10672,6 @@
 </p:sld>
 </file>
 
-<file path=ppt/slides/slide5.xml><?xml version="1.0" encoding="utf-8"?>
-<p:sld xmlns:a="http://schemas.openxmlformats.org/drawingml/2006/main" xmlns:r="http://schemas.openxmlformats.org/officeDocument/2006/relationships" xmlns:p="http://schemas.openxmlformats.org/presentationml/2006/main">
-  <p:cSld>
-    <p:spTree>
-      <p:nvGrpSpPr>
-        <p:cNvPr id="1" name=""/>
-        <p:cNvGrpSpPr/>
-        <p:nvPr/>
-      </p:nvGrpSpPr>
-      <p:grpSpPr>
-        <a:xfrm>
-          <a:off x="0" y="0"/>
-          <a:ext cx="0" cy="0"/>
-          <a:chOff x="0" y="0"/>
-          <a:chExt cx="0" cy="0"/>
-        </a:xfrm>
-      </p:grpSpPr>
-      <p:sp>
-        <p:nvSpPr>
-          <p:cNvPr id="2" name="제목 1">
-            <a:extLst>
-              <a:ext uri="{FF2B5EF4-FFF2-40B4-BE49-F238E27FC236}">
-                <a16:creationId xmlns:a16="http://schemas.microsoft.com/office/drawing/2014/main" id="{5310917A-CCA7-4B65-7FD0-260983336BEF}"/>
-              </a:ext>
-            </a:extLst>
-          </p:cNvPr>
-          <p:cNvSpPr>
-            <a:spLocks noGrp="1"/>
-          </p:cNvSpPr>
-          <p:nvPr>
-            <p:ph type="title"/>
-          </p:nvPr>
-        </p:nvSpPr>
-        <p:spPr/>
-        <p:txBody>
-          <a:bodyPr/>
-          <a:lstStyle/>
-          <a:p>
-            <a:endParaRPr lang="ko-KR" altLang="en-US"/>
-          </a:p>
-        </p:txBody>
-      </p:sp>
-      <p:sp>
-        <p:nvSpPr>
-          <p:cNvPr id="3" name="내용 개체 틀 2">
-            <a:extLst>
-              <a:ext uri="{FF2B5EF4-FFF2-40B4-BE49-F238E27FC236}">
-                <a16:creationId xmlns:a16="http://schemas.microsoft.com/office/drawing/2014/main" id="{8D1DD6C8-AED2-96DF-67F7-9179D5AA44FE}"/>
-              </a:ext>
-            </a:extLst>
-          </p:cNvPr>
-          <p:cNvSpPr>
-            <a:spLocks noGrp="1"/>
-          </p:cNvSpPr>
-          <p:nvPr>
-            <p:ph idx="1"/>
-          </p:nvPr>
-        </p:nvSpPr>
-        <p:spPr/>
-        <p:txBody>
-          <a:bodyPr>
-            <a:normAutofit fontScale="77500" lnSpcReduction="20000"/>
-          </a:bodyPr>
-          <a:lstStyle/>
-          <a:p>
-            <a:r>
-              <a:rPr lang="en-US" altLang="ko-KR" dirty="0"/>
-              <a:t>leveraged-</a:t>
-            </a:r>
-            <a:r>
-              <a:rPr lang="en-US" altLang="ko-KR" dirty="0" err="1"/>
-              <a:t>etf</a:t>
-            </a:r>
-            <a:r>
-              <a:rPr lang="en-US" altLang="ko-KR" dirty="0"/>
-              <a:t>-simulator/</a:t>
-            </a:r>
-          </a:p>
-          <a:p>
-            <a:r>
-              <a:rPr lang="en-US" altLang="ko-KR" dirty="0"/>
-              <a:t>  README.md</a:t>
-            </a:r>
-          </a:p>
-          <a:p>
-            <a:r>
-              <a:rPr lang="en-US" altLang="ko-KR" dirty="0"/>
-              <a:t>  requirements.txt</a:t>
-            </a:r>
-          </a:p>
-          <a:p>
-            <a:r>
-              <a:rPr lang="en-US" altLang="ko-KR" dirty="0"/>
-              <a:t>  data/</a:t>
-            </a:r>
-          </a:p>
-          <a:p>
-            <a:r>
-              <a:rPr lang="en-US" altLang="ko-KR" dirty="0"/>
-              <a:t>  </a:t>
-            </a:r>
-            <a:r>
-              <a:rPr lang="en-US" altLang="ko-KR" dirty="0" err="1"/>
-              <a:t>src</a:t>
-            </a:r>
-            <a:r>
-              <a:rPr lang="en-US" altLang="ko-KR" dirty="0"/>
-              <a:t>/</a:t>
-            </a:r>
-          </a:p>
-          <a:p>
-            <a:r>
-              <a:rPr lang="en-US" altLang="ko-KR" dirty="0"/>
-              <a:t>    fetch_data.py</a:t>
-            </a:r>
-          </a:p>
-          <a:p>
-            <a:r>
-              <a:rPr lang="en-US" altLang="ko-KR" dirty="0"/>
-              <a:t>    simulate.py</a:t>
-            </a:r>
-          </a:p>
-          <a:p>
-            <a:r>
-              <a:rPr lang="en-US" altLang="ko-KR" dirty="0"/>
-              <a:t>    metrics.py</a:t>
-            </a:r>
-          </a:p>
-          <a:p>
-            <a:r>
-              <a:rPr lang="en-US" altLang="ko-KR" dirty="0"/>
-              <a:t>    regimes.py</a:t>
-            </a:r>
-          </a:p>
-          <a:p>
-            <a:r>
-              <a:rPr lang="en-US" altLang="ko-KR" dirty="0"/>
-              <a:t>    plot.py</a:t>
-            </a:r>
-          </a:p>
-          <a:p>
-            <a:r>
-              <a:rPr lang="en-US" altLang="ko-KR" dirty="0"/>
-              <a:t>  notebooks/</a:t>
-            </a:r>
-          </a:p>
-          <a:p>
-            <a:r>
-              <a:rPr lang="en-US" altLang="ko-KR" dirty="0"/>
-              <a:t>    01_backtest_amd.ipynb</a:t>
-            </a:r>
-            <a:endParaRPr lang="ko-KR" altLang="en-US" dirty="0"/>
-          </a:p>
-        </p:txBody>
-      </p:sp>
-    </p:spTree>
-    <p:extLst>
-      <p:ext uri="{BB962C8B-B14F-4D97-AF65-F5344CB8AC3E}">
-        <p14:creationId xmlns:p14="http://schemas.microsoft.com/office/powerpoint/2010/main" val="1937297407"/>
-      </p:ext>
-    </p:extLst>
-  </p:cSld>
-  <p:clrMapOvr>
-    <a:masterClrMapping/>
-  </p:clrMapOvr>
-</p:sld>
-</file>
-
 <file path=ppt/slides/slide6.xml><?xml version="1.0" encoding="utf-8"?>
 <p:sld xmlns:a="http://schemas.openxmlformats.org/drawingml/2006/main" xmlns:r="http://schemas.openxmlformats.org/officeDocument/2006/relationships" xmlns:p="http://schemas.openxmlformats.org/presentationml/2006/main">
   <p:cSld>
@@ -10429,7 +10694,7 @@
           <p:cNvPr id="2" name="제목 1">
             <a:extLst>
               <a:ext uri="{FF2B5EF4-FFF2-40B4-BE49-F238E27FC236}">
-                <a16:creationId xmlns:a16="http://schemas.microsoft.com/office/drawing/2014/main" id="{A614E6ED-F072-D70D-6D55-DA2744AA58C9}"/>
+                <a16:creationId xmlns:a16="http://schemas.microsoft.com/office/drawing/2014/main" id="{5310917A-CCA7-4B65-7FD0-260983336BEF}"/>
               </a:ext>
             </a:extLst>
           </p:cNvPr>
@@ -10454,7 +10719,7 @@
           <p:cNvPr id="3" name="내용 개체 틀 2">
             <a:extLst>
               <a:ext uri="{FF2B5EF4-FFF2-40B4-BE49-F238E27FC236}">
-                <a16:creationId xmlns:a16="http://schemas.microsoft.com/office/drawing/2014/main" id="{1E508AD8-0CB7-CFCC-9FD4-D673AD7C9754}"/>
+                <a16:creationId xmlns:a16="http://schemas.microsoft.com/office/drawing/2014/main" id="{8D1DD6C8-AED2-96DF-67F7-9179D5AA44FE}"/>
               </a:ext>
             </a:extLst>
           </p:cNvPr>
@@ -10467,78 +10732,97 @@
         </p:nvSpPr>
         <p:spPr/>
         <p:txBody>
-          <a:bodyPr/>
+          <a:bodyPr>
+            <a:normAutofit fontScale="77500" lnSpcReduction="20000"/>
+          </a:bodyPr>
           <a:lstStyle/>
           <a:p>
             <a:r>
-              <a:rPr lang="ko-KR" altLang="en-US" b="1" dirty="0"/>
-              <a:t>레버리지 </a:t>
-            </a:r>
-            <a:r>
-              <a:rPr lang="en-US" altLang="ko-KR" b="1" dirty="0"/>
-              <a:t>ETF </a:t>
-            </a:r>
-            <a:r>
-              <a:rPr lang="ko-KR" altLang="en-US" b="1" dirty="0"/>
-              <a:t>프로젝트에서 </a:t>
-            </a:r>
-            <a:r>
-              <a:rPr lang="en-US" altLang="ko-KR" b="1" dirty="0" err="1"/>
-              <a:t>Jupyter</a:t>
-            </a:r>
-            <a:r>
-              <a:rPr lang="ko-KR" altLang="en-US" b="1" dirty="0"/>
-              <a:t>가 맞는 이유</a:t>
-            </a:r>
-          </a:p>
-          <a:p>
-            <a:r>
-              <a:rPr lang="ko-KR" altLang="en-US" b="1" dirty="0"/>
-              <a:t>이 프로젝트의 본질</a:t>
-            </a:r>
-          </a:p>
-          <a:p>
-            <a:r>
-              <a:rPr lang="ko-KR" altLang="en-US" dirty="0"/>
-              <a:t>수익률 누적이 어떻게 변하는지</a:t>
-            </a:r>
-          </a:p>
-          <a:p>
-            <a:r>
-              <a:rPr lang="ko-KR" altLang="en-US" dirty="0"/>
-              <a:t>변동성에 따라 성과가 왜 깨지는지</a:t>
-            </a:r>
-          </a:p>
-          <a:p>
-            <a:r>
-              <a:rPr lang="ko-KR" altLang="en-US" dirty="0"/>
-              <a:t>특정 구간에서만 성과가 좋아지는 이유</a:t>
-            </a:r>
-          </a:p>
-          <a:p>
-            <a:r>
-              <a:rPr lang="ko-KR" altLang="en-US" dirty="0"/>
-              <a:t>👉 </a:t>
-            </a:r>
-            <a:r>
-              <a:rPr lang="ko-KR" altLang="en-US" b="1" dirty="0"/>
-              <a:t>“관찰 </a:t>
-            </a:r>
-            <a:r>
-              <a:rPr lang="en-US" altLang="ko-KR" b="1" dirty="0"/>
-              <a:t>+ </a:t>
-            </a:r>
-            <a:r>
-              <a:rPr lang="ko-KR" altLang="en-US" b="1" dirty="0" err="1"/>
-              <a:t>실험”이</a:t>
-            </a:r>
-            <a:r>
-              <a:rPr lang="ko-KR" altLang="en-US" b="1" dirty="0"/>
-              <a:t> 핵심</a:t>
-            </a:r>
-            <a:endParaRPr lang="ko-KR" altLang="en-US" dirty="0"/>
-          </a:p>
-          <a:p>
+              <a:rPr lang="en-US" altLang="ko-KR" dirty="0"/>
+              <a:t>leveraged-</a:t>
+            </a:r>
+            <a:r>
+              <a:rPr lang="en-US" altLang="ko-KR" dirty="0" err="1"/>
+              <a:t>etf</a:t>
+            </a:r>
+            <a:r>
+              <a:rPr lang="en-US" altLang="ko-KR" dirty="0"/>
+              <a:t>-simulator/</a:t>
+            </a:r>
+          </a:p>
+          <a:p>
+            <a:r>
+              <a:rPr lang="en-US" altLang="ko-KR" dirty="0"/>
+              <a:t>  README.md</a:t>
+            </a:r>
+          </a:p>
+          <a:p>
+            <a:r>
+              <a:rPr lang="en-US" altLang="ko-KR" dirty="0"/>
+              <a:t>  requirements.txt</a:t>
+            </a:r>
+          </a:p>
+          <a:p>
+            <a:r>
+              <a:rPr lang="en-US" altLang="ko-KR" dirty="0"/>
+              <a:t>  data/</a:t>
+            </a:r>
+          </a:p>
+          <a:p>
+            <a:r>
+              <a:rPr lang="en-US" altLang="ko-KR" dirty="0"/>
+              <a:t>  </a:t>
+            </a:r>
+            <a:r>
+              <a:rPr lang="en-US" altLang="ko-KR" dirty="0" err="1"/>
+              <a:t>src</a:t>
+            </a:r>
+            <a:r>
+              <a:rPr lang="en-US" altLang="ko-KR" dirty="0"/>
+              <a:t>/</a:t>
+            </a:r>
+          </a:p>
+          <a:p>
+            <a:r>
+              <a:rPr lang="en-US" altLang="ko-KR" dirty="0"/>
+              <a:t>    fetch_data.py</a:t>
+            </a:r>
+          </a:p>
+          <a:p>
+            <a:r>
+              <a:rPr lang="en-US" altLang="ko-KR" dirty="0"/>
+              <a:t>    simulate.py</a:t>
+            </a:r>
+          </a:p>
+          <a:p>
+            <a:r>
+              <a:rPr lang="en-US" altLang="ko-KR" dirty="0"/>
+              <a:t>    metrics.py</a:t>
+            </a:r>
+          </a:p>
+          <a:p>
+            <a:r>
+              <a:rPr lang="en-US" altLang="ko-KR" dirty="0"/>
+              <a:t>    regimes.py</a:t>
+            </a:r>
+          </a:p>
+          <a:p>
+            <a:r>
+              <a:rPr lang="en-US" altLang="ko-KR" dirty="0"/>
+              <a:t>    plot.py</a:t>
+            </a:r>
+          </a:p>
+          <a:p>
+            <a:r>
+              <a:rPr lang="en-US" altLang="ko-KR" dirty="0"/>
+              <a:t>  notebooks/</a:t>
+            </a:r>
+          </a:p>
+          <a:p>
+            <a:r>
+              <a:rPr lang="en-US" altLang="ko-KR" dirty="0"/>
+              <a:t>    01_backtest_amd.ipynb</a:t>
+            </a:r>
             <a:endParaRPr lang="ko-KR" altLang="en-US" dirty="0"/>
           </a:p>
         </p:txBody>
@@ -10546,7 +10830,7 @@
     </p:spTree>
     <p:extLst>
       <p:ext uri="{BB962C8B-B14F-4D97-AF65-F5344CB8AC3E}">
-        <p14:creationId xmlns:p14="http://schemas.microsoft.com/office/powerpoint/2010/main" val="3523090705"/>
+        <p14:creationId xmlns:p14="http://schemas.microsoft.com/office/powerpoint/2010/main" val="1937297407"/>
       </p:ext>
     </p:extLst>
   </p:cSld>
@@ -10578,6 +10862,155 @@
           <p:cNvPr id="2" name="제목 1">
             <a:extLst>
               <a:ext uri="{FF2B5EF4-FFF2-40B4-BE49-F238E27FC236}">
+                <a16:creationId xmlns:a16="http://schemas.microsoft.com/office/drawing/2014/main" id="{A614E6ED-F072-D70D-6D55-DA2744AA58C9}"/>
+              </a:ext>
+            </a:extLst>
+          </p:cNvPr>
+          <p:cNvSpPr>
+            <a:spLocks noGrp="1"/>
+          </p:cNvSpPr>
+          <p:nvPr>
+            <p:ph type="title"/>
+          </p:nvPr>
+        </p:nvSpPr>
+        <p:spPr/>
+        <p:txBody>
+          <a:bodyPr/>
+          <a:lstStyle/>
+          <a:p>
+            <a:endParaRPr lang="ko-KR" altLang="en-US"/>
+          </a:p>
+        </p:txBody>
+      </p:sp>
+      <p:sp>
+        <p:nvSpPr>
+          <p:cNvPr id="3" name="내용 개체 틀 2">
+            <a:extLst>
+              <a:ext uri="{FF2B5EF4-FFF2-40B4-BE49-F238E27FC236}">
+                <a16:creationId xmlns:a16="http://schemas.microsoft.com/office/drawing/2014/main" id="{1E508AD8-0CB7-CFCC-9FD4-D673AD7C9754}"/>
+              </a:ext>
+            </a:extLst>
+          </p:cNvPr>
+          <p:cNvSpPr>
+            <a:spLocks noGrp="1"/>
+          </p:cNvSpPr>
+          <p:nvPr>
+            <p:ph idx="1"/>
+          </p:nvPr>
+        </p:nvSpPr>
+        <p:spPr/>
+        <p:txBody>
+          <a:bodyPr/>
+          <a:lstStyle/>
+          <a:p>
+            <a:r>
+              <a:rPr lang="ko-KR" altLang="en-US" b="1" dirty="0"/>
+              <a:t>레버리지 </a:t>
+            </a:r>
+            <a:r>
+              <a:rPr lang="en-US" altLang="ko-KR" b="1" dirty="0"/>
+              <a:t>ETF </a:t>
+            </a:r>
+            <a:r>
+              <a:rPr lang="ko-KR" altLang="en-US" b="1" dirty="0"/>
+              <a:t>프로젝트에서 </a:t>
+            </a:r>
+            <a:r>
+              <a:rPr lang="en-US" altLang="ko-KR" b="1" dirty="0" err="1"/>
+              <a:t>Jupyter</a:t>
+            </a:r>
+            <a:r>
+              <a:rPr lang="ko-KR" altLang="en-US" b="1" dirty="0"/>
+              <a:t>가 맞는 이유</a:t>
+            </a:r>
+          </a:p>
+          <a:p>
+            <a:r>
+              <a:rPr lang="ko-KR" altLang="en-US" b="1" dirty="0"/>
+              <a:t>이 프로젝트의 본질</a:t>
+            </a:r>
+          </a:p>
+          <a:p>
+            <a:r>
+              <a:rPr lang="ko-KR" altLang="en-US" dirty="0"/>
+              <a:t>수익률 누적이 어떻게 변하는지</a:t>
+            </a:r>
+          </a:p>
+          <a:p>
+            <a:r>
+              <a:rPr lang="ko-KR" altLang="en-US" dirty="0"/>
+              <a:t>변동성에 따라 성과가 왜 깨지는지</a:t>
+            </a:r>
+          </a:p>
+          <a:p>
+            <a:r>
+              <a:rPr lang="ko-KR" altLang="en-US" dirty="0"/>
+              <a:t>특정 구간에서만 성과가 좋아지는 이유</a:t>
+            </a:r>
+          </a:p>
+          <a:p>
+            <a:r>
+              <a:rPr lang="ko-KR" altLang="en-US" dirty="0"/>
+              <a:t>👉 </a:t>
+            </a:r>
+            <a:r>
+              <a:rPr lang="ko-KR" altLang="en-US" b="1" dirty="0"/>
+              <a:t>“관찰 </a:t>
+            </a:r>
+            <a:r>
+              <a:rPr lang="en-US" altLang="ko-KR" b="1" dirty="0"/>
+              <a:t>+ </a:t>
+            </a:r>
+            <a:r>
+              <a:rPr lang="ko-KR" altLang="en-US" b="1" dirty="0" err="1"/>
+              <a:t>실험”이</a:t>
+            </a:r>
+            <a:r>
+              <a:rPr lang="ko-KR" altLang="en-US" b="1" dirty="0"/>
+              <a:t> 핵심</a:t>
+            </a:r>
+            <a:endParaRPr lang="ko-KR" altLang="en-US" dirty="0"/>
+          </a:p>
+          <a:p>
+            <a:endParaRPr lang="ko-KR" altLang="en-US" dirty="0"/>
+          </a:p>
+        </p:txBody>
+      </p:sp>
+    </p:spTree>
+    <p:extLst>
+      <p:ext uri="{BB962C8B-B14F-4D97-AF65-F5344CB8AC3E}">
+        <p14:creationId xmlns:p14="http://schemas.microsoft.com/office/powerpoint/2010/main" val="3523090705"/>
+      </p:ext>
+    </p:extLst>
+  </p:cSld>
+  <p:clrMapOvr>
+    <a:masterClrMapping/>
+  </p:clrMapOvr>
+</p:sld>
+</file>
+
+<file path=ppt/slides/slide8.xml><?xml version="1.0" encoding="utf-8"?>
+<p:sld xmlns:a="http://schemas.openxmlformats.org/drawingml/2006/main" xmlns:r="http://schemas.openxmlformats.org/officeDocument/2006/relationships" xmlns:p="http://schemas.openxmlformats.org/presentationml/2006/main">
+  <p:cSld>
+    <p:spTree>
+      <p:nvGrpSpPr>
+        <p:cNvPr id="1" name=""/>
+        <p:cNvGrpSpPr/>
+        <p:nvPr/>
+      </p:nvGrpSpPr>
+      <p:grpSpPr>
+        <a:xfrm>
+          <a:off x="0" y="0"/>
+          <a:ext cx="0" cy="0"/>
+          <a:chOff x="0" y="0"/>
+          <a:chExt cx="0" cy="0"/>
+        </a:xfrm>
+      </p:grpSpPr>
+      <p:sp>
+        <p:nvSpPr>
+          <p:cNvPr id="2" name="제목 1">
+            <a:extLst>
+              <a:ext uri="{FF2B5EF4-FFF2-40B4-BE49-F238E27FC236}">
                 <a16:creationId xmlns:a16="http://schemas.microsoft.com/office/drawing/2014/main" id="{51B00EA1-74E5-9AE5-50A6-C94729F4B8BB}"/>
               </a:ext>
             </a:extLst>
@@ -10685,7 +11118,7 @@
 </p:sld>
 </file>
 
-<file path=ppt/slides/slide8.xml><?xml version="1.0" encoding="utf-8"?>
+<file path=ppt/slides/slide9.xml><?xml version="1.0" encoding="utf-8"?>
 <p:sld xmlns:a="http://schemas.openxmlformats.org/drawingml/2006/main" xmlns:r="http://schemas.openxmlformats.org/officeDocument/2006/relationships" xmlns:p="http://schemas.openxmlformats.org/presentationml/2006/main">
   <p:cSld>
     <p:spTree>
@@ -11260,246 +11693,6 @@
 </p:sld>
 </file>
 
-<file path=ppt/slides/slide9.xml><?xml version="1.0" encoding="utf-8"?>
-<p:sld xmlns:a="http://schemas.openxmlformats.org/drawingml/2006/main" xmlns:r="http://schemas.openxmlformats.org/officeDocument/2006/relationships" xmlns:p="http://schemas.openxmlformats.org/presentationml/2006/main">
-  <p:cSld>
-    <p:spTree>
-      <p:nvGrpSpPr>
-        <p:cNvPr id="1" name=""/>
-        <p:cNvGrpSpPr/>
-        <p:nvPr/>
-      </p:nvGrpSpPr>
-      <p:grpSpPr>
-        <a:xfrm>
-          <a:off x="0" y="0"/>
-          <a:ext cx="0" cy="0"/>
-          <a:chOff x="0" y="0"/>
-          <a:chExt cx="0" cy="0"/>
-        </a:xfrm>
-      </p:grpSpPr>
-      <p:sp>
-        <p:nvSpPr>
-          <p:cNvPr id="2" name="제목 1">
-            <a:extLst>
-              <a:ext uri="{FF2B5EF4-FFF2-40B4-BE49-F238E27FC236}">
-                <a16:creationId xmlns:a16="http://schemas.microsoft.com/office/drawing/2014/main" id="{FAA32591-77B7-1D02-0E87-ABE712FB0818}"/>
-              </a:ext>
-            </a:extLst>
-          </p:cNvPr>
-          <p:cNvSpPr>
-            <a:spLocks noGrp="1"/>
-          </p:cNvSpPr>
-          <p:nvPr>
-            <p:ph type="title"/>
-          </p:nvPr>
-        </p:nvSpPr>
-        <p:spPr/>
-        <p:txBody>
-          <a:bodyPr/>
-          <a:lstStyle/>
-          <a:p>
-            <a:r>
-              <a:rPr lang="ko-KR" altLang="en-US" dirty="0"/>
-              <a:t>커널</a:t>
-            </a:r>
-          </a:p>
-        </p:txBody>
-      </p:sp>
-      <p:sp>
-        <p:nvSpPr>
-          <p:cNvPr id="3" name="내용 개체 틀 2">
-            <a:extLst>
-              <a:ext uri="{FF2B5EF4-FFF2-40B4-BE49-F238E27FC236}">
-                <a16:creationId xmlns:a16="http://schemas.microsoft.com/office/drawing/2014/main" id="{981679E4-CA5C-F547-5166-1DB506225273}"/>
-              </a:ext>
-            </a:extLst>
-          </p:cNvPr>
-          <p:cNvSpPr>
-            <a:spLocks noGrp="1"/>
-          </p:cNvSpPr>
-          <p:nvPr>
-            <p:ph idx="1"/>
-          </p:nvPr>
-        </p:nvSpPr>
-        <p:spPr/>
-        <p:txBody>
-          <a:bodyPr/>
-          <a:lstStyle/>
-          <a:p>
-            <a:r>
-              <a:rPr lang="ko-KR" altLang="en-US" dirty="0"/>
-              <a:t>코드를 실제로 실행하는 파이썬 프로세스</a:t>
-            </a:r>
-            <a:r>
-              <a:rPr lang="en-US" altLang="ko-KR" dirty="0"/>
-              <a:t>(</a:t>
-            </a:r>
-            <a:r>
-              <a:rPr lang="ko-KR" altLang="en-US" dirty="0"/>
-              <a:t>엔진</a:t>
-            </a:r>
-            <a:r>
-              <a:rPr lang="en-US" altLang="ko-KR" dirty="0"/>
-              <a:t>) = </a:t>
-            </a:r>
-            <a:r>
-              <a:rPr lang="ko-KR" altLang="en-US" dirty="0" err="1"/>
-              <a:t>실행기</a:t>
-            </a:r>
-            <a:endParaRPr lang="en-US" altLang="ko-KR" dirty="0"/>
-          </a:p>
-          <a:p>
-            <a:r>
-              <a:rPr lang="en-US" altLang="ko-KR" dirty="0"/>
-              <a:t>Phython3 = </a:t>
-            </a:r>
-            <a:r>
-              <a:rPr lang="ko-KR" altLang="en-US" dirty="0"/>
-              <a:t>현재 가상환경</a:t>
-            </a:r>
-            <a:r>
-              <a:rPr lang="en-US" altLang="ko-KR" dirty="0"/>
-              <a:t>(.</a:t>
-            </a:r>
-            <a:r>
-              <a:rPr lang="en-US" altLang="ko-KR" dirty="0" err="1"/>
-              <a:t>venv</a:t>
-            </a:r>
-            <a:r>
-              <a:rPr lang="en-US" altLang="ko-KR" dirty="0"/>
-              <a:t>)</a:t>
-            </a:r>
-            <a:r>
-              <a:rPr lang="ko-KR" altLang="en-US" dirty="0"/>
-              <a:t>에 묶인 기본 커널</a:t>
-            </a:r>
-            <a:endParaRPr lang="en-US" altLang="ko-KR" dirty="0"/>
-          </a:p>
-          <a:p>
-            <a:r>
-              <a:rPr lang="en-US" altLang="ko-KR" dirty="0"/>
-              <a:t>leveraged-</a:t>
-            </a:r>
-            <a:r>
-              <a:rPr lang="en-US" altLang="ko-KR" dirty="0" err="1"/>
-              <a:t>etf</a:t>
-            </a:r>
-            <a:r>
-              <a:rPr lang="en-US" altLang="ko-KR" dirty="0"/>
-              <a:t> = </a:t>
-            </a:r>
-            <a:r>
-              <a:rPr lang="ko-KR" altLang="en-US" dirty="0"/>
-              <a:t>사용자 영역에 명시적으로 등록한 커널</a:t>
-            </a:r>
-            <a:endParaRPr lang="en-US" altLang="ko-KR" dirty="0"/>
-          </a:p>
-          <a:p>
-            <a:r>
-              <a:rPr lang="ko-KR" altLang="en-US" dirty="0"/>
-              <a:t>그걸 </a:t>
-            </a:r>
-            <a:r>
-              <a:rPr lang="ko-KR" altLang="en-US" dirty="0" err="1"/>
-              <a:t>커스터마이즈하려다</a:t>
-            </a:r>
-            <a:r>
-              <a:rPr lang="en-US" altLang="ko-KR" dirty="0"/>
-              <a:t>,</a:t>
-            </a:r>
-            <a:br>
-              <a:rPr lang="en-US" altLang="ko-KR" dirty="0"/>
-            </a:br>
-            <a:r>
-              <a:rPr lang="ko-KR" altLang="en-US" dirty="0"/>
-              <a:t>프로젝트 구조상 필요 없다는 걸 알게 된 상태</a:t>
-            </a:r>
-            <a:endParaRPr lang="en-US" altLang="ko-KR" dirty="0"/>
-          </a:p>
-          <a:p>
-            <a:r>
-              <a:rPr lang="ko-KR" altLang="en-US" dirty="0"/>
-              <a:t>개발 환경 </a:t>
-            </a:r>
-            <a:r>
-              <a:rPr lang="en-US" altLang="ko-KR" dirty="0"/>
-              <a:t>= .</a:t>
-            </a:r>
-            <a:r>
-              <a:rPr lang="en-US" altLang="ko-KR" dirty="0" err="1"/>
-              <a:t>venv</a:t>
-            </a:r>
-            <a:r>
-              <a:rPr lang="ko-KR" altLang="en-US" dirty="0"/>
-              <a:t> </a:t>
-            </a:r>
-            <a:r>
-              <a:rPr lang="en-US" altLang="ko-KR" dirty="0"/>
-              <a:t>(</a:t>
-            </a:r>
-            <a:r>
-              <a:rPr lang="ko-KR" altLang="en-US" dirty="0"/>
-              <a:t>패키지</a:t>
-            </a:r>
-            <a:r>
-              <a:rPr lang="en-US" altLang="ko-KR" dirty="0"/>
-              <a:t>, </a:t>
-            </a:r>
-            <a:r>
-              <a:rPr lang="ko-KR" altLang="en-US" dirty="0"/>
-              <a:t>라이브러리</a:t>
-            </a:r>
-            <a:r>
-              <a:rPr lang="en-US" altLang="ko-KR" dirty="0"/>
-              <a:t>, </a:t>
-            </a:r>
-            <a:r>
-              <a:rPr lang="ko-KR" altLang="en-US" dirty="0"/>
-              <a:t>버전</a:t>
-            </a:r>
-            <a:r>
-              <a:rPr lang="en-US" altLang="ko-KR" dirty="0"/>
-              <a:t>)</a:t>
-            </a:r>
-          </a:p>
-          <a:p>
-            <a:r>
-              <a:rPr lang="ko-KR" altLang="en-US" dirty="0"/>
-              <a:t>커널 </a:t>
-            </a:r>
-            <a:r>
-              <a:rPr lang="en-US" altLang="ko-KR" dirty="0"/>
-              <a:t>= </a:t>
-            </a:r>
-            <a:r>
-              <a:rPr lang="ko-KR" altLang="en-US" dirty="0"/>
-              <a:t>그 환경의 </a:t>
-            </a:r>
-            <a:r>
-              <a:rPr lang="en-US" altLang="ko-KR" dirty="0"/>
-              <a:t>python </a:t>
-            </a:r>
-            <a:r>
-              <a:rPr lang="ko-KR" altLang="en-US" dirty="0"/>
-              <a:t>실행 프로세스</a:t>
-            </a:r>
-            <a:endParaRPr lang="en-US" altLang="ko-KR" dirty="0"/>
-          </a:p>
-        </p:txBody>
-      </p:sp>
-    </p:spTree>
-    <p:extLst>
-      <p:ext uri="{BB962C8B-B14F-4D97-AF65-F5344CB8AC3E}">
-        <p14:creationId xmlns:p14="http://schemas.microsoft.com/office/powerpoint/2010/main" val="1279614339"/>
-      </p:ext>
-    </p:extLst>
-  </p:cSld>
-  <p:clrMapOvr>
-    <a:masterClrMapping/>
-  </p:clrMapOvr>
-</p:sld>
-</file>
-
 <file path=ppt/theme/theme1.xml><?xml version="1.0" encoding="utf-8"?>
 <a:theme xmlns:a="http://schemas.openxmlformats.org/drawingml/2006/main" name="Office 테마">
   <a:themeElements>
